--- a/python-course-ppt/逐节课件/Python讲授课件-单元09.pptx
+++ b/python-course-ppt/逐节课件/Python讲授课件-单元09.pptx
@@ -335,6 +335,86 @@
           </a:p>
         </p:txBody>
       </p:sp>
+      <p:sp>
+        <p:nvSpPr>
+          <p:cNvPr id="2" name="讲课提示"/>
+          <p:cNvSpPr txBox="1"/>
+          <p:nvPr/>
+        </p:nvSpPr>
+        <p:spPr>
+          <a:xfrm>
+            <a:off x="457200" y="457200"/>
+            <a:ext cx="6858000" cy="4800600"/>
+          </a:xfrm>
+          <a:prstGeom prst="rect">
+            <a:avLst/>
+          </a:prstGeom>
+        </p:spPr>
+        <p:txBody>
+          <a:bodyPr wrap="square"/>
+          <a:lstStyle/>
+          <a:p>
+            <a:r>
+              <a:rPr lang="zh-CN" dirty="0"/>
+              <a:t>单元 9 · 单元 9 · 文件与异常</a:t>
+            </a:r>
+          </a:p>
+          <a:p>
+            <a:r>
+              <a:rPr lang="zh-CN" dirty="0"/>
+              <a:t/>
+            </a:r>
+          </a:p>
+          <a:p>
+            <a:r>
+              <a:rPr lang="zh-CN" dirty="0"/>
+              <a:t>本单元包含以下课节：</a:t>
+            </a:r>
+          </a:p>
+          <a:p>
+            <a:r>
+              <a:rPr lang="zh-CN" dirty="0"/>
+              <a:t>· 第 47 节 open() 与三种模式</a:t>
+            </a:r>
+          </a:p>
+          <a:p>
+            <a:r>
+              <a:rPr lang="zh-CN" dirty="0"/>
+              <a:t>· 第 48 节 with 语句与四种读取方式</a:t>
+            </a:r>
+          </a:p>
+          <a:p>
+            <a:r>
+              <a:rPr lang="zh-CN" dirty="0"/>
+              <a:t>· 第 49 节 写文件与异常处理</a:t>
+            </a:r>
+          </a:p>
+          <a:p>
+            <a:r>
+              <a:rPr lang="zh-CN" dirty="0"/>
+              <a:t>· 第 50 节 JSON / CSV 与持久化实战</a:t>
+            </a:r>
+          </a:p>
+          <a:p>
+            <a:r>
+              <a:rPr lang="zh-CN" dirty="0"/>
+              <a:t>· 第 51 节 动手实战、答案与验收</a:t>
+            </a:r>
+          </a:p>
+          <a:p>
+            <a:r>
+              <a:rPr lang="zh-CN" dirty="0"/>
+              <a:t/>
+            </a:r>
+          </a:p>
+          <a:p>
+            <a:r>
+              <a:rPr lang="zh-CN" dirty="0"/>
+              <a:t>开场用 3 分钟讲清：这个单元学完能做出什么，最后会被关卡怎么验。</a:t>
+            </a:r>
+          </a:p>
+        </p:txBody>
+      </p:sp>
     </p:spTree>
   </p:cSld>
   <p:clrMapOvr>
@@ -464,6 +544,110 @@
           </a:p>
         </p:txBody>
       </p:sp>
+      <p:sp>
+        <p:nvSpPr>
+          <p:cNvPr id="2" name="讲课提示"/>
+          <p:cNvSpPr txBox="1"/>
+          <p:nvPr/>
+        </p:nvSpPr>
+        <p:spPr>
+          <a:xfrm>
+            <a:off x="457200" y="457200"/>
+            <a:ext cx="6858000" cy="4800600"/>
+          </a:xfrm>
+          <a:prstGeom prst="rect">
+            <a:avLst/>
+          </a:prstGeom>
+        </p:spPr>
+        <p:txBody>
+          <a:bodyPr wrap="square"/>
+          <a:lstStyle/>
+          <a:p>
+            <a:r>
+              <a:rPr lang="zh-CN" dirty="0"/>
+              <a:t>第 51 节 · 动手实战、答案与验收</a:t>
+            </a:r>
+          </a:p>
+          <a:p>
+            <a:r>
+              <a:rPr lang="zh-CN" dirty="0"/>
+              <a:t>单元 9 · 文件与异常 · W11</a:t>
+            </a:r>
+          </a:p>
+          <a:p>
+            <a:r>
+              <a:rPr lang="zh-CN" dirty="0"/>
+              <a:t/>
+            </a:r>
+          </a:p>
+          <a:p>
+            <a:r>
+              <a:rPr lang="zh-CN" dirty="0"/>
+              <a:t>学习目标：独立完成单元 9 练习，确认文件与异常都过关</a:t>
+            </a:r>
+          </a:p>
+          <a:p>
+            <a:r>
+              <a:rPr lang="zh-CN" dirty="0"/>
+              <a:t/>
+            </a:r>
+          </a:p>
+          <a:p>
+            <a:r>
+              <a:rPr lang="zh-CN" dirty="0"/>
+              <a:t>课堂实操（40 分钟，不看答案）：</a:t>
+            </a:r>
+          </a:p>
+          <a:p>
+            <a:r>
+              <a:rPr lang="zh-CN" dirty="0"/>
+              <a:t>· 限时 30 分钟独立完成基础档</a:t>
+            </a:r>
+          </a:p>
+          <a:p>
+            <a:r>
+              <a:rPr lang="zh-CN" dirty="0"/>
+              <a:t>· 逐题对照答案并打勾验收自测</a:t>
+            </a:r>
+          </a:p>
+          <a:p>
+            <a:r>
+              <a:rPr lang="zh-CN" dirty="0"/>
+              <a:t/>
+            </a:r>
+          </a:p>
+          <a:p>
+            <a:r>
+              <a:rPr lang="zh-CN" dirty="0"/>
+              <a:t>课后作业：</a:t>
+            </a:r>
+          </a:p>
+          <a:p>
+            <a:r>
+              <a:rPr lang="zh-CN" dirty="0"/>
+              <a:t>· 产出：能存到 JSON 的学习笔记程序</a:t>
+            </a:r>
+          </a:p>
+          <a:p>
+            <a:r>
+              <a:rPr lang="zh-CN" dirty="0"/>
+              <a:t>· 完成本单元小结与产出检查</a:t>
+            </a:r>
+          </a:p>
+          <a:p>
+            <a:r>
+              <a:rPr lang="zh-CN" dirty="0"/>
+              <a:t/>
+            </a:r>
+          </a:p>
+          <a:p>
+            <a:r>
+              <a:rPr lang="zh-CN" dirty="0"/>
+              <a:t>节奏：讲 20 分钟 → 学员自己敲 40 分钟（不看答案）→ 对讲评自查 20 分钟 → 写作业 10 分钟。</a:t>
+            </a:r>
+          </a:p>
+        </p:txBody>
+      </p:sp>
     </p:spTree>
   </p:cSld>
   <p:clrMapOvr>
@@ -557,6 +741,74 @@
           </a:p>
         </p:txBody>
       </p:sp>
+      <p:sp>
+        <p:nvSpPr>
+          <p:cNvPr id="2" name="讲课提示"/>
+          <p:cNvSpPr txBox="1"/>
+          <p:nvPr/>
+        </p:nvSpPr>
+        <p:spPr>
+          <a:xfrm>
+            <a:off x="457200" y="457200"/>
+            <a:ext cx="6858000" cy="4800600"/>
+          </a:xfrm>
+          <a:prstGeom prst="rect">
+            <a:avLst/>
+          </a:prstGeom>
+        </p:spPr>
+        <p:txBody>
+          <a:bodyPr wrap="square"/>
+          <a:lstStyle/>
+          <a:p>
+            <a:r>
+              <a:rPr lang="zh-CN" dirty="0"/>
+              <a:t>第 51 节 · 核心知识点：动手实战、答案与验收</a:t>
+            </a:r>
+          </a:p>
+          <a:p>
+            <a:r>
+              <a:rPr lang="zh-CN" dirty="0"/>
+              <a:t/>
+            </a:r>
+          </a:p>
+          <a:p>
+            <a:r>
+              <a:rPr lang="zh-CN" dirty="0"/>
+              <a:t>讲这一页时：先让学生说出上节课的结论，再逐块讲要点。</a:t>
+            </a:r>
+          </a:p>
+          <a:p>
+            <a:r>
+              <a:rPr lang="zh-CN" dirty="0"/>
+              <a:t>每讲完一块，问一句「这一步如果写错了，报错会长什么样？」——把错误提前讲。</a:t>
+            </a:r>
+          </a:p>
+          <a:p>
+            <a:r>
+              <a:rPr lang="zh-CN" dirty="0"/>
+              <a:t/>
+            </a:r>
+          </a:p>
+          <a:p>
+            <a:r>
+              <a:rPr lang="zh-CN" dirty="0"/>
+              <a:t>本节目标：独立完成单元 9 练习，确认文件与异常都过关</a:t>
+            </a:r>
+          </a:p>
+          <a:p>
+            <a:r>
+              <a:rPr lang="zh-CN" dirty="0"/>
+              <a:t/>
+            </a:r>
+          </a:p>
+          <a:p>
+            <a:r>
+              <a:rPr lang="zh-CN" dirty="0"/>
+              <a:t>看不到懂的地方，回讲义对应小节读一遍，再回来对着这页复述一次——能讲出来才算真懂。</a:t>
+            </a:r>
+          </a:p>
+        </p:txBody>
+      </p:sp>
     </p:spTree>
   </p:cSld>
   <p:clrMapOvr>
@@ -626,6 +878,50 @@
           </a:p>
         </p:txBody>
       </p:sp>
+      <p:sp>
+        <p:nvSpPr>
+          <p:cNvPr id="2" name="讲课提示"/>
+          <p:cNvSpPr txBox="1"/>
+          <p:nvPr/>
+        </p:nvSpPr>
+        <p:spPr>
+          <a:xfrm>
+            <a:off x="457200" y="457200"/>
+            <a:ext cx="6858000" cy="4800600"/>
+          </a:xfrm>
+          <a:prstGeom prst="rect">
+            <a:avLst/>
+          </a:prstGeom>
+        </p:spPr>
+        <p:txBody>
+          <a:bodyPr wrap="square"/>
+          <a:lstStyle/>
+          <a:p>
+            <a:r>
+              <a:rPr lang="zh-CN" dirty="0"/>
+              <a:t>单元 9 小结 · 单元 9 · 小结</a:t>
+            </a:r>
+          </a:p>
+          <a:p>
+            <a:r>
+              <a:rPr lang="zh-CN" dirty="0"/>
+              <a:t/>
+            </a:r>
+          </a:p>
+          <a:p>
+            <a:r>
+              <a:rPr lang="zh-CN" dirty="0"/>
+              <a:t>收尾动作：让学生合上讲义，口述本单元三个最重要的结论；说不出来的，回对应课节。</a:t>
+            </a:r>
+          </a:p>
+          <a:p>
+            <a:r>
+              <a:rPr lang="zh-CN" dirty="0"/>
+              <a:t>然后当场勾一遍本单元课节的「已完成」，没打勾的进下一单元前补掉。</a:t>
+            </a:r>
+          </a:p>
+        </p:txBody>
+      </p:sp>
     </p:spTree>
   </p:cSld>
   <p:clrMapOvr>
@@ -749,6 +1045,104 @@
           </a:p>
         </p:txBody>
       </p:sp>
+      <p:sp>
+        <p:nvSpPr>
+          <p:cNvPr id="2" name="讲课提示"/>
+          <p:cNvSpPr txBox="1"/>
+          <p:nvPr/>
+        </p:nvSpPr>
+        <p:spPr>
+          <a:xfrm>
+            <a:off x="457200" y="457200"/>
+            <a:ext cx="6858000" cy="4800600"/>
+          </a:xfrm>
+          <a:prstGeom prst="rect">
+            <a:avLst/>
+          </a:prstGeom>
+        </p:spPr>
+        <p:txBody>
+          <a:bodyPr wrap="square"/>
+          <a:lstStyle/>
+          <a:p>
+            <a:r>
+              <a:rPr lang="zh-CN" dirty="0"/>
+              <a:t>第 47 节 · open() 与三种模式</a:t>
+            </a:r>
+          </a:p>
+          <a:p>
+            <a:r>
+              <a:rPr lang="zh-CN" dirty="0"/>
+              <a:t>单元 9 · 文件与异常 · W11</a:t>
+            </a:r>
+          </a:p>
+          <a:p>
+            <a:r>
+              <a:rPr lang="zh-CN" dirty="0"/>
+              <a:t/>
+            </a:r>
+          </a:p>
+          <a:p>
+            <a:r>
+              <a:rPr lang="zh-CN" dirty="0"/>
+              <a:t>学习目标：掌握 r / w / a 三种模式，理解变量活不过程序结束</a:t>
+            </a:r>
+          </a:p>
+          <a:p>
+            <a:r>
+              <a:rPr lang="zh-CN" dirty="0"/>
+              <a:t/>
+            </a:r>
+          </a:p>
+          <a:p>
+            <a:r>
+              <a:rPr lang="zh-CN" dirty="0"/>
+              <a:t>课堂实操（40 分钟，不看答案）：</a:t>
+            </a:r>
+          </a:p>
+          <a:p>
+            <a:r>
+              <a:rPr lang="zh-CN" dirty="0"/>
+              <a:t>· 现场演示 r / w / a 三种模式的效果</a:t>
+            </a:r>
+          </a:p>
+          <a:p>
+            <a:r>
+              <a:rPr lang="zh-CN" dirty="0"/>
+              <a:t>· 对比读同一个文件两次的差别</a:t>
+            </a:r>
+          </a:p>
+          <a:p>
+            <a:r>
+              <a:rPr lang="zh-CN" dirty="0"/>
+              <a:t/>
+            </a:r>
+          </a:p>
+          <a:p>
+            <a:r>
+              <a:rPr lang="zh-CN" dirty="0"/>
+              <a:t>课后作业：</a:t>
+            </a:r>
+          </a:p>
+          <a:p>
+            <a:r>
+              <a:rPr lang="zh-CN" dirty="0"/>
+              <a:t>· 完成动手练习 9-1 ~ 9-2</a:t>
+            </a:r>
+          </a:p>
+          <a:p>
+            <a:r>
+              <a:rPr lang="zh-CN" dirty="0"/>
+              <a:t/>
+            </a:r>
+          </a:p>
+          <a:p>
+            <a:r>
+              <a:rPr lang="zh-CN" dirty="0"/>
+              <a:t>节奏：讲 20 分钟 → 学员自己敲 40 分钟（不看答案）→ 对讲评自查 20 分钟 → 写作业 10 分钟。</a:t>
+            </a:r>
+          </a:p>
+        </p:txBody>
+      </p:sp>
     </p:spTree>
   </p:cSld>
   <p:clrMapOvr>
@@ -842,6 +1236,74 @@
           </a:p>
         </p:txBody>
       </p:sp>
+      <p:sp>
+        <p:nvSpPr>
+          <p:cNvPr id="2" name="讲课提示"/>
+          <p:cNvSpPr txBox="1"/>
+          <p:nvPr/>
+        </p:nvSpPr>
+        <p:spPr>
+          <a:xfrm>
+            <a:off x="457200" y="457200"/>
+            <a:ext cx="6858000" cy="4800600"/>
+          </a:xfrm>
+          <a:prstGeom prst="rect">
+            <a:avLst/>
+          </a:prstGeom>
+        </p:spPr>
+        <p:txBody>
+          <a:bodyPr wrap="square"/>
+          <a:lstStyle/>
+          <a:p>
+            <a:r>
+              <a:rPr lang="zh-CN" dirty="0"/>
+              <a:t>第 47 节 · 核心知识点：open() 与三种模式</a:t>
+            </a:r>
+          </a:p>
+          <a:p>
+            <a:r>
+              <a:rPr lang="zh-CN" dirty="0"/>
+              <a:t/>
+            </a:r>
+          </a:p>
+          <a:p>
+            <a:r>
+              <a:rPr lang="zh-CN" dirty="0"/>
+              <a:t>讲这一页时：先让学生说出上节课的结论，再逐块讲要点。</a:t>
+            </a:r>
+          </a:p>
+          <a:p>
+            <a:r>
+              <a:rPr lang="zh-CN" dirty="0"/>
+              <a:t>每讲完一块，问一句「这一步如果写错了，报错会长什么样？」——把错误提前讲。</a:t>
+            </a:r>
+          </a:p>
+          <a:p>
+            <a:r>
+              <a:rPr lang="zh-CN" dirty="0"/>
+              <a:t/>
+            </a:r>
+          </a:p>
+          <a:p>
+            <a:r>
+              <a:rPr lang="zh-CN" dirty="0"/>
+              <a:t>本节目标：掌握 r / w / a 三种模式，理解变量活不过程序结束</a:t>
+            </a:r>
+          </a:p>
+          <a:p>
+            <a:r>
+              <a:rPr lang="zh-CN" dirty="0"/>
+              <a:t/>
+            </a:r>
+          </a:p>
+          <a:p>
+            <a:r>
+              <a:rPr lang="zh-CN" dirty="0"/>
+              <a:t>看不到懂的地方，回讲义对应小节读一遍，再回来对着这页复述一次——能讲出来才算真懂。</a:t>
+            </a:r>
+          </a:p>
+        </p:txBody>
+      </p:sp>
     </p:spTree>
   </p:cSld>
   <p:clrMapOvr>
@@ -965,6 +1427,104 @@
           </a:p>
         </p:txBody>
       </p:sp>
+      <p:sp>
+        <p:nvSpPr>
+          <p:cNvPr id="2" name="讲课提示"/>
+          <p:cNvSpPr txBox="1"/>
+          <p:nvPr/>
+        </p:nvSpPr>
+        <p:spPr>
+          <a:xfrm>
+            <a:off x="457200" y="457200"/>
+            <a:ext cx="6858000" cy="4800600"/>
+          </a:xfrm>
+          <a:prstGeom prst="rect">
+            <a:avLst/>
+          </a:prstGeom>
+        </p:spPr>
+        <p:txBody>
+          <a:bodyPr wrap="square"/>
+          <a:lstStyle/>
+          <a:p>
+            <a:r>
+              <a:rPr lang="zh-CN" dirty="0"/>
+              <a:t>第 48 节 · with 语句与四种读取方式</a:t>
+            </a:r>
+          </a:p>
+          <a:p>
+            <a:r>
+              <a:rPr lang="zh-CN" dirty="0"/>
+              <a:t>单元 9 · 文件与异常 · W11</a:t>
+            </a:r>
+          </a:p>
+          <a:p>
+            <a:r>
+              <a:rPr lang="zh-CN" dirty="0"/>
+              <a:t/>
+            </a:r>
+          </a:p>
+          <a:p>
+            <a:r>
+              <a:rPr lang="zh-CN" dirty="0"/>
+              <a:t>学习目标：掌握 with 的真实作用与read / readline / readlines 的区别</a:t>
+            </a:r>
+          </a:p>
+          <a:p>
+            <a:r>
+              <a:rPr lang="zh-CN" dirty="0"/>
+              <a:t/>
+            </a:r>
+          </a:p>
+          <a:p>
+            <a:r>
+              <a:rPr lang="zh-CN" dirty="0"/>
+              <a:t>课堂实操（40 分钟，不看答案）：</a:t>
+            </a:r>
+          </a:p>
+          <a:p>
+            <a:r>
+              <a:rPr lang="zh-CN" dirty="0"/>
+              <a:t>· 故意不写 with，让程序中途崩溃观察文件句柄泄漏</a:t>
+            </a:r>
+          </a:p>
+          <a:p>
+            <a:r>
+              <a:rPr lang="zh-CN" dirty="0"/>
+              <a:t>· 对比四种读取方式的返回类型</a:t>
+            </a:r>
+          </a:p>
+          <a:p>
+            <a:r>
+              <a:rPr lang="zh-CN" dirty="0"/>
+              <a:t/>
+            </a:r>
+          </a:p>
+          <a:p>
+            <a:r>
+              <a:rPr lang="zh-CN" dirty="0"/>
+              <a:t>课后作业：</a:t>
+            </a:r>
+          </a:p>
+          <a:p>
+            <a:r>
+              <a:rPr lang="zh-CN" dirty="0"/>
+              <a:t>· 完成动手练习 9-3</a:t>
+            </a:r>
+          </a:p>
+          <a:p>
+            <a:r>
+              <a:rPr lang="zh-CN" dirty="0"/>
+              <a:t/>
+            </a:r>
+          </a:p>
+          <a:p>
+            <a:r>
+              <a:rPr lang="zh-CN" dirty="0"/>
+              <a:t>节奏：讲 20 分钟 → 学员自己敲 40 分钟（不看答案）→ 对讲评自查 20 分钟 → 写作业 10 分钟。</a:t>
+            </a:r>
+          </a:p>
+        </p:txBody>
+      </p:sp>
     </p:spTree>
   </p:cSld>
   <p:clrMapOvr>
@@ -1058,6 +1618,74 @@
           </a:p>
         </p:txBody>
       </p:sp>
+      <p:sp>
+        <p:nvSpPr>
+          <p:cNvPr id="2" name="讲课提示"/>
+          <p:cNvSpPr txBox="1"/>
+          <p:nvPr/>
+        </p:nvSpPr>
+        <p:spPr>
+          <a:xfrm>
+            <a:off x="457200" y="457200"/>
+            <a:ext cx="6858000" cy="4800600"/>
+          </a:xfrm>
+          <a:prstGeom prst="rect">
+            <a:avLst/>
+          </a:prstGeom>
+        </p:spPr>
+        <p:txBody>
+          <a:bodyPr wrap="square"/>
+          <a:lstStyle/>
+          <a:p>
+            <a:r>
+              <a:rPr lang="zh-CN" dirty="0"/>
+              <a:t>第 48 节 · 核心知识点：with 语句与四种读取方式</a:t>
+            </a:r>
+          </a:p>
+          <a:p>
+            <a:r>
+              <a:rPr lang="zh-CN" dirty="0"/>
+              <a:t/>
+            </a:r>
+          </a:p>
+          <a:p>
+            <a:r>
+              <a:rPr lang="zh-CN" dirty="0"/>
+              <a:t>讲这一页时：先让学生说出上节课的结论，再逐块讲要点。</a:t>
+            </a:r>
+          </a:p>
+          <a:p>
+            <a:r>
+              <a:rPr lang="zh-CN" dirty="0"/>
+              <a:t>每讲完一块，问一句「这一步如果写错了，报错会长什么样？」——把错误提前讲。</a:t>
+            </a:r>
+          </a:p>
+          <a:p>
+            <a:r>
+              <a:rPr lang="zh-CN" dirty="0"/>
+              <a:t/>
+            </a:r>
+          </a:p>
+          <a:p>
+            <a:r>
+              <a:rPr lang="zh-CN" dirty="0"/>
+              <a:t>本节目标：掌握 with 的真实作用与read / readline / readlines 的区别</a:t>
+            </a:r>
+          </a:p>
+          <a:p>
+            <a:r>
+              <a:rPr lang="zh-CN" dirty="0"/>
+              <a:t/>
+            </a:r>
+          </a:p>
+          <a:p>
+            <a:r>
+              <a:rPr lang="zh-CN" dirty="0"/>
+              <a:t>看不到懂的地方，回讲义对应小节读一遍，再回来对着这页复述一次——能讲出来才算真懂。</a:t>
+            </a:r>
+          </a:p>
+        </p:txBody>
+      </p:sp>
     </p:spTree>
   </p:cSld>
   <p:clrMapOvr>
@@ -1181,6 +1809,104 @@
           </a:p>
         </p:txBody>
       </p:sp>
+      <p:sp>
+        <p:nvSpPr>
+          <p:cNvPr id="2" name="讲课提示"/>
+          <p:cNvSpPr txBox="1"/>
+          <p:nvPr/>
+        </p:nvSpPr>
+        <p:spPr>
+          <a:xfrm>
+            <a:off x="457200" y="457200"/>
+            <a:ext cx="6858000" cy="4800600"/>
+          </a:xfrm>
+          <a:prstGeom prst="rect">
+            <a:avLst/>
+          </a:prstGeom>
+        </p:spPr>
+        <p:txBody>
+          <a:bodyPr wrap="square"/>
+          <a:lstStyle/>
+          <a:p>
+            <a:r>
+              <a:rPr lang="zh-CN" dirty="0"/>
+              <a:t>第 49 节 · 写文件与异常处理</a:t>
+            </a:r>
+          </a:p>
+          <a:p>
+            <a:r>
+              <a:rPr lang="zh-CN" dirty="0"/>
+              <a:t>单元 9 · 文件与异常 · W11</a:t>
+            </a:r>
+          </a:p>
+          <a:p>
+            <a:r>
+              <a:rPr lang="zh-CN" dirty="0"/>
+              <a:t/>
+            </a:r>
+          </a:p>
+          <a:p>
+            <a:r>
+              <a:rPr lang="zh-CN" dirty="0"/>
+              <a:t>学习目标：掌握写文件与 try / except / else / finally，知道 else 的真正用法</a:t>
+            </a:r>
+          </a:p>
+          <a:p>
+            <a:r>
+              <a:rPr lang="zh-CN" dirty="0"/>
+              <a:t/>
+            </a:r>
+          </a:p>
+          <a:p>
+            <a:r>
+              <a:rPr lang="zh-CN" dirty="0"/>
+              <a:t>课堂实操（40 分钟，不看答案）：</a:t>
+            </a:r>
+          </a:p>
+          <a:p>
+            <a:r>
+              <a:rPr lang="zh-CN" dirty="0"/>
+              <a:t>· 故意触发 ValueError 和 FileNotFoundError 并处理</a:t>
+            </a:r>
+          </a:p>
+          <a:p>
+            <a:r>
+              <a:rPr lang="zh-CN" dirty="0"/>
+              <a:t>· 写一个「只在成功时保存文件」的函数演示 else</a:t>
+            </a:r>
+          </a:p>
+          <a:p>
+            <a:r>
+              <a:rPr lang="zh-CN" dirty="0"/>
+              <a:t/>
+            </a:r>
+          </a:p>
+          <a:p>
+            <a:r>
+              <a:rPr lang="zh-CN" dirty="0"/>
+              <a:t>课后作业：</a:t>
+            </a:r>
+          </a:p>
+          <a:p>
+            <a:r>
+              <a:rPr lang="zh-CN" dirty="0"/>
+              <a:t>· 完成动手练习 9-4 ~ 9-6</a:t>
+            </a:r>
+          </a:p>
+          <a:p>
+            <a:r>
+              <a:rPr lang="zh-CN" dirty="0"/>
+              <a:t/>
+            </a:r>
+          </a:p>
+          <a:p>
+            <a:r>
+              <a:rPr lang="zh-CN" dirty="0"/>
+              <a:t>节奏：讲 20 分钟 → 学员自己敲 40 分钟（不看答案）→ 对讲评自查 20 分钟 → 写作业 10 分钟。</a:t>
+            </a:r>
+          </a:p>
+        </p:txBody>
+      </p:sp>
     </p:spTree>
   </p:cSld>
   <p:clrMapOvr>
@@ -1274,6 +2000,74 @@
           </a:p>
         </p:txBody>
       </p:sp>
+      <p:sp>
+        <p:nvSpPr>
+          <p:cNvPr id="2" name="讲课提示"/>
+          <p:cNvSpPr txBox="1"/>
+          <p:nvPr/>
+        </p:nvSpPr>
+        <p:spPr>
+          <a:xfrm>
+            <a:off x="457200" y="457200"/>
+            <a:ext cx="6858000" cy="4800600"/>
+          </a:xfrm>
+          <a:prstGeom prst="rect">
+            <a:avLst/>
+          </a:prstGeom>
+        </p:spPr>
+        <p:txBody>
+          <a:bodyPr wrap="square"/>
+          <a:lstStyle/>
+          <a:p>
+            <a:r>
+              <a:rPr lang="zh-CN" dirty="0"/>
+              <a:t>第 49 节 · 核心知识点：写文件与异常处理</a:t>
+            </a:r>
+          </a:p>
+          <a:p>
+            <a:r>
+              <a:rPr lang="zh-CN" dirty="0"/>
+              <a:t/>
+            </a:r>
+          </a:p>
+          <a:p>
+            <a:r>
+              <a:rPr lang="zh-CN" dirty="0"/>
+              <a:t>讲这一页时：先让学生说出上节课的结论，再逐块讲要点。</a:t>
+            </a:r>
+          </a:p>
+          <a:p>
+            <a:r>
+              <a:rPr lang="zh-CN" dirty="0"/>
+              <a:t>每讲完一块，问一句「这一步如果写错了，报错会长什么样？」——把错误提前讲。</a:t>
+            </a:r>
+          </a:p>
+          <a:p>
+            <a:r>
+              <a:rPr lang="zh-CN" dirty="0"/>
+              <a:t/>
+            </a:r>
+          </a:p>
+          <a:p>
+            <a:r>
+              <a:rPr lang="zh-CN" dirty="0"/>
+              <a:t>本节目标：掌握写文件与 try / except / else / finally，知道 else 的真正用法</a:t>
+            </a:r>
+          </a:p>
+          <a:p>
+            <a:r>
+              <a:rPr lang="zh-CN" dirty="0"/>
+              <a:t/>
+            </a:r>
+          </a:p>
+          <a:p>
+            <a:r>
+              <a:rPr lang="zh-CN" dirty="0"/>
+              <a:t>看不到懂的地方，回讲义对应小节读一遍，再回来对着这页复述一次——能讲出来才算真懂。</a:t>
+            </a:r>
+          </a:p>
+        </p:txBody>
+      </p:sp>
     </p:spTree>
   </p:cSld>
   <p:clrMapOvr>
@@ -1397,6 +2191,104 @@
           </a:p>
         </p:txBody>
       </p:sp>
+      <p:sp>
+        <p:nvSpPr>
+          <p:cNvPr id="2" name="讲课提示"/>
+          <p:cNvSpPr txBox="1"/>
+          <p:nvPr/>
+        </p:nvSpPr>
+        <p:spPr>
+          <a:xfrm>
+            <a:off x="457200" y="457200"/>
+            <a:ext cx="6858000" cy="4800600"/>
+          </a:xfrm>
+          <a:prstGeom prst="rect">
+            <a:avLst/>
+          </a:prstGeom>
+        </p:spPr>
+        <p:txBody>
+          <a:bodyPr wrap="square"/>
+          <a:lstStyle/>
+          <a:p>
+            <a:r>
+              <a:rPr lang="zh-CN" dirty="0"/>
+              <a:t>第 50 节 · JSON / CSV 与持久化实战</a:t>
+            </a:r>
+          </a:p>
+          <a:p>
+            <a:r>
+              <a:rPr lang="zh-CN" dirty="0"/>
+              <a:t>单元 9 · 文件与异常 · W11</a:t>
+            </a:r>
+          </a:p>
+          <a:p>
+            <a:r>
+              <a:rPr lang="zh-CN" dirty="0"/>
+              <a:t/>
+            </a:r>
+          </a:p>
+          <a:p>
+            <a:r>
+              <a:rPr lang="zh-CN" dirty="0"/>
+              <a:t>学习目标：能用 JSON 让数据被记住，理解它和嵌套结构的关系</a:t>
+            </a:r>
+          </a:p>
+          <a:p>
+            <a:r>
+              <a:rPr lang="zh-CN" dirty="0"/>
+              <a:t/>
+            </a:r>
+          </a:p>
+          <a:p>
+            <a:r>
+              <a:rPr lang="zh-CN" dirty="0"/>
+              <a:t>课堂实操（40 分钟，不看答案）：</a:t>
+            </a:r>
+          </a:p>
+          <a:p>
+            <a:r>
+              <a:rPr lang="zh-CN" dirty="0"/>
+              <a:t>· 把嵌套字典存成 JSON 再读回来</a:t>
+            </a:r>
+          </a:p>
+          <a:p>
+            <a:r>
+              <a:rPr lang="zh-CN" dirty="0"/>
+              <a:t>· 读写一个 CSV 表格</a:t>
+            </a:r>
+          </a:p>
+          <a:p>
+            <a:r>
+              <a:rPr lang="zh-CN" dirty="0"/>
+              <a:t/>
+            </a:r>
+          </a:p>
+          <a:p>
+            <a:r>
+              <a:rPr lang="zh-CN" dirty="0"/>
+              <a:t>课后作业：</a:t>
+            </a:r>
+          </a:p>
+          <a:p>
+            <a:r>
+              <a:rPr lang="zh-CN" dirty="0"/>
+              <a:t>· ★ 动手项目 10.1–10.13 学习笔记管理</a:t>
+            </a:r>
+          </a:p>
+          <a:p>
+            <a:r>
+              <a:rPr lang="zh-CN" dirty="0"/>
+              <a:t/>
+            </a:r>
+          </a:p>
+          <a:p>
+            <a:r>
+              <a:rPr lang="zh-CN" dirty="0"/>
+              <a:t>节奏：讲 20 分钟 → 学员自己敲 40 分钟（不看答案）→ 对讲评自查 20 分钟 → 写作业 10 分钟。</a:t>
+            </a:r>
+          </a:p>
+        </p:txBody>
+      </p:sp>
     </p:spTree>
   </p:cSld>
   <p:clrMapOvr>
@@ -1422,6 +2314,74 @@
           <a:chExt cx="0" cy="0"/>
         </a:xfrm>
       </p:grpSpPr>
+      <p:sp>
+        <p:nvSpPr>
+          <p:cNvPr id="2" name="讲课提示"/>
+          <p:cNvSpPr txBox="1"/>
+          <p:nvPr/>
+        </p:nvSpPr>
+        <p:spPr>
+          <a:xfrm>
+            <a:off x="457200" y="457200"/>
+            <a:ext cx="6858000" cy="4800600"/>
+          </a:xfrm>
+          <a:prstGeom prst="rect">
+            <a:avLst/>
+          </a:prstGeom>
+        </p:spPr>
+        <p:txBody>
+          <a:bodyPr wrap="square"/>
+          <a:lstStyle/>
+          <a:p>
+            <a:r>
+              <a:rPr lang="zh-CN" dirty="0"/>
+              <a:t>第 50 节 · 核心知识点：JSON / CSV 与持久化实战</a:t>
+            </a:r>
+          </a:p>
+          <a:p>
+            <a:r>
+              <a:rPr lang="zh-CN" dirty="0"/>
+              <a:t/>
+            </a:r>
+          </a:p>
+          <a:p>
+            <a:r>
+              <a:rPr lang="zh-CN" dirty="0"/>
+              <a:t>讲这一页时：先让学生说出上节课的结论，再逐块讲要点。</a:t>
+            </a:r>
+          </a:p>
+          <a:p>
+            <a:r>
+              <a:rPr lang="zh-CN" dirty="0"/>
+              <a:t>每讲完一块，问一句「这一步如果写错了，报错会长什么样？」——把错误提前讲。</a:t>
+            </a:r>
+          </a:p>
+          <a:p>
+            <a:r>
+              <a:rPr lang="zh-CN" dirty="0"/>
+              <a:t/>
+            </a:r>
+          </a:p>
+          <a:p>
+            <a:r>
+              <a:rPr lang="zh-CN" dirty="0"/>
+              <a:t>本节目标：能用 JSON 让数据被记住，理解它和嵌套结构的关系</a:t>
+            </a:r>
+          </a:p>
+          <a:p>
+            <a:r>
+              <a:rPr lang="zh-CN" dirty="0"/>
+              <a:t/>
+            </a:r>
+          </a:p>
+          <a:p>
+            <a:r>
+              <a:rPr lang="zh-CN" dirty="0"/>
+              <a:t>看不到懂的地方，回讲义对应小节读一遍，再回来对着这页复述一次——能讲出来才算真懂。</a:t>
+            </a:r>
+          </a:p>
+        </p:txBody>
+      </p:sp>
       <p:sp>
         <p:nvSpPr>
           <p:cNvPr id="2" name="讲课提示"/>

--- a/python-course-ppt/逐节课件/Python讲授课件-单元09.pptx
+++ b/python-course-ppt/逐节课件/Python讲授课件-单元09.pptx
@@ -238,2226 +238,6 @@
 </p:notesMaster>
 </file>
 
-<file path=ppt/notesSlides/notesSlide1.xml><?xml version="1.0" encoding="utf-8"?>
-<p:notes xmlns:a="http://schemas.openxmlformats.org/drawingml/2006/main" xmlns:p="http://schemas.openxmlformats.org/presentationml/2006/main" xmlns:r="http://schemas.openxmlformats.org/officeDocument/2006/relationships">
-  <p:cSld>
-    <p:spTree>
-      <p:nvGrpSpPr>
-        <p:cNvPr id="1" name=""/>
-        <p:cNvGrpSpPr/>
-        <p:nvPr/>
-      </p:nvGrpSpPr>
-      <p:grpSpPr>
-        <a:xfrm>
-          <a:off x="0" y="0"/>
-          <a:ext cx="0" cy="0"/>
-          <a:chOff x="0" y="0"/>
-          <a:chExt cx="0" cy="0"/>
-        </a:xfrm>
-      </p:grpSpPr>
-      <p:sp>
-        <p:nvSpPr>
-          <p:cNvPr id="2" name="讲课提示"/>
-          <p:cNvSpPr txBox="1"/>
-          <p:nvPr/>
-        </p:nvSpPr>
-        <p:spPr>
-          <a:xfrm>
-            <a:off x="457200" y="457200"/>
-            <a:ext cx="6858000" cy="4800600"/>
-          </a:xfrm>
-          <a:prstGeom prst="rect">
-            <a:avLst/>
-          </a:prstGeom>
-        </p:spPr>
-        <p:txBody>
-          <a:bodyPr wrap="square"/>
-          <a:lstStyle/>
-          <a:p>
-            <a:r>
-              <a:rPr lang="zh-CN" dirty="0"/>
-              <a:t>单元 9 · 单元 9 · 文件与异常</a:t>
-            </a:r>
-          </a:p>
-          <a:p>
-            <a:r>
-              <a:rPr lang="zh-CN" dirty="0"/>
-              <a:t/>
-            </a:r>
-          </a:p>
-          <a:p>
-            <a:r>
-              <a:rPr lang="zh-CN" dirty="0"/>
-              <a:t>本单元包含以下课节：</a:t>
-            </a:r>
-          </a:p>
-          <a:p>
-            <a:r>
-              <a:rPr lang="zh-CN" dirty="0"/>
-              <a:t>· 第 47 节 open() 与三种模式</a:t>
-            </a:r>
-          </a:p>
-          <a:p>
-            <a:r>
-              <a:rPr lang="zh-CN" dirty="0"/>
-              <a:t>· 第 48 节 with 语句与四种读取方式</a:t>
-            </a:r>
-          </a:p>
-          <a:p>
-            <a:r>
-              <a:rPr lang="zh-CN" dirty="0"/>
-              <a:t>· 第 49 节 写文件与异常处理</a:t>
-            </a:r>
-          </a:p>
-          <a:p>
-            <a:r>
-              <a:rPr lang="zh-CN" dirty="0"/>
-              <a:t>· 第 50 节 JSON / CSV 与持久化实战</a:t>
-            </a:r>
-          </a:p>
-          <a:p>
-            <a:r>
-              <a:rPr lang="zh-CN" dirty="0"/>
-              <a:t>· 第 51 节 动手实战、答案与验收</a:t>
-            </a:r>
-          </a:p>
-          <a:p>
-            <a:r>
-              <a:rPr lang="zh-CN" dirty="0"/>
-              <a:t/>
-            </a:r>
-          </a:p>
-          <a:p>
-            <a:r>
-              <a:rPr lang="zh-CN" dirty="0"/>
-              <a:t>开场用 3 分钟讲清：这个单元学完能做出什么，最后会被关卡怎么验。</a:t>
-            </a:r>
-          </a:p>
-        </p:txBody>
-      </p:sp>
-      <p:sp>
-        <p:nvSpPr>
-          <p:cNvPr id="2" name="讲课提示"/>
-          <p:cNvSpPr txBox="1"/>
-          <p:nvPr/>
-        </p:nvSpPr>
-        <p:spPr>
-          <a:xfrm>
-            <a:off x="457200" y="457200"/>
-            <a:ext cx="6858000" cy="4800600"/>
-          </a:xfrm>
-          <a:prstGeom prst="rect">
-            <a:avLst/>
-          </a:prstGeom>
-        </p:spPr>
-        <p:txBody>
-          <a:bodyPr wrap="square"/>
-          <a:lstStyle/>
-          <a:p>
-            <a:r>
-              <a:rPr lang="zh-CN" dirty="0"/>
-              <a:t>单元 9 · 单元 9 · 文件与异常</a:t>
-            </a:r>
-          </a:p>
-          <a:p>
-            <a:r>
-              <a:rPr lang="zh-CN" dirty="0"/>
-              <a:t/>
-            </a:r>
-          </a:p>
-          <a:p>
-            <a:r>
-              <a:rPr lang="zh-CN" dirty="0"/>
-              <a:t>本单元包含以下课节：</a:t>
-            </a:r>
-          </a:p>
-          <a:p>
-            <a:r>
-              <a:rPr lang="zh-CN" dirty="0"/>
-              <a:t>· 第 47 节 open() 与三种模式</a:t>
-            </a:r>
-          </a:p>
-          <a:p>
-            <a:r>
-              <a:rPr lang="zh-CN" dirty="0"/>
-              <a:t>· 第 48 节 with 语句与四种读取方式</a:t>
-            </a:r>
-          </a:p>
-          <a:p>
-            <a:r>
-              <a:rPr lang="zh-CN" dirty="0"/>
-              <a:t>· 第 49 节 写文件与异常处理</a:t>
-            </a:r>
-          </a:p>
-          <a:p>
-            <a:r>
-              <a:rPr lang="zh-CN" dirty="0"/>
-              <a:t>· 第 50 节 JSON / CSV 与持久化实战</a:t>
-            </a:r>
-          </a:p>
-          <a:p>
-            <a:r>
-              <a:rPr lang="zh-CN" dirty="0"/>
-              <a:t>· 第 51 节 动手实战、答案与验收</a:t>
-            </a:r>
-          </a:p>
-          <a:p>
-            <a:r>
-              <a:rPr lang="zh-CN" dirty="0"/>
-              <a:t/>
-            </a:r>
-          </a:p>
-          <a:p>
-            <a:r>
-              <a:rPr lang="zh-CN" dirty="0"/>
-              <a:t>开场用 3 分钟讲清：这个单元学完能做出什么，最后会被关卡怎么验。</a:t>
-            </a:r>
-          </a:p>
-        </p:txBody>
-      </p:sp>
-    </p:spTree>
-  </p:cSld>
-  <p:clrMapOvr>
-    <a:masterClrMapping/>
-  </p:clrMapOvr>
-</p:notes>
-</file>
-
-<file path=ppt/notesSlides/notesSlide10.xml><?xml version="1.0" encoding="utf-8"?>
-<p:notes xmlns:a="http://schemas.openxmlformats.org/drawingml/2006/main" xmlns:p="http://schemas.openxmlformats.org/presentationml/2006/main" xmlns:r="http://schemas.openxmlformats.org/officeDocument/2006/relationships">
-  <p:cSld>
-    <p:spTree>
-      <p:nvGrpSpPr>
-        <p:cNvPr id="1" name=""/>
-        <p:cNvGrpSpPr/>
-        <p:nvPr/>
-      </p:nvGrpSpPr>
-      <p:grpSpPr>
-        <a:xfrm>
-          <a:off x="0" y="0"/>
-          <a:ext cx="0" cy="0"/>
-          <a:chOff x="0" y="0"/>
-          <a:chExt cx="0" cy="0"/>
-        </a:xfrm>
-      </p:grpSpPr>
-      <p:sp>
-        <p:nvSpPr>
-          <p:cNvPr id="2" name="讲课提示"/>
-          <p:cNvSpPr txBox="1"/>
-          <p:nvPr/>
-        </p:nvSpPr>
-        <p:spPr>
-          <a:xfrm>
-            <a:off x="457200" y="457200"/>
-            <a:ext cx="6858000" cy="4800600"/>
-          </a:xfrm>
-          <a:prstGeom prst="rect">
-            <a:avLst/>
-          </a:prstGeom>
-        </p:spPr>
-        <p:txBody>
-          <a:bodyPr wrap="square"/>
-          <a:lstStyle/>
-          <a:p>
-            <a:r>
-              <a:rPr lang="zh-CN" dirty="0"/>
-              <a:t>第 51 节 · 动手实战、答案与验收</a:t>
-            </a:r>
-          </a:p>
-          <a:p>
-            <a:r>
-              <a:rPr lang="zh-CN" dirty="0"/>
-              <a:t>单元 9 · 文件与异常 · W11</a:t>
-            </a:r>
-          </a:p>
-          <a:p>
-            <a:r>
-              <a:rPr lang="zh-CN" dirty="0"/>
-              <a:t/>
-            </a:r>
-          </a:p>
-          <a:p>
-            <a:r>
-              <a:rPr lang="zh-CN" dirty="0"/>
-              <a:t>学习目标：独立完成单元 9 练习，确认文件与异常都过关</a:t>
-            </a:r>
-          </a:p>
-          <a:p>
-            <a:r>
-              <a:rPr lang="zh-CN" dirty="0"/>
-              <a:t/>
-            </a:r>
-          </a:p>
-          <a:p>
-            <a:r>
-              <a:rPr lang="zh-CN" dirty="0"/>
-              <a:t>课堂实操（40 分钟，不看答案）：</a:t>
-            </a:r>
-          </a:p>
-          <a:p>
-            <a:r>
-              <a:rPr lang="zh-CN" dirty="0"/>
-              <a:t>· 限时 30 分钟独立完成基础档</a:t>
-            </a:r>
-          </a:p>
-          <a:p>
-            <a:r>
-              <a:rPr lang="zh-CN" dirty="0"/>
-              <a:t>· 逐题对照答案并打勾验收自测</a:t>
-            </a:r>
-          </a:p>
-          <a:p>
-            <a:r>
-              <a:rPr lang="zh-CN" dirty="0"/>
-              <a:t/>
-            </a:r>
-          </a:p>
-          <a:p>
-            <a:r>
-              <a:rPr lang="zh-CN" dirty="0"/>
-              <a:t>课后作业：</a:t>
-            </a:r>
-          </a:p>
-          <a:p>
-            <a:r>
-              <a:rPr lang="zh-CN" dirty="0"/>
-              <a:t>· 产出：能存到 JSON 的学习笔记程序</a:t>
-            </a:r>
-          </a:p>
-          <a:p>
-            <a:r>
-              <a:rPr lang="zh-CN" dirty="0"/>
-              <a:t>· 完成本单元小结与产出检查</a:t>
-            </a:r>
-          </a:p>
-          <a:p>
-            <a:r>
-              <a:rPr lang="zh-CN" dirty="0"/>
-              <a:t/>
-            </a:r>
-          </a:p>
-          <a:p>
-            <a:r>
-              <a:rPr lang="zh-CN" dirty="0"/>
-              <a:t>节奏：讲 20 分钟 → 学员自己敲 40 分钟（不看答案）→ 对讲评自查 20 分钟 → 写作业 10 分钟。</a:t>
-            </a:r>
-          </a:p>
-        </p:txBody>
-      </p:sp>
-      <p:sp>
-        <p:nvSpPr>
-          <p:cNvPr id="2" name="讲课提示"/>
-          <p:cNvSpPr txBox="1"/>
-          <p:nvPr/>
-        </p:nvSpPr>
-        <p:spPr>
-          <a:xfrm>
-            <a:off x="457200" y="457200"/>
-            <a:ext cx="6858000" cy="4800600"/>
-          </a:xfrm>
-          <a:prstGeom prst="rect">
-            <a:avLst/>
-          </a:prstGeom>
-        </p:spPr>
-        <p:txBody>
-          <a:bodyPr wrap="square"/>
-          <a:lstStyle/>
-          <a:p>
-            <a:r>
-              <a:rPr lang="zh-CN" dirty="0"/>
-              <a:t>第 51 节 · 动手实战、答案与验收</a:t>
-            </a:r>
-          </a:p>
-          <a:p>
-            <a:r>
-              <a:rPr lang="zh-CN" dirty="0"/>
-              <a:t>单元 9 · 文件与异常 · W11</a:t>
-            </a:r>
-          </a:p>
-          <a:p>
-            <a:r>
-              <a:rPr lang="zh-CN" dirty="0"/>
-              <a:t/>
-            </a:r>
-          </a:p>
-          <a:p>
-            <a:r>
-              <a:rPr lang="zh-CN" dirty="0"/>
-              <a:t>学习目标：独立完成单元 9 练习，确认文件与异常都过关</a:t>
-            </a:r>
-          </a:p>
-          <a:p>
-            <a:r>
-              <a:rPr lang="zh-CN" dirty="0"/>
-              <a:t/>
-            </a:r>
-          </a:p>
-          <a:p>
-            <a:r>
-              <a:rPr lang="zh-CN" dirty="0"/>
-              <a:t>课堂实操（40 分钟，不看答案）：</a:t>
-            </a:r>
-          </a:p>
-          <a:p>
-            <a:r>
-              <a:rPr lang="zh-CN" dirty="0"/>
-              <a:t>· 限时 30 分钟独立完成基础档</a:t>
-            </a:r>
-          </a:p>
-          <a:p>
-            <a:r>
-              <a:rPr lang="zh-CN" dirty="0"/>
-              <a:t>· 逐题对照答案并打勾验收自测</a:t>
-            </a:r>
-          </a:p>
-          <a:p>
-            <a:r>
-              <a:rPr lang="zh-CN" dirty="0"/>
-              <a:t/>
-            </a:r>
-          </a:p>
-          <a:p>
-            <a:r>
-              <a:rPr lang="zh-CN" dirty="0"/>
-              <a:t>课后作业：</a:t>
-            </a:r>
-          </a:p>
-          <a:p>
-            <a:r>
-              <a:rPr lang="zh-CN" dirty="0"/>
-              <a:t>· 产出：能存到 JSON 的学习笔记程序</a:t>
-            </a:r>
-          </a:p>
-          <a:p>
-            <a:r>
-              <a:rPr lang="zh-CN" dirty="0"/>
-              <a:t>· 完成本单元小结与产出检查</a:t>
-            </a:r>
-          </a:p>
-          <a:p>
-            <a:r>
-              <a:rPr lang="zh-CN" dirty="0"/>
-              <a:t/>
-            </a:r>
-          </a:p>
-          <a:p>
-            <a:r>
-              <a:rPr lang="zh-CN" dirty="0"/>
-              <a:t>节奏：讲 20 分钟 → 学员自己敲 40 分钟（不看答案）→ 对讲评自查 20 分钟 → 写作业 10 分钟。</a:t>
-            </a:r>
-          </a:p>
-        </p:txBody>
-      </p:sp>
-    </p:spTree>
-  </p:cSld>
-  <p:clrMapOvr>
-    <a:masterClrMapping/>
-  </p:clrMapOvr>
-</p:notes>
-</file>
-
-<file path=ppt/notesSlides/notesSlide11.xml><?xml version="1.0" encoding="utf-8"?>
-<p:notes xmlns:a="http://schemas.openxmlformats.org/drawingml/2006/main" xmlns:p="http://schemas.openxmlformats.org/presentationml/2006/main" xmlns:r="http://schemas.openxmlformats.org/officeDocument/2006/relationships">
-  <p:cSld>
-    <p:spTree>
-      <p:nvGrpSpPr>
-        <p:cNvPr id="1" name=""/>
-        <p:cNvGrpSpPr/>
-        <p:nvPr/>
-      </p:nvGrpSpPr>
-      <p:grpSpPr>
-        <a:xfrm>
-          <a:off x="0" y="0"/>
-          <a:ext cx="0" cy="0"/>
-          <a:chOff x="0" y="0"/>
-          <a:chExt cx="0" cy="0"/>
-        </a:xfrm>
-      </p:grpSpPr>
-      <p:sp>
-        <p:nvSpPr>
-          <p:cNvPr id="2" name="讲课提示"/>
-          <p:cNvSpPr txBox="1"/>
-          <p:nvPr/>
-        </p:nvSpPr>
-        <p:spPr>
-          <a:xfrm>
-            <a:off x="457200" y="457200"/>
-            <a:ext cx="6858000" cy="4800600"/>
-          </a:xfrm>
-          <a:prstGeom prst="rect">
-            <a:avLst/>
-          </a:prstGeom>
-        </p:spPr>
-        <p:txBody>
-          <a:bodyPr wrap="square"/>
-          <a:lstStyle/>
-          <a:p>
-            <a:r>
-              <a:rPr lang="zh-CN" dirty="0"/>
-              <a:t>第 51 节 · 核心知识点：动手实战、答案与验收</a:t>
-            </a:r>
-          </a:p>
-          <a:p>
-            <a:r>
-              <a:rPr lang="zh-CN" dirty="0"/>
-              <a:t/>
-            </a:r>
-          </a:p>
-          <a:p>
-            <a:r>
-              <a:rPr lang="zh-CN" dirty="0"/>
-              <a:t>讲这一页时：先让学生说出上节课的结论，再逐块讲要点。</a:t>
-            </a:r>
-          </a:p>
-          <a:p>
-            <a:r>
-              <a:rPr lang="zh-CN" dirty="0"/>
-              <a:t>每讲完一块，问一句「这一步如果写错了，报错会长什么样？」——把错误提前讲。</a:t>
-            </a:r>
-          </a:p>
-          <a:p>
-            <a:r>
-              <a:rPr lang="zh-CN" dirty="0"/>
-              <a:t/>
-            </a:r>
-          </a:p>
-          <a:p>
-            <a:r>
-              <a:rPr lang="zh-CN" dirty="0"/>
-              <a:t>本节目标：独立完成单元 9 练习，确认文件与异常都过关</a:t>
-            </a:r>
-          </a:p>
-          <a:p>
-            <a:r>
-              <a:rPr lang="zh-CN" dirty="0"/>
-              <a:t/>
-            </a:r>
-          </a:p>
-          <a:p>
-            <a:r>
-              <a:rPr lang="zh-CN" dirty="0"/>
-              <a:t>看不到懂的地方，回讲义对应小节读一遍，再回来对着这页复述一次——能讲出来才算真懂。</a:t>
-            </a:r>
-          </a:p>
-        </p:txBody>
-      </p:sp>
-      <p:sp>
-        <p:nvSpPr>
-          <p:cNvPr id="2" name="讲课提示"/>
-          <p:cNvSpPr txBox="1"/>
-          <p:nvPr/>
-        </p:nvSpPr>
-        <p:spPr>
-          <a:xfrm>
-            <a:off x="457200" y="457200"/>
-            <a:ext cx="6858000" cy="4800600"/>
-          </a:xfrm>
-          <a:prstGeom prst="rect">
-            <a:avLst/>
-          </a:prstGeom>
-        </p:spPr>
-        <p:txBody>
-          <a:bodyPr wrap="square"/>
-          <a:lstStyle/>
-          <a:p>
-            <a:r>
-              <a:rPr lang="zh-CN" dirty="0"/>
-              <a:t>第 51 节 · 核心知识点：动手实战、答案与验收</a:t>
-            </a:r>
-          </a:p>
-          <a:p>
-            <a:r>
-              <a:rPr lang="zh-CN" dirty="0"/>
-              <a:t/>
-            </a:r>
-          </a:p>
-          <a:p>
-            <a:r>
-              <a:rPr lang="zh-CN" dirty="0"/>
-              <a:t>讲这一页时：先让学生说出上节课的结论，再逐块讲要点。</a:t>
-            </a:r>
-          </a:p>
-          <a:p>
-            <a:r>
-              <a:rPr lang="zh-CN" dirty="0"/>
-              <a:t>每讲完一块，问一句「这一步如果写错了，报错会长什么样？」——把错误提前讲。</a:t>
-            </a:r>
-          </a:p>
-          <a:p>
-            <a:r>
-              <a:rPr lang="zh-CN" dirty="0"/>
-              <a:t/>
-            </a:r>
-          </a:p>
-          <a:p>
-            <a:r>
-              <a:rPr lang="zh-CN" dirty="0"/>
-              <a:t>本节目标：独立完成单元 9 练习，确认文件与异常都过关</a:t>
-            </a:r>
-          </a:p>
-          <a:p>
-            <a:r>
-              <a:rPr lang="zh-CN" dirty="0"/>
-              <a:t/>
-            </a:r>
-          </a:p>
-          <a:p>
-            <a:r>
-              <a:rPr lang="zh-CN" dirty="0"/>
-              <a:t>看不到懂的地方，回讲义对应小节读一遍，再回来对着这页复述一次——能讲出来才算真懂。</a:t>
-            </a:r>
-          </a:p>
-        </p:txBody>
-      </p:sp>
-    </p:spTree>
-  </p:cSld>
-  <p:clrMapOvr>
-    <a:masterClrMapping/>
-  </p:clrMapOvr>
-</p:notes>
-</file>
-
-<file path=ppt/notesSlides/notesSlide12.xml><?xml version="1.0" encoding="utf-8"?>
-<p:notes xmlns:a="http://schemas.openxmlformats.org/drawingml/2006/main" xmlns:p="http://schemas.openxmlformats.org/presentationml/2006/main" xmlns:r="http://schemas.openxmlformats.org/officeDocument/2006/relationships">
-  <p:cSld>
-    <p:spTree>
-      <p:nvGrpSpPr>
-        <p:cNvPr id="1" name=""/>
-        <p:cNvGrpSpPr/>
-        <p:nvPr/>
-      </p:nvGrpSpPr>
-      <p:grpSpPr>
-        <a:xfrm>
-          <a:off x="0" y="0"/>
-          <a:ext cx="0" cy="0"/>
-          <a:chOff x="0" y="0"/>
-          <a:chExt cx="0" cy="0"/>
-        </a:xfrm>
-      </p:grpSpPr>
-      <p:sp>
-        <p:nvSpPr>
-          <p:cNvPr id="2" name="讲课提示"/>
-          <p:cNvSpPr txBox="1"/>
-          <p:nvPr/>
-        </p:nvSpPr>
-        <p:spPr>
-          <a:xfrm>
-            <a:off x="457200" y="457200"/>
-            <a:ext cx="6858000" cy="4800600"/>
-          </a:xfrm>
-          <a:prstGeom prst="rect">
-            <a:avLst/>
-          </a:prstGeom>
-        </p:spPr>
-        <p:txBody>
-          <a:bodyPr wrap="square"/>
-          <a:lstStyle/>
-          <a:p>
-            <a:r>
-              <a:rPr lang="zh-CN" dirty="0"/>
-              <a:t>单元 9 小结 · 单元 9 · 小结</a:t>
-            </a:r>
-          </a:p>
-          <a:p>
-            <a:r>
-              <a:rPr lang="zh-CN" dirty="0"/>
-              <a:t/>
-            </a:r>
-          </a:p>
-          <a:p>
-            <a:r>
-              <a:rPr lang="zh-CN" dirty="0"/>
-              <a:t>收尾动作：让学生合上讲义，口述本单元三个最重要的结论；说不出来的，回对应课节。</a:t>
-            </a:r>
-          </a:p>
-          <a:p>
-            <a:r>
-              <a:rPr lang="zh-CN" dirty="0"/>
-              <a:t>然后当场勾一遍本单元课节的「已完成」，没打勾的进下一单元前补掉。</a:t>
-            </a:r>
-          </a:p>
-        </p:txBody>
-      </p:sp>
-      <p:sp>
-        <p:nvSpPr>
-          <p:cNvPr id="2" name="讲课提示"/>
-          <p:cNvSpPr txBox="1"/>
-          <p:nvPr/>
-        </p:nvSpPr>
-        <p:spPr>
-          <a:xfrm>
-            <a:off x="457200" y="457200"/>
-            <a:ext cx="6858000" cy="4800600"/>
-          </a:xfrm>
-          <a:prstGeom prst="rect">
-            <a:avLst/>
-          </a:prstGeom>
-        </p:spPr>
-        <p:txBody>
-          <a:bodyPr wrap="square"/>
-          <a:lstStyle/>
-          <a:p>
-            <a:r>
-              <a:rPr lang="zh-CN" dirty="0"/>
-              <a:t>单元 9 小结 · 单元 9 · 小结</a:t>
-            </a:r>
-          </a:p>
-          <a:p>
-            <a:r>
-              <a:rPr lang="zh-CN" dirty="0"/>
-              <a:t/>
-            </a:r>
-          </a:p>
-          <a:p>
-            <a:r>
-              <a:rPr lang="zh-CN" dirty="0"/>
-              <a:t>收尾动作：让学生合上讲义，口述本单元三个最重要的结论；说不出来的，回对应课节。</a:t>
-            </a:r>
-          </a:p>
-          <a:p>
-            <a:r>
-              <a:rPr lang="zh-CN" dirty="0"/>
-              <a:t>然后当场勾一遍本单元课节的「已完成」，没打勾的进下一单元前补掉。</a:t>
-            </a:r>
-          </a:p>
-        </p:txBody>
-      </p:sp>
-    </p:spTree>
-  </p:cSld>
-  <p:clrMapOvr>
-    <a:masterClrMapping/>
-  </p:clrMapOvr>
-</p:notes>
-</file>
-
-<file path=ppt/notesSlides/notesSlide2.xml><?xml version="1.0" encoding="utf-8"?>
-<p:notes xmlns:a="http://schemas.openxmlformats.org/drawingml/2006/main" xmlns:p="http://schemas.openxmlformats.org/presentationml/2006/main" xmlns:r="http://schemas.openxmlformats.org/officeDocument/2006/relationships">
-  <p:cSld>
-    <p:spTree>
-      <p:nvGrpSpPr>
-        <p:cNvPr id="1" name=""/>
-        <p:cNvGrpSpPr/>
-        <p:nvPr/>
-      </p:nvGrpSpPr>
-      <p:grpSpPr>
-        <a:xfrm>
-          <a:off x="0" y="0"/>
-          <a:ext cx="0" cy="0"/>
-          <a:chOff x="0" y="0"/>
-          <a:chExt cx="0" cy="0"/>
-        </a:xfrm>
-      </p:grpSpPr>
-      <p:sp>
-        <p:nvSpPr>
-          <p:cNvPr id="2" name="讲课提示"/>
-          <p:cNvSpPr txBox="1"/>
-          <p:nvPr/>
-        </p:nvSpPr>
-        <p:spPr>
-          <a:xfrm>
-            <a:off x="457200" y="457200"/>
-            <a:ext cx="6858000" cy="4800600"/>
-          </a:xfrm>
-          <a:prstGeom prst="rect">
-            <a:avLst/>
-          </a:prstGeom>
-        </p:spPr>
-        <p:txBody>
-          <a:bodyPr wrap="square"/>
-          <a:lstStyle/>
-          <a:p>
-            <a:r>
-              <a:rPr lang="zh-CN" dirty="0"/>
-              <a:t>第 47 节 · open() 与三种模式</a:t>
-            </a:r>
-          </a:p>
-          <a:p>
-            <a:r>
-              <a:rPr lang="zh-CN" dirty="0"/>
-              <a:t>单元 9 · 文件与异常 · W11</a:t>
-            </a:r>
-          </a:p>
-          <a:p>
-            <a:r>
-              <a:rPr lang="zh-CN" dirty="0"/>
-              <a:t/>
-            </a:r>
-          </a:p>
-          <a:p>
-            <a:r>
-              <a:rPr lang="zh-CN" dirty="0"/>
-              <a:t>学习目标：掌握 r / w / a 三种模式，理解变量活不过程序结束</a:t>
-            </a:r>
-          </a:p>
-          <a:p>
-            <a:r>
-              <a:rPr lang="zh-CN" dirty="0"/>
-              <a:t/>
-            </a:r>
-          </a:p>
-          <a:p>
-            <a:r>
-              <a:rPr lang="zh-CN" dirty="0"/>
-              <a:t>课堂实操（40 分钟，不看答案）：</a:t>
-            </a:r>
-          </a:p>
-          <a:p>
-            <a:r>
-              <a:rPr lang="zh-CN" dirty="0"/>
-              <a:t>· 现场演示 r / w / a 三种模式的效果</a:t>
-            </a:r>
-          </a:p>
-          <a:p>
-            <a:r>
-              <a:rPr lang="zh-CN" dirty="0"/>
-              <a:t>· 对比读同一个文件两次的差别</a:t>
-            </a:r>
-          </a:p>
-          <a:p>
-            <a:r>
-              <a:rPr lang="zh-CN" dirty="0"/>
-              <a:t/>
-            </a:r>
-          </a:p>
-          <a:p>
-            <a:r>
-              <a:rPr lang="zh-CN" dirty="0"/>
-              <a:t>课后作业：</a:t>
-            </a:r>
-          </a:p>
-          <a:p>
-            <a:r>
-              <a:rPr lang="zh-CN" dirty="0"/>
-              <a:t>· 完成动手练习 9-1 ~ 9-2</a:t>
-            </a:r>
-          </a:p>
-          <a:p>
-            <a:r>
-              <a:rPr lang="zh-CN" dirty="0"/>
-              <a:t/>
-            </a:r>
-          </a:p>
-          <a:p>
-            <a:r>
-              <a:rPr lang="zh-CN" dirty="0"/>
-              <a:t>节奏：讲 20 分钟 → 学员自己敲 40 分钟（不看答案）→ 对讲评自查 20 分钟 → 写作业 10 分钟。</a:t>
-            </a:r>
-          </a:p>
-        </p:txBody>
-      </p:sp>
-      <p:sp>
-        <p:nvSpPr>
-          <p:cNvPr id="2" name="讲课提示"/>
-          <p:cNvSpPr txBox="1"/>
-          <p:nvPr/>
-        </p:nvSpPr>
-        <p:spPr>
-          <a:xfrm>
-            <a:off x="457200" y="457200"/>
-            <a:ext cx="6858000" cy="4800600"/>
-          </a:xfrm>
-          <a:prstGeom prst="rect">
-            <a:avLst/>
-          </a:prstGeom>
-        </p:spPr>
-        <p:txBody>
-          <a:bodyPr wrap="square"/>
-          <a:lstStyle/>
-          <a:p>
-            <a:r>
-              <a:rPr lang="zh-CN" dirty="0"/>
-              <a:t>第 47 节 · open() 与三种模式</a:t>
-            </a:r>
-          </a:p>
-          <a:p>
-            <a:r>
-              <a:rPr lang="zh-CN" dirty="0"/>
-              <a:t>单元 9 · 文件与异常 · W11</a:t>
-            </a:r>
-          </a:p>
-          <a:p>
-            <a:r>
-              <a:rPr lang="zh-CN" dirty="0"/>
-              <a:t/>
-            </a:r>
-          </a:p>
-          <a:p>
-            <a:r>
-              <a:rPr lang="zh-CN" dirty="0"/>
-              <a:t>学习目标：掌握 r / w / a 三种模式，理解变量活不过程序结束</a:t>
-            </a:r>
-          </a:p>
-          <a:p>
-            <a:r>
-              <a:rPr lang="zh-CN" dirty="0"/>
-              <a:t/>
-            </a:r>
-          </a:p>
-          <a:p>
-            <a:r>
-              <a:rPr lang="zh-CN" dirty="0"/>
-              <a:t>课堂实操（40 分钟，不看答案）：</a:t>
-            </a:r>
-          </a:p>
-          <a:p>
-            <a:r>
-              <a:rPr lang="zh-CN" dirty="0"/>
-              <a:t>· 现场演示 r / w / a 三种模式的效果</a:t>
-            </a:r>
-          </a:p>
-          <a:p>
-            <a:r>
-              <a:rPr lang="zh-CN" dirty="0"/>
-              <a:t>· 对比读同一个文件两次的差别</a:t>
-            </a:r>
-          </a:p>
-          <a:p>
-            <a:r>
-              <a:rPr lang="zh-CN" dirty="0"/>
-              <a:t/>
-            </a:r>
-          </a:p>
-          <a:p>
-            <a:r>
-              <a:rPr lang="zh-CN" dirty="0"/>
-              <a:t>课后作业：</a:t>
-            </a:r>
-          </a:p>
-          <a:p>
-            <a:r>
-              <a:rPr lang="zh-CN" dirty="0"/>
-              <a:t>· 完成动手练习 9-1 ~ 9-2</a:t>
-            </a:r>
-          </a:p>
-          <a:p>
-            <a:r>
-              <a:rPr lang="zh-CN" dirty="0"/>
-              <a:t/>
-            </a:r>
-          </a:p>
-          <a:p>
-            <a:r>
-              <a:rPr lang="zh-CN" dirty="0"/>
-              <a:t>节奏：讲 20 分钟 → 学员自己敲 40 分钟（不看答案）→ 对讲评自查 20 分钟 → 写作业 10 分钟。</a:t>
-            </a:r>
-          </a:p>
-        </p:txBody>
-      </p:sp>
-    </p:spTree>
-  </p:cSld>
-  <p:clrMapOvr>
-    <a:masterClrMapping/>
-  </p:clrMapOvr>
-</p:notes>
-</file>
-
-<file path=ppt/notesSlides/notesSlide3.xml><?xml version="1.0" encoding="utf-8"?>
-<p:notes xmlns:a="http://schemas.openxmlformats.org/drawingml/2006/main" xmlns:p="http://schemas.openxmlformats.org/presentationml/2006/main" xmlns:r="http://schemas.openxmlformats.org/officeDocument/2006/relationships">
-  <p:cSld>
-    <p:spTree>
-      <p:nvGrpSpPr>
-        <p:cNvPr id="1" name=""/>
-        <p:cNvGrpSpPr/>
-        <p:nvPr/>
-      </p:nvGrpSpPr>
-      <p:grpSpPr>
-        <a:xfrm>
-          <a:off x="0" y="0"/>
-          <a:ext cx="0" cy="0"/>
-          <a:chOff x="0" y="0"/>
-          <a:chExt cx="0" cy="0"/>
-        </a:xfrm>
-      </p:grpSpPr>
-      <p:sp>
-        <p:nvSpPr>
-          <p:cNvPr id="2" name="讲课提示"/>
-          <p:cNvSpPr txBox="1"/>
-          <p:nvPr/>
-        </p:nvSpPr>
-        <p:spPr>
-          <a:xfrm>
-            <a:off x="457200" y="457200"/>
-            <a:ext cx="6858000" cy="4800600"/>
-          </a:xfrm>
-          <a:prstGeom prst="rect">
-            <a:avLst/>
-          </a:prstGeom>
-        </p:spPr>
-        <p:txBody>
-          <a:bodyPr wrap="square"/>
-          <a:lstStyle/>
-          <a:p>
-            <a:r>
-              <a:rPr lang="zh-CN" dirty="0"/>
-              <a:t>第 47 节 · 核心知识点：open() 与三种模式</a:t>
-            </a:r>
-          </a:p>
-          <a:p>
-            <a:r>
-              <a:rPr lang="zh-CN" dirty="0"/>
-              <a:t/>
-            </a:r>
-          </a:p>
-          <a:p>
-            <a:r>
-              <a:rPr lang="zh-CN" dirty="0"/>
-              <a:t>讲这一页时：先让学生说出上节课的结论，再逐块讲要点。</a:t>
-            </a:r>
-          </a:p>
-          <a:p>
-            <a:r>
-              <a:rPr lang="zh-CN" dirty="0"/>
-              <a:t>每讲完一块，问一句「这一步如果写错了，报错会长什么样？」——把错误提前讲。</a:t>
-            </a:r>
-          </a:p>
-          <a:p>
-            <a:r>
-              <a:rPr lang="zh-CN" dirty="0"/>
-              <a:t/>
-            </a:r>
-          </a:p>
-          <a:p>
-            <a:r>
-              <a:rPr lang="zh-CN" dirty="0"/>
-              <a:t>本节目标：掌握 r / w / a 三种模式，理解变量活不过程序结束</a:t>
-            </a:r>
-          </a:p>
-          <a:p>
-            <a:r>
-              <a:rPr lang="zh-CN" dirty="0"/>
-              <a:t/>
-            </a:r>
-          </a:p>
-          <a:p>
-            <a:r>
-              <a:rPr lang="zh-CN" dirty="0"/>
-              <a:t>看不到懂的地方，回讲义对应小节读一遍，再回来对着这页复述一次——能讲出来才算真懂。</a:t>
-            </a:r>
-          </a:p>
-        </p:txBody>
-      </p:sp>
-      <p:sp>
-        <p:nvSpPr>
-          <p:cNvPr id="2" name="讲课提示"/>
-          <p:cNvSpPr txBox="1"/>
-          <p:nvPr/>
-        </p:nvSpPr>
-        <p:spPr>
-          <a:xfrm>
-            <a:off x="457200" y="457200"/>
-            <a:ext cx="6858000" cy="4800600"/>
-          </a:xfrm>
-          <a:prstGeom prst="rect">
-            <a:avLst/>
-          </a:prstGeom>
-        </p:spPr>
-        <p:txBody>
-          <a:bodyPr wrap="square"/>
-          <a:lstStyle/>
-          <a:p>
-            <a:r>
-              <a:rPr lang="zh-CN" dirty="0"/>
-              <a:t>第 47 节 · 核心知识点：open() 与三种模式</a:t>
-            </a:r>
-          </a:p>
-          <a:p>
-            <a:r>
-              <a:rPr lang="zh-CN" dirty="0"/>
-              <a:t/>
-            </a:r>
-          </a:p>
-          <a:p>
-            <a:r>
-              <a:rPr lang="zh-CN" dirty="0"/>
-              <a:t>讲这一页时：先让学生说出上节课的结论，再逐块讲要点。</a:t>
-            </a:r>
-          </a:p>
-          <a:p>
-            <a:r>
-              <a:rPr lang="zh-CN" dirty="0"/>
-              <a:t>每讲完一块，问一句「这一步如果写错了，报错会长什么样？」——把错误提前讲。</a:t>
-            </a:r>
-          </a:p>
-          <a:p>
-            <a:r>
-              <a:rPr lang="zh-CN" dirty="0"/>
-              <a:t/>
-            </a:r>
-          </a:p>
-          <a:p>
-            <a:r>
-              <a:rPr lang="zh-CN" dirty="0"/>
-              <a:t>本节目标：掌握 r / w / a 三种模式，理解变量活不过程序结束</a:t>
-            </a:r>
-          </a:p>
-          <a:p>
-            <a:r>
-              <a:rPr lang="zh-CN" dirty="0"/>
-              <a:t/>
-            </a:r>
-          </a:p>
-          <a:p>
-            <a:r>
-              <a:rPr lang="zh-CN" dirty="0"/>
-              <a:t>看不到懂的地方，回讲义对应小节读一遍，再回来对着这页复述一次——能讲出来才算真懂。</a:t>
-            </a:r>
-          </a:p>
-        </p:txBody>
-      </p:sp>
-    </p:spTree>
-  </p:cSld>
-  <p:clrMapOvr>
-    <a:masterClrMapping/>
-  </p:clrMapOvr>
-</p:notes>
-</file>
-
-<file path=ppt/notesSlides/notesSlide4.xml><?xml version="1.0" encoding="utf-8"?>
-<p:notes xmlns:a="http://schemas.openxmlformats.org/drawingml/2006/main" xmlns:p="http://schemas.openxmlformats.org/presentationml/2006/main" xmlns:r="http://schemas.openxmlformats.org/officeDocument/2006/relationships">
-  <p:cSld>
-    <p:spTree>
-      <p:nvGrpSpPr>
-        <p:cNvPr id="1" name=""/>
-        <p:cNvGrpSpPr/>
-        <p:nvPr/>
-      </p:nvGrpSpPr>
-      <p:grpSpPr>
-        <a:xfrm>
-          <a:off x="0" y="0"/>
-          <a:ext cx="0" cy="0"/>
-          <a:chOff x="0" y="0"/>
-          <a:chExt cx="0" cy="0"/>
-        </a:xfrm>
-      </p:grpSpPr>
-      <p:sp>
-        <p:nvSpPr>
-          <p:cNvPr id="2" name="讲课提示"/>
-          <p:cNvSpPr txBox="1"/>
-          <p:nvPr/>
-        </p:nvSpPr>
-        <p:spPr>
-          <a:xfrm>
-            <a:off x="457200" y="457200"/>
-            <a:ext cx="6858000" cy="4800600"/>
-          </a:xfrm>
-          <a:prstGeom prst="rect">
-            <a:avLst/>
-          </a:prstGeom>
-        </p:spPr>
-        <p:txBody>
-          <a:bodyPr wrap="square"/>
-          <a:lstStyle/>
-          <a:p>
-            <a:r>
-              <a:rPr lang="zh-CN" dirty="0"/>
-              <a:t>第 48 节 · with 语句与四种读取方式</a:t>
-            </a:r>
-          </a:p>
-          <a:p>
-            <a:r>
-              <a:rPr lang="zh-CN" dirty="0"/>
-              <a:t>单元 9 · 文件与异常 · W11</a:t>
-            </a:r>
-          </a:p>
-          <a:p>
-            <a:r>
-              <a:rPr lang="zh-CN" dirty="0"/>
-              <a:t/>
-            </a:r>
-          </a:p>
-          <a:p>
-            <a:r>
-              <a:rPr lang="zh-CN" dirty="0"/>
-              <a:t>学习目标：掌握 with 的真实作用与read / readline / readlines 的区别</a:t>
-            </a:r>
-          </a:p>
-          <a:p>
-            <a:r>
-              <a:rPr lang="zh-CN" dirty="0"/>
-              <a:t/>
-            </a:r>
-          </a:p>
-          <a:p>
-            <a:r>
-              <a:rPr lang="zh-CN" dirty="0"/>
-              <a:t>课堂实操（40 分钟，不看答案）：</a:t>
-            </a:r>
-          </a:p>
-          <a:p>
-            <a:r>
-              <a:rPr lang="zh-CN" dirty="0"/>
-              <a:t>· 故意不写 with，让程序中途崩溃观察文件句柄泄漏</a:t>
-            </a:r>
-          </a:p>
-          <a:p>
-            <a:r>
-              <a:rPr lang="zh-CN" dirty="0"/>
-              <a:t>· 对比四种读取方式的返回类型</a:t>
-            </a:r>
-          </a:p>
-          <a:p>
-            <a:r>
-              <a:rPr lang="zh-CN" dirty="0"/>
-              <a:t/>
-            </a:r>
-          </a:p>
-          <a:p>
-            <a:r>
-              <a:rPr lang="zh-CN" dirty="0"/>
-              <a:t>课后作业：</a:t>
-            </a:r>
-          </a:p>
-          <a:p>
-            <a:r>
-              <a:rPr lang="zh-CN" dirty="0"/>
-              <a:t>· 完成动手练习 9-3</a:t>
-            </a:r>
-          </a:p>
-          <a:p>
-            <a:r>
-              <a:rPr lang="zh-CN" dirty="0"/>
-              <a:t/>
-            </a:r>
-          </a:p>
-          <a:p>
-            <a:r>
-              <a:rPr lang="zh-CN" dirty="0"/>
-              <a:t>节奏：讲 20 分钟 → 学员自己敲 40 分钟（不看答案）→ 对讲评自查 20 分钟 → 写作业 10 分钟。</a:t>
-            </a:r>
-          </a:p>
-        </p:txBody>
-      </p:sp>
-      <p:sp>
-        <p:nvSpPr>
-          <p:cNvPr id="2" name="讲课提示"/>
-          <p:cNvSpPr txBox="1"/>
-          <p:nvPr/>
-        </p:nvSpPr>
-        <p:spPr>
-          <a:xfrm>
-            <a:off x="457200" y="457200"/>
-            <a:ext cx="6858000" cy="4800600"/>
-          </a:xfrm>
-          <a:prstGeom prst="rect">
-            <a:avLst/>
-          </a:prstGeom>
-        </p:spPr>
-        <p:txBody>
-          <a:bodyPr wrap="square"/>
-          <a:lstStyle/>
-          <a:p>
-            <a:r>
-              <a:rPr lang="zh-CN" dirty="0"/>
-              <a:t>第 48 节 · with 语句与四种读取方式</a:t>
-            </a:r>
-          </a:p>
-          <a:p>
-            <a:r>
-              <a:rPr lang="zh-CN" dirty="0"/>
-              <a:t>单元 9 · 文件与异常 · W11</a:t>
-            </a:r>
-          </a:p>
-          <a:p>
-            <a:r>
-              <a:rPr lang="zh-CN" dirty="0"/>
-              <a:t/>
-            </a:r>
-          </a:p>
-          <a:p>
-            <a:r>
-              <a:rPr lang="zh-CN" dirty="0"/>
-              <a:t>学习目标：掌握 with 的真实作用与read / readline / readlines 的区别</a:t>
-            </a:r>
-          </a:p>
-          <a:p>
-            <a:r>
-              <a:rPr lang="zh-CN" dirty="0"/>
-              <a:t/>
-            </a:r>
-          </a:p>
-          <a:p>
-            <a:r>
-              <a:rPr lang="zh-CN" dirty="0"/>
-              <a:t>课堂实操（40 分钟，不看答案）：</a:t>
-            </a:r>
-          </a:p>
-          <a:p>
-            <a:r>
-              <a:rPr lang="zh-CN" dirty="0"/>
-              <a:t>· 故意不写 with，让程序中途崩溃观察文件句柄泄漏</a:t>
-            </a:r>
-          </a:p>
-          <a:p>
-            <a:r>
-              <a:rPr lang="zh-CN" dirty="0"/>
-              <a:t>· 对比四种读取方式的返回类型</a:t>
-            </a:r>
-          </a:p>
-          <a:p>
-            <a:r>
-              <a:rPr lang="zh-CN" dirty="0"/>
-              <a:t/>
-            </a:r>
-          </a:p>
-          <a:p>
-            <a:r>
-              <a:rPr lang="zh-CN" dirty="0"/>
-              <a:t>课后作业：</a:t>
-            </a:r>
-          </a:p>
-          <a:p>
-            <a:r>
-              <a:rPr lang="zh-CN" dirty="0"/>
-              <a:t>· 完成动手练习 9-3</a:t>
-            </a:r>
-          </a:p>
-          <a:p>
-            <a:r>
-              <a:rPr lang="zh-CN" dirty="0"/>
-              <a:t/>
-            </a:r>
-          </a:p>
-          <a:p>
-            <a:r>
-              <a:rPr lang="zh-CN" dirty="0"/>
-              <a:t>节奏：讲 20 分钟 → 学员自己敲 40 分钟（不看答案）→ 对讲评自查 20 分钟 → 写作业 10 分钟。</a:t>
-            </a:r>
-          </a:p>
-        </p:txBody>
-      </p:sp>
-    </p:spTree>
-  </p:cSld>
-  <p:clrMapOvr>
-    <a:masterClrMapping/>
-  </p:clrMapOvr>
-</p:notes>
-</file>
-
-<file path=ppt/notesSlides/notesSlide5.xml><?xml version="1.0" encoding="utf-8"?>
-<p:notes xmlns:a="http://schemas.openxmlformats.org/drawingml/2006/main" xmlns:p="http://schemas.openxmlformats.org/presentationml/2006/main" xmlns:r="http://schemas.openxmlformats.org/officeDocument/2006/relationships">
-  <p:cSld>
-    <p:spTree>
-      <p:nvGrpSpPr>
-        <p:cNvPr id="1" name=""/>
-        <p:cNvGrpSpPr/>
-        <p:nvPr/>
-      </p:nvGrpSpPr>
-      <p:grpSpPr>
-        <a:xfrm>
-          <a:off x="0" y="0"/>
-          <a:ext cx="0" cy="0"/>
-          <a:chOff x="0" y="0"/>
-          <a:chExt cx="0" cy="0"/>
-        </a:xfrm>
-      </p:grpSpPr>
-      <p:sp>
-        <p:nvSpPr>
-          <p:cNvPr id="2" name="讲课提示"/>
-          <p:cNvSpPr txBox="1"/>
-          <p:nvPr/>
-        </p:nvSpPr>
-        <p:spPr>
-          <a:xfrm>
-            <a:off x="457200" y="457200"/>
-            <a:ext cx="6858000" cy="4800600"/>
-          </a:xfrm>
-          <a:prstGeom prst="rect">
-            <a:avLst/>
-          </a:prstGeom>
-        </p:spPr>
-        <p:txBody>
-          <a:bodyPr wrap="square"/>
-          <a:lstStyle/>
-          <a:p>
-            <a:r>
-              <a:rPr lang="zh-CN" dirty="0"/>
-              <a:t>第 48 节 · 核心知识点：with 语句与四种读取方式</a:t>
-            </a:r>
-          </a:p>
-          <a:p>
-            <a:r>
-              <a:rPr lang="zh-CN" dirty="0"/>
-              <a:t/>
-            </a:r>
-          </a:p>
-          <a:p>
-            <a:r>
-              <a:rPr lang="zh-CN" dirty="0"/>
-              <a:t>讲这一页时：先让学生说出上节课的结论，再逐块讲要点。</a:t>
-            </a:r>
-          </a:p>
-          <a:p>
-            <a:r>
-              <a:rPr lang="zh-CN" dirty="0"/>
-              <a:t>每讲完一块，问一句「这一步如果写错了，报错会长什么样？」——把错误提前讲。</a:t>
-            </a:r>
-          </a:p>
-          <a:p>
-            <a:r>
-              <a:rPr lang="zh-CN" dirty="0"/>
-              <a:t/>
-            </a:r>
-          </a:p>
-          <a:p>
-            <a:r>
-              <a:rPr lang="zh-CN" dirty="0"/>
-              <a:t>本节目标：掌握 with 的真实作用与read / readline / readlines 的区别</a:t>
-            </a:r>
-          </a:p>
-          <a:p>
-            <a:r>
-              <a:rPr lang="zh-CN" dirty="0"/>
-              <a:t/>
-            </a:r>
-          </a:p>
-          <a:p>
-            <a:r>
-              <a:rPr lang="zh-CN" dirty="0"/>
-              <a:t>看不到懂的地方，回讲义对应小节读一遍，再回来对着这页复述一次——能讲出来才算真懂。</a:t>
-            </a:r>
-          </a:p>
-        </p:txBody>
-      </p:sp>
-      <p:sp>
-        <p:nvSpPr>
-          <p:cNvPr id="2" name="讲课提示"/>
-          <p:cNvSpPr txBox="1"/>
-          <p:nvPr/>
-        </p:nvSpPr>
-        <p:spPr>
-          <a:xfrm>
-            <a:off x="457200" y="457200"/>
-            <a:ext cx="6858000" cy="4800600"/>
-          </a:xfrm>
-          <a:prstGeom prst="rect">
-            <a:avLst/>
-          </a:prstGeom>
-        </p:spPr>
-        <p:txBody>
-          <a:bodyPr wrap="square"/>
-          <a:lstStyle/>
-          <a:p>
-            <a:r>
-              <a:rPr lang="zh-CN" dirty="0"/>
-              <a:t>第 48 节 · 核心知识点：with 语句与四种读取方式</a:t>
-            </a:r>
-          </a:p>
-          <a:p>
-            <a:r>
-              <a:rPr lang="zh-CN" dirty="0"/>
-              <a:t/>
-            </a:r>
-          </a:p>
-          <a:p>
-            <a:r>
-              <a:rPr lang="zh-CN" dirty="0"/>
-              <a:t>讲这一页时：先让学生说出上节课的结论，再逐块讲要点。</a:t>
-            </a:r>
-          </a:p>
-          <a:p>
-            <a:r>
-              <a:rPr lang="zh-CN" dirty="0"/>
-              <a:t>每讲完一块，问一句「这一步如果写错了，报错会长什么样？」——把错误提前讲。</a:t>
-            </a:r>
-          </a:p>
-          <a:p>
-            <a:r>
-              <a:rPr lang="zh-CN" dirty="0"/>
-              <a:t/>
-            </a:r>
-          </a:p>
-          <a:p>
-            <a:r>
-              <a:rPr lang="zh-CN" dirty="0"/>
-              <a:t>本节目标：掌握 with 的真实作用与read / readline / readlines 的区别</a:t>
-            </a:r>
-          </a:p>
-          <a:p>
-            <a:r>
-              <a:rPr lang="zh-CN" dirty="0"/>
-              <a:t/>
-            </a:r>
-          </a:p>
-          <a:p>
-            <a:r>
-              <a:rPr lang="zh-CN" dirty="0"/>
-              <a:t>看不到懂的地方，回讲义对应小节读一遍，再回来对着这页复述一次——能讲出来才算真懂。</a:t>
-            </a:r>
-          </a:p>
-        </p:txBody>
-      </p:sp>
-    </p:spTree>
-  </p:cSld>
-  <p:clrMapOvr>
-    <a:masterClrMapping/>
-  </p:clrMapOvr>
-</p:notes>
-</file>
-
-<file path=ppt/notesSlides/notesSlide6.xml><?xml version="1.0" encoding="utf-8"?>
-<p:notes xmlns:a="http://schemas.openxmlformats.org/drawingml/2006/main" xmlns:p="http://schemas.openxmlformats.org/presentationml/2006/main" xmlns:r="http://schemas.openxmlformats.org/officeDocument/2006/relationships">
-  <p:cSld>
-    <p:spTree>
-      <p:nvGrpSpPr>
-        <p:cNvPr id="1" name=""/>
-        <p:cNvGrpSpPr/>
-        <p:nvPr/>
-      </p:nvGrpSpPr>
-      <p:grpSpPr>
-        <a:xfrm>
-          <a:off x="0" y="0"/>
-          <a:ext cx="0" cy="0"/>
-          <a:chOff x="0" y="0"/>
-          <a:chExt cx="0" cy="0"/>
-        </a:xfrm>
-      </p:grpSpPr>
-      <p:sp>
-        <p:nvSpPr>
-          <p:cNvPr id="2" name="讲课提示"/>
-          <p:cNvSpPr txBox="1"/>
-          <p:nvPr/>
-        </p:nvSpPr>
-        <p:spPr>
-          <a:xfrm>
-            <a:off x="457200" y="457200"/>
-            <a:ext cx="6858000" cy="4800600"/>
-          </a:xfrm>
-          <a:prstGeom prst="rect">
-            <a:avLst/>
-          </a:prstGeom>
-        </p:spPr>
-        <p:txBody>
-          <a:bodyPr wrap="square"/>
-          <a:lstStyle/>
-          <a:p>
-            <a:r>
-              <a:rPr lang="zh-CN" dirty="0"/>
-              <a:t>第 49 节 · 写文件与异常处理</a:t>
-            </a:r>
-          </a:p>
-          <a:p>
-            <a:r>
-              <a:rPr lang="zh-CN" dirty="0"/>
-              <a:t>单元 9 · 文件与异常 · W11</a:t>
-            </a:r>
-          </a:p>
-          <a:p>
-            <a:r>
-              <a:rPr lang="zh-CN" dirty="0"/>
-              <a:t/>
-            </a:r>
-          </a:p>
-          <a:p>
-            <a:r>
-              <a:rPr lang="zh-CN" dirty="0"/>
-              <a:t>学习目标：掌握写文件与 try / except / else / finally，知道 else 的真正用法</a:t>
-            </a:r>
-          </a:p>
-          <a:p>
-            <a:r>
-              <a:rPr lang="zh-CN" dirty="0"/>
-              <a:t/>
-            </a:r>
-          </a:p>
-          <a:p>
-            <a:r>
-              <a:rPr lang="zh-CN" dirty="0"/>
-              <a:t>课堂实操（40 分钟，不看答案）：</a:t>
-            </a:r>
-          </a:p>
-          <a:p>
-            <a:r>
-              <a:rPr lang="zh-CN" dirty="0"/>
-              <a:t>· 故意触发 ValueError 和 FileNotFoundError 并处理</a:t>
-            </a:r>
-          </a:p>
-          <a:p>
-            <a:r>
-              <a:rPr lang="zh-CN" dirty="0"/>
-              <a:t>· 写一个「只在成功时保存文件」的函数演示 else</a:t>
-            </a:r>
-          </a:p>
-          <a:p>
-            <a:r>
-              <a:rPr lang="zh-CN" dirty="0"/>
-              <a:t/>
-            </a:r>
-          </a:p>
-          <a:p>
-            <a:r>
-              <a:rPr lang="zh-CN" dirty="0"/>
-              <a:t>课后作业：</a:t>
-            </a:r>
-          </a:p>
-          <a:p>
-            <a:r>
-              <a:rPr lang="zh-CN" dirty="0"/>
-              <a:t>· 完成动手练习 9-4 ~ 9-6</a:t>
-            </a:r>
-          </a:p>
-          <a:p>
-            <a:r>
-              <a:rPr lang="zh-CN" dirty="0"/>
-              <a:t/>
-            </a:r>
-          </a:p>
-          <a:p>
-            <a:r>
-              <a:rPr lang="zh-CN" dirty="0"/>
-              <a:t>节奏：讲 20 分钟 → 学员自己敲 40 分钟（不看答案）→ 对讲评自查 20 分钟 → 写作业 10 分钟。</a:t>
-            </a:r>
-          </a:p>
-        </p:txBody>
-      </p:sp>
-      <p:sp>
-        <p:nvSpPr>
-          <p:cNvPr id="2" name="讲课提示"/>
-          <p:cNvSpPr txBox="1"/>
-          <p:nvPr/>
-        </p:nvSpPr>
-        <p:spPr>
-          <a:xfrm>
-            <a:off x="457200" y="457200"/>
-            <a:ext cx="6858000" cy="4800600"/>
-          </a:xfrm>
-          <a:prstGeom prst="rect">
-            <a:avLst/>
-          </a:prstGeom>
-        </p:spPr>
-        <p:txBody>
-          <a:bodyPr wrap="square"/>
-          <a:lstStyle/>
-          <a:p>
-            <a:r>
-              <a:rPr lang="zh-CN" dirty="0"/>
-              <a:t>第 49 节 · 写文件与异常处理</a:t>
-            </a:r>
-          </a:p>
-          <a:p>
-            <a:r>
-              <a:rPr lang="zh-CN" dirty="0"/>
-              <a:t>单元 9 · 文件与异常 · W11</a:t>
-            </a:r>
-          </a:p>
-          <a:p>
-            <a:r>
-              <a:rPr lang="zh-CN" dirty="0"/>
-              <a:t/>
-            </a:r>
-          </a:p>
-          <a:p>
-            <a:r>
-              <a:rPr lang="zh-CN" dirty="0"/>
-              <a:t>学习目标：掌握写文件与 try / except / else / finally，知道 else 的真正用法</a:t>
-            </a:r>
-          </a:p>
-          <a:p>
-            <a:r>
-              <a:rPr lang="zh-CN" dirty="0"/>
-              <a:t/>
-            </a:r>
-          </a:p>
-          <a:p>
-            <a:r>
-              <a:rPr lang="zh-CN" dirty="0"/>
-              <a:t>课堂实操（40 分钟，不看答案）：</a:t>
-            </a:r>
-          </a:p>
-          <a:p>
-            <a:r>
-              <a:rPr lang="zh-CN" dirty="0"/>
-              <a:t>· 故意触发 ValueError 和 FileNotFoundError 并处理</a:t>
-            </a:r>
-          </a:p>
-          <a:p>
-            <a:r>
-              <a:rPr lang="zh-CN" dirty="0"/>
-              <a:t>· 写一个「只在成功时保存文件」的函数演示 else</a:t>
-            </a:r>
-          </a:p>
-          <a:p>
-            <a:r>
-              <a:rPr lang="zh-CN" dirty="0"/>
-              <a:t/>
-            </a:r>
-          </a:p>
-          <a:p>
-            <a:r>
-              <a:rPr lang="zh-CN" dirty="0"/>
-              <a:t>课后作业：</a:t>
-            </a:r>
-          </a:p>
-          <a:p>
-            <a:r>
-              <a:rPr lang="zh-CN" dirty="0"/>
-              <a:t>· 完成动手练习 9-4 ~ 9-6</a:t>
-            </a:r>
-          </a:p>
-          <a:p>
-            <a:r>
-              <a:rPr lang="zh-CN" dirty="0"/>
-              <a:t/>
-            </a:r>
-          </a:p>
-          <a:p>
-            <a:r>
-              <a:rPr lang="zh-CN" dirty="0"/>
-              <a:t>节奏：讲 20 分钟 → 学员自己敲 40 分钟（不看答案）→ 对讲评自查 20 分钟 → 写作业 10 分钟。</a:t>
-            </a:r>
-          </a:p>
-        </p:txBody>
-      </p:sp>
-    </p:spTree>
-  </p:cSld>
-  <p:clrMapOvr>
-    <a:masterClrMapping/>
-  </p:clrMapOvr>
-</p:notes>
-</file>
-
-<file path=ppt/notesSlides/notesSlide7.xml><?xml version="1.0" encoding="utf-8"?>
-<p:notes xmlns:a="http://schemas.openxmlformats.org/drawingml/2006/main" xmlns:p="http://schemas.openxmlformats.org/presentationml/2006/main" xmlns:r="http://schemas.openxmlformats.org/officeDocument/2006/relationships">
-  <p:cSld>
-    <p:spTree>
-      <p:nvGrpSpPr>
-        <p:cNvPr id="1" name=""/>
-        <p:cNvGrpSpPr/>
-        <p:nvPr/>
-      </p:nvGrpSpPr>
-      <p:grpSpPr>
-        <a:xfrm>
-          <a:off x="0" y="0"/>
-          <a:ext cx="0" cy="0"/>
-          <a:chOff x="0" y="0"/>
-          <a:chExt cx="0" cy="0"/>
-        </a:xfrm>
-      </p:grpSpPr>
-      <p:sp>
-        <p:nvSpPr>
-          <p:cNvPr id="2" name="讲课提示"/>
-          <p:cNvSpPr txBox="1"/>
-          <p:nvPr/>
-        </p:nvSpPr>
-        <p:spPr>
-          <a:xfrm>
-            <a:off x="457200" y="457200"/>
-            <a:ext cx="6858000" cy="4800600"/>
-          </a:xfrm>
-          <a:prstGeom prst="rect">
-            <a:avLst/>
-          </a:prstGeom>
-        </p:spPr>
-        <p:txBody>
-          <a:bodyPr wrap="square"/>
-          <a:lstStyle/>
-          <a:p>
-            <a:r>
-              <a:rPr lang="zh-CN" dirty="0"/>
-              <a:t>第 49 节 · 核心知识点：写文件与异常处理</a:t>
-            </a:r>
-          </a:p>
-          <a:p>
-            <a:r>
-              <a:rPr lang="zh-CN" dirty="0"/>
-              <a:t/>
-            </a:r>
-          </a:p>
-          <a:p>
-            <a:r>
-              <a:rPr lang="zh-CN" dirty="0"/>
-              <a:t>讲这一页时：先让学生说出上节课的结论，再逐块讲要点。</a:t>
-            </a:r>
-          </a:p>
-          <a:p>
-            <a:r>
-              <a:rPr lang="zh-CN" dirty="0"/>
-              <a:t>每讲完一块，问一句「这一步如果写错了，报错会长什么样？」——把错误提前讲。</a:t>
-            </a:r>
-          </a:p>
-          <a:p>
-            <a:r>
-              <a:rPr lang="zh-CN" dirty="0"/>
-              <a:t/>
-            </a:r>
-          </a:p>
-          <a:p>
-            <a:r>
-              <a:rPr lang="zh-CN" dirty="0"/>
-              <a:t>本节目标：掌握写文件与 try / except / else / finally，知道 else 的真正用法</a:t>
-            </a:r>
-          </a:p>
-          <a:p>
-            <a:r>
-              <a:rPr lang="zh-CN" dirty="0"/>
-              <a:t/>
-            </a:r>
-          </a:p>
-          <a:p>
-            <a:r>
-              <a:rPr lang="zh-CN" dirty="0"/>
-              <a:t>看不到懂的地方，回讲义对应小节读一遍，再回来对着这页复述一次——能讲出来才算真懂。</a:t>
-            </a:r>
-          </a:p>
-        </p:txBody>
-      </p:sp>
-      <p:sp>
-        <p:nvSpPr>
-          <p:cNvPr id="2" name="讲课提示"/>
-          <p:cNvSpPr txBox="1"/>
-          <p:nvPr/>
-        </p:nvSpPr>
-        <p:spPr>
-          <a:xfrm>
-            <a:off x="457200" y="457200"/>
-            <a:ext cx="6858000" cy="4800600"/>
-          </a:xfrm>
-          <a:prstGeom prst="rect">
-            <a:avLst/>
-          </a:prstGeom>
-        </p:spPr>
-        <p:txBody>
-          <a:bodyPr wrap="square"/>
-          <a:lstStyle/>
-          <a:p>
-            <a:r>
-              <a:rPr lang="zh-CN" dirty="0"/>
-              <a:t>第 49 节 · 核心知识点：写文件与异常处理</a:t>
-            </a:r>
-          </a:p>
-          <a:p>
-            <a:r>
-              <a:rPr lang="zh-CN" dirty="0"/>
-              <a:t/>
-            </a:r>
-          </a:p>
-          <a:p>
-            <a:r>
-              <a:rPr lang="zh-CN" dirty="0"/>
-              <a:t>讲这一页时：先让学生说出上节课的结论，再逐块讲要点。</a:t>
-            </a:r>
-          </a:p>
-          <a:p>
-            <a:r>
-              <a:rPr lang="zh-CN" dirty="0"/>
-              <a:t>每讲完一块，问一句「这一步如果写错了，报错会长什么样？」——把错误提前讲。</a:t>
-            </a:r>
-          </a:p>
-          <a:p>
-            <a:r>
-              <a:rPr lang="zh-CN" dirty="0"/>
-              <a:t/>
-            </a:r>
-          </a:p>
-          <a:p>
-            <a:r>
-              <a:rPr lang="zh-CN" dirty="0"/>
-              <a:t>本节目标：掌握写文件与 try / except / else / finally，知道 else 的真正用法</a:t>
-            </a:r>
-          </a:p>
-          <a:p>
-            <a:r>
-              <a:rPr lang="zh-CN" dirty="0"/>
-              <a:t/>
-            </a:r>
-          </a:p>
-          <a:p>
-            <a:r>
-              <a:rPr lang="zh-CN" dirty="0"/>
-              <a:t>看不到懂的地方，回讲义对应小节读一遍，再回来对着这页复述一次——能讲出来才算真懂。</a:t>
-            </a:r>
-          </a:p>
-        </p:txBody>
-      </p:sp>
-    </p:spTree>
-  </p:cSld>
-  <p:clrMapOvr>
-    <a:masterClrMapping/>
-  </p:clrMapOvr>
-</p:notes>
-</file>
-
-<file path=ppt/notesSlides/notesSlide8.xml><?xml version="1.0" encoding="utf-8"?>
-<p:notes xmlns:a="http://schemas.openxmlformats.org/drawingml/2006/main" xmlns:p="http://schemas.openxmlformats.org/presentationml/2006/main" xmlns:r="http://schemas.openxmlformats.org/officeDocument/2006/relationships">
-  <p:cSld>
-    <p:spTree>
-      <p:nvGrpSpPr>
-        <p:cNvPr id="1" name=""/>
-        <p:cNvGrpSpPr/>
-        <p:nvPr/>
-      </p:nvGrpSpPr>
-      <p:grpSpPr>
-        <a:xfrm>
-          <a:off x="0" y="0"/>
-          <a:ext cx="0" cy="0"/>
-          <a:chOff x="0" y="0"/>
-          <a:chExt cx="0" cy="0"/>
-        </a:xfrm>
-      </p:grpSpPr>
-      <p:sp>
-        <p:nvSpPr>
-          <p:cNvPr id="2" name="讲课提示"/>
-          <p:cNvSpPr txBox="1"/>
-          <p:nvPr/>
-        </p:nvSpPr>
-        <p:spPr>
-          <a:xfrm>
-            <a:off x="457200" y="457200"/>
-            <a:ext cx="6858000" cy="4800600"/>
-          </a:xfrm>
-          <a:prstGeom prst="rect">
-            <a:avLst/>
-          </a:prstGeom>
-        </p:spPr>
-        <p:txBody>
-          <a:bodyPr wrap="square"/>
-          <a:lstStyle/>
-          <a:p>
-            <a:r>
-              <a:rPr lang="zh-CN" dirty="0"/>
-              <a:t>第 50 节 · JSON / CSV 与持久化实战</a:t>
-            </a:r>
-          </a:p>
-          <a:p>
-            <a:r>
-              <a:rPr lang="zh-CN" dirty="0"/>
-              <a:t>单元 9 · 文件与异常 · W11</a:t>
-            </a:r>
-          </a:p>
-          <a:p>
-            <a:r>
-              <a:rPr lang="zh-CN" dirty="0"/>
-              <a:t/>
-            </a:r>
-          </a:p>
-          <a:p>
-            <a:r>
-              <a:rPr lang="zh-CN" dirty="0"/>
-              <a:t>学习目标：能用 JSON 让数据被记住，理解它和嵌套结构的关系</a:t>
-            </a:r>
-          </a:p>
-          <a:p>
-            <a:r>
-              <a:rPr lang="zh-CN" dirty="0"/>
-              <a:t/>
-            </a:r>
-          </a:p>
-          <a:p>
-            <a:r>
-              <a:rPr lang="zh-CN" dirty="0"/>
-              <a:t>课堂实操（40 分钟，不看答案）：</a:t>
-            </a:r>
-          </a:p>
-          <a:p>
-            <a:r>
-              <a:rPr lang="zh-CN" dirty="0"/>
-              <a:t>· 把嵌套字典存成 JSON 再读回来</a:t>
-            </a:r>
-          </a:p>
-          <a:p>
-            <a:r>
-              <a:rPr lang="zh-CN" dirty="0"/>
-              <a:t>· 读写一个 CSV 表格</a:t>
-            </a:r>
-          </a:p>
-          <a:p>
-            <a:r>
-              <a:rPr lang="zh-CN" dirty="0"/>
-              <a:t/>
-            </a:r>
-          </a:p>
-          <a:p>
-            <a:r>
-              <a:rPr lang="zh-CN" dirty="0"/>
-              <a:t>课后作业：</a:t>
-            </a:r>
-          </a:p>
-          <a:p>
-            <a:r>
-              <a:rPr lang="zh-CN" dirty="0"/>
-              <a:t>· ★ 动手项目 10.1–10.13 学习笔记管理</a:t>
-            </a:r>
-          </a:p>
-          <a:p>
-            <a:r>
-              <a:rPr lang="zh-CN" dirty="0"/>
-              <a:t/>
-            </a:r>
-          </a:p>
-          <a:p>
-            <a:r>
-              <a:rPr lang="zh-CN" dirty="0"/>
-              <a:t>节奏：讲 20 分钟 → 学员自己敲 40 分钟（不看答案）→ 对讲评自查 20 分钟 → 写作业 10 分钟。</a:t>
-            </a:r>
-          </a:p>
-        </p:txBody>
-      </p:sp>
-      <p:sp>
-        <p:nvSpPr>
-          <p:cNvPr id="2" name="讲课提示"/>
-          <p:cNvSpPr txBox="1"/>
-          <p:nvPr/>
-        </p:nvSpPr>
-        <p:spPr>
-          <a:xfrm>
-            <a:off x="457200" y="457200"/>
-            <a:ext cx="6858000" cy="4800600"/>
-          </a:xfrm>
-          <a:prstGeom prst="rect">
-            <a:avLst/>
-          </a:prstGeom>
-        </p:spPr>
-        <p:txBody>
-          <a:bodyPr wrap="square"/>
-          <a:lstStyle/>
-          <a:p>
-            <a:r>
-              <a:rPr lang="zh-CN" dirty="0"/>
-              <a:t>第 50 节 · JSON / CSV 与持久化实战</a:t>
-            </a:r>
-          </a:p>
-          <a:p>
-            <a:r>
-              <a:rPr lang="zh-CN" dirty="0"/>
-              <a:t>单元 9 · 文件与异常 · W11</a:t>
-            </a:r>
-          </a:p>
-          <a:p>
-            <a:r>
-              <a:rPr lang="zh-CN" dirty="0"/>
-              <a:t/>
-            </a:r>
-          </a:p>
-          <a:p>
-            <a:r>
-              <a:rPr lang="zh-CN" dirty="0"/>
-              <a:t>学习目标：能用 JSON 让数据被记住，理解它和嵌套结构的关系</a:t>
-            </a:r>
-          </a:p>
-          <a:p>
-            <a:r>
-              <a:rPr lang="zh-CN" dirty="0"/>
-              <a:t/>
-            </a:r>
-          </a:p>
-          <a:p>
-            <a:r>
-              <a:rPr lang="zh-CN" dirty="0"/>
-              <a:t>课堂实操（40 分钟，不看答案）：</a:t>
-            </a:r>
-          </a:p>
-          <a:p>
-            <a:r>
-              <a:rPr lang="zh-CN" dirty="0"/>
-              <a:t>· 把嵌套字典存成 JSON 再读回来</a:t>
-            </a:r>
-          </a:p>
-          <a:p>
-            <a:r>
-              <a:rPr lang="zh-CN" dirty="0"/>
-              <a:t>· 读写一个 CSV 表格</a:t>
-            </a:r>
-          </a:p>
-          <a:p>
-            <a:r>
-              <a:rPr lang="zh-CN" dirty="0"/>
-              <a:t/>
-            </a:r>
-          </a:p>
-          <a:p>
-            <a:r>
-              <a:rPr lang="zh-CN" dirty="0"/>
-              <a:t>课后作业：</a:t>
-            </a:r>
-          </a:p>
-          <a:p>
-            <a:r>
-              <a:rPr lang="zh-CN" dirty="0"/>
-              <a:t>· ★ 动手项目 10.1–10.13 学习笔记管理</a:t>
-            </a:r>
-          </a:p>
-          <a:p>
-            <a:r>
-              <a:rPr lang="zh-CN" dirty="0"/>
-              <a:t/>
-            </a:r>
-          </a:p>
-          <a:p>
-            <a:r>
-              <a:rPr lang="zh-CN" dirty="0"/>
-              <a:t>节奏：讲 20 分钟 → 学员自己敲 40 分钟（不看答案）→ 对讲评自查 20 分钟 → 写作业 10 分钟。</a:t>
-            </a:r>
-          </a:p>
-        </p:txBody>
-      </p:sp>
-    </p:spTree>
-  </p:cSld>
-  <p:clrMapOvr>
-    <a:masterClrMapping/>
-  </p:clrMapOvr>
-</p:notes>
-</file>
-
-<file path=ppt/notesSlides/notesSlide9.xml><?xml version="1.0" encoding="utf-8"?>
-<p:notes xmlns:a="http://schemas.openxmlformats.org/drawingml/2006/main" xmlns:p="http://schemas.openxmlformats.org/presentationml/2006/main" xmlns:r="http://schemas.openxmlformats.org/officeDocument/2006/relationships">
-  <p:cSld>
-    <p:spTree>
-      <p:nvGrpSpPr>
-        <p:cNvPr id="1" name=""/>
-        <p:cNvGrpSpPr/>
-        <p:nvPr/>
-      </p:nvGrpSpPr>
-      <p:grpSpPr>
-        <a:xfrm>
-          <a:off x="0" y="0"/>
-          <a:ext cx="0" cy="0"/>
-          <a:chOff x="0" y="0"/>
-          <a:chExt cx="0" cy="0"/>
-        </a:xfrm>
-      </p:grpSpPr>
-      <p:sp>
-        <p:nvSpPr>
-          <p:cNvPr id="2" name="讲课提示"/>
-          <p:cNvSpPr txBox="1"/>
-          <p:nvPr/>
-        </p:nvSpPr>
-        <p:spPr>
-          <a:xfrm>
-            <a:off x="457200" y="457200"/>
-            <a:ext cx="6858000" cy="4800600"/>
-          </a:xfrm>
-          <a:prstGeom prst="rect">
-            <a:avLst/>
-          </a:prstGeom>
-        </p:spPr>
-        <p:txBody>
-          <a:bodyPr wrap="square"/>
-          <a:lstStyle/>
-          <a:p>
-            <a:r>
-              <a:rPr lang="zh-CN" dirty="0"/>
-              <a:t>第 50 节 · 核心知识点：JSON / CSV 与持久化实战</a:t>
-            </a:r>
-          </a:p>
-          <a:p>
-            <a:r>
-              <a:rPr lang="zh-CN" dirty="0"/>
-              <a:t/>
-            </a:r>
-          </a:p>
-          <a:p>
-            <a:r>
-              <a:rPr lang="zh-CN" dirty="0"/>
-              <a:t>讲这一页时：先让学生说出上节课的结论，再逐块讲要点。</a:t>
-            </a:r>
-          </a:p>
-          <a:p>
-            <a:r>
-              <a:rPr lang="zh-CN" dirty="0"/>
-              <a:t>每讲完一块，问一句「这一步如果写错了，报错会长什么样？」——把错误提前讲。</a:t>
-            </a:r>
-          </a:p>
-          <a:p>
-            <a:r>
-              <a:rPr lang="zh-CN" dirty="0"/>
-              <a:t/>
-            </a:r>
-          </a:p>
-          <a:p>
-            <a:r>
-              <a:rPr lang="zh-CN" dirty="0"/>
-              <a:t>本节目标：能用 JSON 让数据被记住，理解它和嵌套结构的关系</a:t>
-            </a:r>
-          </a:p>
-          <a:p>
-            <a:r>
-              <a:rPr lang="zh-CN" dirty="0"/>
-              <a:t/>
-            </a:r>
-          </a:p>
-          <a:p>
-            <a:r>
-              <a:rPr lang="zh-CN" dirty="0"/>
-              <a:t>看不到懂的地方，回讲义对应小节读一遍，再回来对着这页复述一次——能讲出来才算真懂。</a:t>
-            </a:r>
-          </a:p>
-        </p:txBody>
-      </p:sp>
-      <p:sp>
-        <p:nvSpPr>
-          <p:cNvPr id="2" name="讲课提示"/>
-          <p:cNvSpPr txBox="1"/>
-          <p:nvPr/>
-        </p:nvSpPr>
-        <p:spPr>
-          <a:xfrm>
-            <a:off x="457200" y="457200"/>
-            <a:ext cx="6858000" cy="4800600"/>
-          </a:xfrm>
-          <a:prstGeom prst="rect">
-            <a:avLst/>
-          </a:prstGeom>
-        </p:spPr>
-        <p:txBody>
-          <a:bodyPr wrap="square"/>
-          <a:lstStyle/>
-          <a:p>
-            <a:r>
-              <a:rPr lang="zh-CN" dirty="0"/>
-              <a:t>第 50 节 · 核心知识点：JSON / CSV 与持久化实战</a:t>
-            </a:r>
-          </a:p>
-          <a:p>
-            <a:r>
-              <a:rPr lang="zh-CN" dirty="0"/>
-              <a:t/>
-            </a:r>
-          </a:p>
-          <a:p>
-            <a:r>
-              <a:rPr lang="zh-CN" dirty="0"/>
-              <a:t>讲这一页时：先让学生说出上节课的结论，再逐块讲要点。</a:t>
-            </a:r>
-          </a:p>
-          <a:p>
-            <a:r>
-              <a:rPr lang="zh-CN" dirty="0"/>
-              <a:t>每讲完一块，问一句「这一步如果写错了，报错会长什么样？」——把错误提前讲。</a:t>
-            </a:r>
-          </a:p>
-          <a:p>
-            <a:r>
-              <a:rPr lang="zh-CN" dirty="0"/>
-              <a:t/>
-            </a:r>
-          </a:p>
-          <a:p>
-            <a:r>
-              <a:rPr lang="zh-CN" dirty="0"/>
-              <a:t>本节目标：能用 JSON 让数据被记住，理解它和嵌套结构的关系</a:t>
-            </a:r>
-          </a:p>
-          <a:p>
-            <a:r>
-              <a:rPr lang="zh-CN" dirty="0"/>
-              <a:t/>
-            </a:r>
-          </a:p>
-          <a:p>
-            <a:r>
-              <a:rPr lang="zh-CN" dirty="0"/>
-              <a:t>看不到懂的地方，回讲义对应小节读一遍，再回来对着这页复述一次——能讲出来才算真懂。</a:t>
-            </a:r>
-          </a:p>
-        </p:txBody>
-      </p:sp>
-    </p:spTree>
-  </p:cSld>
-  <p:clrMapOvr>
-    <a:masterClrMapping/>
-  </p:clrMapOvr>
-</p:notes>
-</file>
-
 <file path=ppt/slideLayouts/slideLayout1.xml><?xml version="1.0" encoding="utf-8"?>
 <p:sldLayout xmlns:p="http://schemas.openxmlformats.org/presentationml/2006/main" xmlns:a="http://schemas.openxmlformats.org/drawingml/2006/main">
   <p:cSld name="DEFAULT">
@@ -2775,7 +555,7 @@
   <p:cSld>
     <p:spTree>
       <p:nvGrpSpPr>
-        <p:cNvPr id="1" name="" descr="&lt;Slide style={{ width: '1280px', height: '720px', backgroundColor: '#FAFCFE', padding: 0, position: 'relative', overflow: 'hidden' }}&gt;&#13;&#10;    &lt;Box style={{ position: 'absolute', left: 0, top: 0, width: '1280px', height: '150px', background: '#1F5FA8' }} /&gt;&#13;&#10;    &lt;Box style={{ position: 'absolute', left: 64, top: 34, width: '1152px', flexDirection: 'column' }}&gt;&#13;&#10;        &lt;Text style={{ fontSize: 15, fontWeight: 'bold', color: '#BFD9F2', letterSpacing: 2 }}&gt;阶段 1 · 单元 9&lt;/Text&gt;&#13;&#10;        &lt;Text style={{ fontSize: 38, fontWeight: 'bold', color: '#FFFFFF', marginTop: 6 }}&gt;文件与异常&lt;/Text&gt;&#13;&#10;    &lt;/Box&gt;&#13;&#10;    &lt;Box style={{ position: 'absolute', left: 64, top: 168, width: '1152px', height: 470 }}&gt;&#13;&#10;        &lt;svg width='1152' height='470' viewBox='0 0 1152 470'&gt;&#13;&#10;            &lt;text x='0' y='18' fontSize='15' fontWeight='bold' fill='#16232E' fontFamily='Microsoft YaHei'&gt;本单元共 5 节课&lt;/text&gt;&#13;&#10;            &lt;rect x='0' y='196' width='1152' height='38' rx='7' fill='#FFFFFF' /&gt;&lt;text x='16' y='221' fontSize='15' fontWeight='bold' fill='#1F5FA8' fontFamily='Microsoft YaHei'&gt;第 47 节&lt;/text&gt;&lt;text x='96' y='221' fontSize='15' fill='#16232E' fontFamily='Microsoft YaHei'&gt;open() 与三种模式&lt;/text&gt;&lt;text x='1080' y='221' fontSize='13' fill='#5A6B7A' textAnchor='end' fontFamily='Microsoft YaHei'&gt;W11&lt;/text&gt;&lt;rect x='0' y='238' width='1152' height='38' rx='7' fill='#F2F7FD' /&gt;&lt;text x='16' y='263' fontSize='15' fontWeight='bold' fill='#1F5FA8' fontFamily='Microsoft YaHei'&gt;第 48 节&lt;/text&gt;&lt;text x='96' y='263' fontSize='15' fill='#16232E' fontFamily='Microsoft YaHei'&gt;with 语句与四种读取方式&lt;/text&gt;&lt;text x='1080' y='263' fontSize='13' fill='#5A6B7A' textAnchor='end' fontFamily='Microsoft YaHei'&gt;W11&lt;/text&gt;&lt;rect x='0' y='280' width='1152' height='38' rx='7' fill='#FFFFFF' /&gt;&lt;text x='16' y='305' fontSize='15' fontWeight='bold' fill='#1F5FA8' fontFamily='Microsoft YaHei'&gt;第 49 节&lt;/text&gt;&lt;text x='96' y='305' fontSize='15' fill='#16232E' fontFamily='Microsoft YaHei'&gt;写文件与异常处理&lt;/text&gt;&lt;text x='1080' y='305' fontSize='13' fill='#5A6B7A' textAnchor='end' fontFamily='Microsoft YaHei'&gt;W11&lt;/text&gt;&lt;rect x='0' y='322' width='1152' height='38' rx='7' fill='#F2F7FD' /&gt;&lt;text x='16' y='347' fontSize='15' fontWeight='bold' fill='#1F5FA8' fontFamily='Microsoft YaHei'&gt;第 50 节&lt;/text&gt;&lt;text x='96' y='347' fontSize='15' fill='#16232E' fontFamily='Microsoft YaHei'&gt;JSON / CSV 与持久化实战&lt;/text&gt;&lt;text x='1080' y='347' fontSize='13' fill='#5A6B7A' textAnchor='end' fontFamily='Microsoft YaHei'&gt;W11&lt;/text&gt;&lt;rect x='0' y='364' width='1152' height='38' rx='7' fill='#FFFFFF' /&gt;&lt;text x='16' y='389' fontSize='15' fontWeight='bold' fill='#1F5FA8' fontFamily='Microsoft YaHei'&gt;第 51 节&lt;/text&gt;&lt;text x='96' y='389' fontSize='15' fill='#16232E' fontFamily='Microsoft YaHei'&gt;动手实战、答案与验收&lt;/text&gt;&lt;text x='1080' y='389' fontSize='13' fill='#5A6B7A' textAnchor='end' fontFamily='Microsoft YaHei'&gt;W11&lt;/text&gt;&#13;&#10;        &lt;/svg&gt;&#13;&#10;    &lt;/Box&gt;&#13;&#10;    &lt;Box style={{ position: 'absolute', left: 64, bottom: 22, width: '1152px', flexDirection: 'row', justifyContent: 'space-between' }}&gt;&#13;&#10;        &lt;Text style={{ fontSize: 13, color: '#8A9AAA' }}&gt;Python 讲授课件 · 逐节版&lt;/Text&gt;&#13;&#10;        &lt;Text style={{ fontSize: 13, color: '#8A9AAA' }}&gt;单元 9 · 封面&lt;/Text&gt;&#13;&#10;    &lt;/Box&gt;&#13;&#10;&lt;/Slide&gt;&#13;&#10;"/>
+        <p:cNvPr id="1" name="" descr="&lt;Slide style={{ width: '1280px', height: '720px', backgroundColor: '#FAFCFE', padding: 0, position: 'relative', overflow: 'hidden' }}&gt;&#13;&#10;    &lt;Box style={{ position: 'absolute', left: 0, top: 0, width: '1280px', height: '150px', background: '#1F5FA8' }} /&gt;&#13;&#10;    &lt;Box style={{ position: 'absolute', left: 64, top: 34, width: '1152px', flexDirection: 'column' }}&gt;&#13;&#10;        &lt;Text style={{ fontSize: 15, fontWeight: 'bold', color: '#BFD9F2', letterSpacing: 2 }}&gt;阶段 1 · 单元 9&lt;/Text&gt;&#13;&#10;        &lt;Text style={{ fontSize: 38, fontWeight: 'bold', color: '#FFFFFF', marginTop: 6 }}&gt;文件与异常&lt;/Text&gt;&#13;&#10;    &lt;/Box&gt;&#13;&#10;    &lt;Box style={{ position: 'absolute', left: 64, top: 168, width: '1152px', height: 470 }}&gt;&#13;&#10;        &lt;svg width='1152' height='470' viewBox='0 0 1152 470'&gt;&#13;&#10;            &lt;text x='0' y='18' fontSize='15' fontWeight='bold' fill='#16232E' fontFamily='Microsoft YaHei'&gt;本单元共 5 节课&lt;/text&gt;&#13;&#10;            &lt;rect x='0' y='56.0' width='1152' height='48.0' rx='7' fill='#FFFFFF' /&gt;&lt;text x='16' y='85.0' fontSize='15' fontWeight='bold' fill='#1F5FA8' fontFamily='Microsoft YaHei'&gt;第 47 节&lt;/text&gt;&lt;text x='96' y='85.0' fontSize='15' fill='#16232E' fontFamily='Microsoft YaHei'&gt;open() 与三种模式&lt;/text&gt;&lt;text x='1080' y='85.0' fontSize='13' fill='#5A6B7A' textAnchor='end' fontFamily='Microsoft YaHei'&gt;W11&lt;/text&gt;&lt;rect x='0' y='135.2' width='1152' height='48.0' rx='7' fill='#F2F7FD' /&gt;&lt;text x='16' y='164.2' fontSize='15' fontWeight='bold' fill='#1F5FA8' fontFamily='Microsoft YaHei'&gt;第 48 节&lt;/text&gt;&lt;text x='96' y='164.2' fontSize='15' fill='#16232E' fontFamily='Microsoft YaHei'&gt;with 语句与四种读取方式&lt;/text&gt;&lt;text x='1080' y='164.2' fontSize='13' fill='#5A6B7A' textAnchor='end' fontFamily='Microsoft YaHei'&gt;W11&lt;/text&gt;&lt;rect x='0' y='214.4' width='1152' height='48.0' rx='7' fill='#FFFFFF' /&gt;&lt;text x='16' y='243.4' fontSize='15' fontWeight='bold' fill='#1F5FA8' fontFamily='Microsoft YaHei'&gt;第 49 节&lt;/text&gt;&lt;text x='96' y='243.4' fontSize='15' fill='#16232E' fontFamily='Microsoft YaHei'&gt;写文件与异常处理&lt;/text&gt;&lt;text x='1080' y='243.4' fontSize='13' fill='#5A6B7A' textAnchor='end' fontFamily='Microsoft YaHei'&gt;W11&lt;/text&gt;&lt;rect x='0' y='293.6' width='1152' height='48.0' rx='7' fill='#F2F7FD' /&gt;&lt;text x='16' y='322.6' fontSize='15' fontWeight='bold' fill='#1F5FA8' fontFamily='Microsoft YaHei'&gt;第 50 节&lt;/text&gt;&lt;text x='96' y='322.6' fontSize='15' fill='#16232E' fontFamily='Microsoft YaHei'&gt;JSON / CSV 与持久化实战&lt;/text&gt;&lt;text x='1080' y='322.6' fontSize='13' fill='#5A6B7A' textAnchor='end' fontFamily='Microsoft YaHei'&gt;W11&lt;/text&gt;&lt;rect x='0' y='372.8' width='1152' height='48.0' rx='7' fill='#FFFFFF' /&gt;&lt;text x='16' y='401.8' fontSize='15' fontWeight='bold' fill='#1F5FA8' fontFamily='Microsoft YaHei'&gt;第 51 节&lt;/text&gt;&lt;text x='96' y='401.8' fontSize='15' fill='#16232E' fontFamily='Microsoft YaHei'&gt;动手实战、答案与验收&lt;/text&gt;&lt;text x='1080' y='401.8' fontSize='13' fill='#5A6B7A' textAnchor='end' fontFamily='Microsoft YaHei'&gt;W11&lt;/text&gt;&#13;&#10;        &lt;/svg&gt;&#13;&#10;    &lt;/Box&gt;&#13;&#10;    &lt;Box style={{ position: 'absolute', left: 64, bottom: 22, width: '1152px', flexDirection: 'row', justifyContent: 'space-between' }}&gt;&#13;&#10;        &lt;Text style={{ fontSize: 13, color: '#8A9AAA' }}&gt;Python 讲授课件 · 逐节版&lt;/Text&gt;&#13;&#10;        &lt;Text style={{ fontSize: 13, color: '#8A9AAA' }}&gt;单元 9 · 封面&lt;/Text&gt;&#13;&#10;    &lt;/Box&gt;&#13;&#10;&lt;/Slide&gt;&#13;&#10;"/>
         <p:cNvGrpSpPr/>
         <p:nvPr/>
       </p:nvGrpSpPr>
@@ -3289,7 +1069,7 @@
   <p:cSld>
     <p:spTree>
       <p:nvGrpSpPr>
-        <p:cNvPr id="15" name="" descr="&lt;Slide style={{ width: '1280px', height: '720px', backgroundColor: '#FAFCFE', padding: 0, position: 'relative', overflow: 'hidden' }}&gt;&#13;&#10;    &lt;Box style={{ position: 'absolute', left: 64, top: 36, width: '1152px', flexDirection: 'row', alignItems: 'center', gap: 12 }}&gt;&#13;&#10;        &lt;Box style={{ background: '#0E9B78', borderRadius: 5, padding: '3px 11px' }}&gt;&#13;&#10;            &lt;Text style={{ fontSize: 14, fontWeight: 'bold', color: '#FFFFFF' }}&gt;第 51 节&lt;/Text&gt;&#13;&#10;        &lt;/Box&gt;&#13;&#10;        &lt;Text style={{ fontSize: 30, fontWeight: 'bold', color: '#16232E' }}&gt;核心知识点&lt;/Text&gt;&#13;&#10;        &lt;Text style={{ fontSize: 15, color: '#5A6B7A', marginTop: 10 }}&gt;· 动手实战、答案与验收&lt;/Text&gt;&#13;&#10;    &lt;/Box&gt;&#13;&#10;    &lt;Box style={{ position: 'absolute', left: 0, top: 0, width: '1280px', height: '720px' }}&gt;&#13;&#10;        &lt;svg width='1280' height='720' viewBox='0 0 1280 720'&gt;&#13;&#10;            &lt;rect x='64' y='96' width='368' height='330' rx='12' fill='#FFFFFF' stroke='#D8E3EE' /&gt;&lt;rect x='64' y='96' width='368' height='4' rx='2' fill='#1F5FA8' /&gt;&lt;text x='82' y='130' fontSize='15.5' fontWeight='bold' fill='#1F5FA8' textAnchor='start' fontFamily='Microsoft YaHei'&gt;基础档&lt;/text&gt;&lt;text x='82' y='169.0' fontSize='13' fill='#3A4A58' textAnchor='start' fontFamily='Microsoft YaHei'&gt;· 练习 9-1【记事本程序】&lt;/text&gt;&lt;text x='82' y='197.5' fontSize='13' fill='#3A4A58' textAnchor='start' fontFamily='Microsoft YaHei'&gt;· 练习 9-2【四种读取方式对比】&lt;/text&gt;&lt;text x='82' y='226.0' fontSize='13' fill='#3A4A58' textAnchor='start' fontFamily='Microsoft YaHei'&gt;· .read() 的结果类型是 _，.readlines() 的结果是 _&lt;/text&gt;&lt;rect x='468' y='96' width='368' height='330' rx='12' fill='#FFFFFF' stroke='#D8E3EE' /&gt;&lt;rect x='468' y='96' width='368' height='4' rx='2' fill='#1F5FA8' /&gt;&lt;text x='486' y='130' fontSize='15.5' fontWeight='bold' fill='#1F5FA8' textAnchor='start' fontFamily='Microsoft YaHei'&gt;进阶档&lt;/text&gt;&lt;text x='486' y='169.0' fontSize='13' fill='#3A4A58' textAnchor='start' fontFamily='Microsoft YaHei'&gt;· 练习 9-5【JSON 配置文件】&lt;/text&gt;&lt;text x='486' y='197.5' fontSize='13' fill='#3A4A58' textAnchor='start' fontFamily='Microsoft YaHei'&gt;· 练习 9-6【CSV 成绩管理】&lt;/text&gt;&lt;text x='486' y='226.0' fontSize='13' fill='#3A4A58' textAnchor='start' fontFamily='Microsoft YaHei'&gt;· 练习 9-7【健壮的用户交互】&lt;/text&gt;&lt;rect x='872' y='96' width='368' height='330' rx='12' fill='#FFFFFF' stroke='#D8E3EE' /&gt;&lt;rect x='872' y='96' width='368' height='4' rx='2' fill='#1F5FA8' /&gt;&lt;text x='890' y='130' fontSize='15.5' fontWeight='bold' fill='#1F5FA8' textAnchor='start' fontFamily='Microsoft YaHei'&gt;参考答案 9-1&lt;/text&gt;&lt;text x='890' y='169.0' fontSize='13' fill='#3A4A58' textAnchor='start' fontFamily='Microsoft YaHei'&gt;· NOTES_FILE = &quot;notes.txt&quot;&lt;/text&gt;&lt;rect x='64' y='574' width='1152' height='66' rx='12' fill='#EEF5FB' /&gt;&lt;text x='84' y='616' fontSize='14' fill='#243444' textAnchor='start' fontFamily='Microsoft YaHei'&gt;看不懂的地方先回讲义对应小节读一遍，再回来对着这页复述一次——能讲出来才算真懂。&lt;/text&gt;&#13;&#10;            &lt;text x='64' y='684' fontSize='13' fill='#8A9AAA' fontFamily='Microsoft YaHei'&gt;Python 讲授课件 · 逐节版&lt;/text&gt;&#13;&#10;            &lt;text x='1216' y='684' fontSize='13' fill='#8A9AAA' textAnchor='end' fontFamily='Microsoft YaHei'&gt;单元 9 · 第 51 节&lt;/text&gt;&#13;&#10;        &lt;/svg&gt;&#13;&#10;    &lt;/Box&gt;&#13;&#10;&lt;/Slide&gt;&#13;&#10;"/>
+        <p:cNvPr id="15" name="" descr="&lt;Slide style={{ width: '1280px', height: '720px', backgroundColor: '#FAFCFE', padding: 0, position: 'relative', overflow: 'hidden' }}&gt;&#13;&#10;    &lt;Box style={{ position: 'absolute', left: 64, top: 36, width: '1152px', flexDirection: 'row', alignItems: 'center', gap: 12 }}&gt;&#13;&#10;        &lt;Box style={{ background: '#0E9B78', borderRadius: 5, padding: '3px 11px' }}&gt;&#13;&#10;            &lt;Text style={{ fontSize: 14, fontWeight: 'bold', color: '#FFFFFF' }}&gt;第 51 节&lt;/Text&gt;&#13;&#10;        &lt;/Box&gt;&#13;&#10;        &lt;Text style={{ fontSize: 30, fontWeight: 'bold', color: '#16232E' }}&gt;核心知识点&lt;/Text&gt;&#13;&#10;        &lt;Text style={{ fontSize: 15, color: '#5A6B7A', marginTop: 10 }}&gt;· 动手实战、答案与验收&lt;/Text&gt;&#13;&#10;    &lt;/Box&gt;&#13;&#10;    &lt;Box style={{ position: 'absolute', left: 0, top: 0, width: '1280px', height: '720px' }}&gt;&#13;&#10;        &lt;svg width='1280' height='720' viewBox='0 0 1280 720'&gt;&#13;&#10;            &lt;rect x='64' y='96' width='368' height='330' rx='12' fill='#FFFFFF' stroke='#D8E3EE' /&gt;&lt;rect x='64' y='96' width='368' height='4' rx='2' fill='#1F5FA8' /&gt;&lt;text x='82' y='130' fontSize='15.5' fontWeight='bold' fill='#1F5FA8' textAnchor='start' fontFamily='Microsoft YaHei'&gt;基础档&lt;/text&gt;&lt;text x='82' y='169.0' fontSize='13' fill='#3A4A58' textAnchor='start' fontFamily='Microsoft YaHei'&gt;· 练习 9-1【记事本程序】&lt;/text&gt;&lt;text x='82' y='197.5' fontSize='13' fill='#3A4A58' textAnchor='start' fontFamily='Microsoft YaHei'&gt;· 练习 9-2【四种读取方式对比】&lt;/text&gt;&lt;text x='82' y='226.0' fontSize='13' fill='#3A4A58' textAnchor='start' fontFamily='Microsoft YaHei'&gt;· .read() 的结果类型是 _，.readlines() 的结果是 _&lt;/text&gt;&lt;rect x='468' y='96' width='368' height='330' rx='12' fill='#FFFFFF' stroke='#D8E3EE' /&gt;&lt;rect x='468' y='96' width='368' height='4' rx='2' fill='#1F5FA8' /&gt;&lt;text x='486' y='130' fontSize='15.5' fontWeight='bold' fill='#1F5FA8' textAnchor='start' fontFamily='Microsoft YaHei'&gt;进阶档&lt;/text&gt;&lt;text x='486' y='169.0' fontSize='13' fill='#3A4A58' textAnchor='start' fontFamily='Microsoft YaHei'&gt;· 练习 9-5【JSON 配置文件】&lt;/text&gt;&lt;text x='486' y='197.5' fontSize='13' fill='#3A4A58' textAnchor='start' fontFamily='Microsoft YaHei'&gt;· 练习 9-6【CSV 成绩管理】&lt;/text&gt;&lt;text x='486' y='226.0' fontSize='13' fill='#3A4A58' textAnchor='start' fontFamily='Microsoft YaHei'&gt;· 练习 9-7【健壮的用户交互】&lt;/text&gt;&lt;rect x='872' y='96' width='368' height='330' rx='12' fill='#FFFFFF' stroke='#D8E3EE' /&gt;&lt;rect x='872' y='96' width='368' height='4' rx='2' fill='#1F5FA8' /&gt;&lt;text x='890' y='130' fontSize='15.5' fontWeight='bold' fill='#1F5FA8' textAnchor='start' fontFamily='Microsoft YaHei'&gt;参考答案 9-8&lt;/text&gt;&lt;text x='890' y='169.0' fontSize='13' fill='#3A4A58' textAnchor='start' fontFamily='Microsoft YaHei'&gt;· 1. 简答题&lt;/text&gt;&lt;text x='890' y='197.5' fontSize='13' fill='#3A4A58' textAnchor='start' fontFamily='Microsoft YaHei'&gt;· 2. 简答题&lt;/text&gt;&lt;text x='890' y='226.0' fontSize='13' fill='#3A4A58' textAnchor='start' fontFamily='Microsoft YaHei'&gt;· 3. 判断题&lt;/text&gt;&lt;rect x='64' y='574' width='1152' height='66' rx='12' fill='#EEF5FB' /&gt;&lt;text x='84' y='616' fontSize='14' fill='#243444' textAnchor='start' fontFamily='Microsoft YaHei'&gt;看不懂的地方先回讲义对应小节读一遍，再回来对着这页复述一次——能讲出来才算真懂。&lt;/text&gt;&#13;&#10;            &lt;text x='64' y='684' fontSize='13' fill='#8A9AAA' fontFamily='Microsoft YaHei'&gt;Python 讲授课件 · 逐节版&lt;/text&gt;&#13;&#10;            &lt;text x='1216' y='684' fontSize='13' fill='#8A9AAA' textAnchor='end' fontFamily='Microsoft YaHei'&gt;单元 9 · 第 51 节&lt;/text&gt;&#13;&#10;        &lt;/svg&gt;&#13;&#10;    &lt;/Box&gt;&#13;&#10;&lt;/Slide&gt;&#13;&#10;"/>
         <p:cNvGrpSpPr/>
         <p:nvPr/>
       </p:nvGrpSpPr>
@@ -4320,7 +2100,7 @@
   <p:cSld>
     <p:spTree>
       <p:nvGrpSpPr>
-        <p:cNvPr id="42" name="" descr="&lt;Slide style={{ width: '1280px', height: '720px', backgroundColor: '#FAFCFE', padding: 0, position: 'relative', overflow: 'hidden' }}&gt;&#13;&#10;    &lt;Box style={{ position: 'absolute', left: 64, top: 36, width: '1152px', flexDirection: 'row', alignItems: 'center', gap: 12 }}&gt;&#13;&#10;        &lt;Box style={{ background: '#0E9B78', borderRadius: 5, padding: '3px 11px' }}&gt;&#13;&#10;            &lt;Text style={{ fontSize: 14, fontWeight: 'bold', color: '#FFFFFF' }}&gt;第 47 节&lt;/Text&gt;&#13;&#10;        &lt;/Box&gt;&#13;&#10;        &lt;Text style={{ fontSize: 30, fontWeight: 'bold', color: '#16232E' }}&gt;核心知识点&lt;/Text&gt;&#13;&#10;        &lt;Text style={{ fontSize: 15, color: '#5A6B7A', marginTop: 10 }}&gt;· open() 与三种模式&lt;/Text&gt;&#13;&#10;    &lt;/Box&gt;&#13;&#10;    &lt;Box style={{ position: 'absolute', left: 0, top: 0, width: '1280px', height: '720px' }}&gt;&#13;&#10;        &lt;svg width='1280' height='720' viewBox='0 0 1280 720'&gt;&#13;&#10;            &lt;rect x='64' y='96' width='368' height='330' rx='12' fill='#FFFFFF' stroke='#D8E3EE' /&gt;&lt;rect x='64' y='96' width='368' height='4' rx='2' fill='#1F5FA8' /&gt;&lt;text x='82' y='130' fontSize='15.5' fontWeight='bold' fill='#1F5FA8' textAnchor='start' fontFamily='Microsoft YaHei'&gt;2.1 为什么需要文件：变量活不过程序结束&lt;/text&gt;&lt;text x='82' y='169.0' fontSize='13' fill='#3A4A58' textAnchor='start' fontFamily='Microsoft YaHei'&gt;· 变量 = 草稿纸上的字——写完一扔就没了。&lt;/text&gt;&lt;text x='82' y='197.5' fontSize='13' fill='#3A4A58' textAnchor='start' fontFamily='Microsoft YaHei'&gt;· 文件 = 写在笔记本上的字——合上本子，明天还在。&lt;/text&gt;&lt;rect x='468' y='96' width='368' height='330' rx='12' fill='#FFFFFF' stroke='#D8E3EE' /&gt;&lt;rect x='468' y='96' width='368' height='4' rx='2' fill='#1F5FA8' /&gt;&lt;text x='486' y='130' fontSize='15.5' fontWeight='bold' fill='#1F5FA8' textAnchor='start' fontFamily='Microsoft YaHei'&gt;2.2 open() 与三种模式&lt;/text&gt;&lt;text x='486' y='169.0' fontSize='13' fill='#3A4A58' textAnchor='start' fontFamily='Microsoft YaHei'&gt;· w 模式的陷阱必须重点记住：它不是&quot;写进文件&quot;，而是&quot;&lt;/text&gt;&lt;text x='486' y='188.5' fontSize='13' fill='#3A4A58' textAnchor='start' fontFamily='Microsoft YaHei'&gt;把文件清空，然后从零开始写&quot;。如果你只是想往文件…&lt;/text&gt;&lt;rect x='872' y='96' width='368' height='330' rx='12' fill='#FFFFFF' stroke='#D8E3EE' /&gt;&lt;rect x='872' y='96' width='368' height='4' rx='2' fill='#1F5FA8' /&gt;&lt;text x='890' y='130' fontSize='15.5' fontWeight='bold' fill='#1F5FA8' textAnchor='start' fontFamily='Microsoft YaHei'&gt;2.3 with open(...)：不只是语法糖&lt;/text&gt;&lt;text x='890' y='169.0' fontSize='13' fill='#3A4A58' textAnchor='start' fontFamily='Microsoft YaHei'&gt;· with 做了两件普通写法做不到的事：&lt;/text&gt;&lt;text x='890' y='197.5' fontSize='13' fill='#3A4A58' textAnchor='start' fontFamily='Microsoft YaHei'&gt;· ① 自动关闭文件，而且保证一定会关。&lt;/text&gt;&lt;text x='890' y='226.0' fontSize='13' fill='#3A4A58' textAnchor='start' fontFamily='Microsoft YaHei'&gt;· ② 出块后 f 变量本身失效。&lt;/text&gt;&lt;rect x='64' y='574' width='1152' height='66' rx='12' fill='#EEF5FB' /&gt;&lt;text x='84' y='616' fontSize='14' fill='#243444' textAnchor='start' fontFamily='Microsoft YaHei'&gt;看不懂的地方先回讲义对应小节读一遍，再回来对着这页复述一次——能讲出来才算真懂。&lt;/text&gt;&#13;&#10;            &lt;text x='64' y='684' fontSize='13' fill='#8A9AAA' fontFamily='Microsoft YaHei'&gt;Python 讲授课件 · 逐节版&lt;/text&gt;&#13;&#10;            &lt;text x='1216' y='684' fontSize='13' fill='#8A9AAA' textAnchor='end' fontFamily='Microsoft YaHei'&gt;单元 9 · 第 47 节&lt;/text&gt;&#13;&#10;        &lt;/svg&gt;&#13;&#10;    &lt;/Box&gt;&#13;&#10;&lt;/Slide&gt;&#13;&#10;"/>
+        <p:cNvPr id="42" name="" descr="&lt;Slide style={{ width: '1280px', height: '720px', backgroundColor: '#FAFCFE', padding: 0, position: 'relative', overflow: 'hidden' }}&gt;&#13;&#10;    &lt;Box style={{ position: 'absolute', left: 64, top: 36, width: '1152px', flexDirection: 'row', alignItems: 'center', gap: 12 }}&gt;&#13;&#10;        &lt;Box style={{ background: '#0E9B78', borderRadius: 5, padding: '3px 11px' }}&gt;&#13;&#10;            &lt;Text style={{ fontSize: 14, fontWeight: 'bold', color: '#FFFFFF' }}&gt;第 47 节&lt;/Text&gt;&#13;&#10;        &lt;/Box&gt;&#13;&#10;        &lt;Text style={{ fontSize: 30, fontWeight: 'bold', color: '#16232E' }}&gt;核心知识点&lt;/Text&gt;&#13;&#10;        &lt;Text style={{ fontSize: 15, color: '#5A6B7A', marginTop: 10 }}&gt;· open() 与三种模式&lt;/Text&gt;&#13;&#10;    &lt;/Box&gt;&#13;&#10;    &lt;Box style={{ position: 'absolute', left: 0, top: 0, width: '1280px', height: '720px' }}&gt;&#13;&#10;        &lt;svg width='1280' height='720' viewBox='0 0 1280 720'&gt;&#13;&#10;            &lt;rect x='64' y='96' width='368' height='330' rx='12' fill='#FFFFFF' stroke='#D8E3EE' /&gt;&lt;rect x='64' y='96' width='368' height='4' rx='2' fill='#1F5FA8' /&gt;&lt;text x='82' y='130' fontSize='15.5' fontWeight='bold' fill='#1F5FA8' textAnchor='start' fontFamily='Microsoft YaHei'&gt;2.1 为什么需要文件：变量活不过程序结束&lt;/text&gt;&lt;text x='82' y='169.0' fontSize='13' fill='#3A4A58' textAnchor='start' fontFamily='Microsoft YaHei'&gt;· 变量 = 草稿纸上的字——写完一扔就没了。&lt;/text&gt;&lt;text x='82' y='197.5' fontSize='13' fill='#3A4A58' textAnchor='start' fontFamily='Microsoft YaHei'&gt;· 文件 = 写在笔记本上的字——合上本子，明天还在。&lt;/text&gt;&lt;rect x='468' y='96' width='368' height='330' rx='12' fill='#FFFFFF' stroke='#D8E3EE' /&gt;&lt;rect x='468' y='96' width='368' height='4' rx='2' fill='#1F5FA8' /&gt;&lt;text x='486' y='130' fontSize='15.5' fontWeight='bold' fill='#1F5FA8' textAnchor='start' fontFamily='Microsoft YaHei'&gt;2.2 open() 与三种模式&lt;/text&gt;&lt;text x='486' y='169.0' fontSize='13' fill='#3A4A58' textAnchor='start' fontFamily='Microsoft YaHei'&gt;· w 模式的陷阱必须重点记住&lt;/text&gt;&lt;rect x='872' y='96' width='368' height='330' rx='12' fill='#FFFFFF' stroke='#D8E3EE' /&gt;&lt;rect x='872' y='96' width='368' height='4' rx='2' fill='#1F5FA8' /&gt;&lt;text x='890' y='130' fontSize='15.5' fontWeight='bold' fill='#1F5FA8' textAnchor='start' fontFamily='Microsoft YaHei'&gt;2.3 with open(...)：不只是语法糖&lt;/text&gt;&lt;text x='890' y='169.0' fontSize='13' fill='#3A4A58' textAnchor='start' fontFamily='Microsoft YaHei'&gt;· with 做了两件普通写法做不到的事&lt;/text&gt;&lt;text x='890' y='197.5' fontSize='13' fill='#3A4A58' textAnchor='start' fontFamily='Microsoft YaHei'&gt;· ① 自动关闭文件，而且保证一定会关。&lt;/text&gt;&lt;text x='890' y='226.0' fontSize='13' fill='#3A4A58' textAnchor='start' fontFamily='Microsoft YaHei'&gt;· ② 出块后 f 变量本身失效。&lt;/text&gt;&lt;rect x='64' y='574' width='1152' height='66' rx='12' fill='#EEF5FB' /&gt;&lt;text x='84' y='616' fontSize='14' fill='#243444' textAnchor='start' fontFamily='Microsoft YaHei'&gt;看不懂的地方先回讲义对应小节读一遍，再回来对着这页复述一次——能讲出来才算真懂。&lt;/text&gt;&#13;&#10;            &lt;text x='64' y='684' fontSize='13' fill='#8A9AAA' fontFamily='Microsoft YaHei'&gt;Python 讲授课件 · 逐节版&lt;/text&gt;&#13;&#10;            &lt;text x='1216' y='684' fontSize='13' fill='#8A9AAA' textAnchor='end' fontFamily='Microsoft YaHei'&gt;单元 9 · 第 47 节&lt;/text&gt;&#13;&#10;        &lt;/svg&gt;&#13;&#10;    &lt;/Box&gt;&#13;&#10;&lt;/Slide&gt;&#13;&#10;"/>
         <p:cNvGrpSpPr/>
         <p:nvPr/>
       </p:nvGrpSpPr>
@@ -4761,7 +2541,7 @@
   <p:cSld>
     <p:spTree>
       <p:nvGrpSpPr>
-        <p:cNvPr id="55" name="" descr="&lt;Slide style={{ width: '1280px', height: '720px', backgroundColor: '#FAFCFE', padding: 0, position: 'relative', overflow: 'hidden' }}&gt;&#13;&#10;    &lt;Box style={{ position: 'absolute', left: 64, top: 36, width: '1152px', flexDirection: 'row', alignItems: 'center', gap: 12 }}&gt;&#13;&#10;        &lt;Box style={{ background: '#0E9B78', borderRadius: 5, padding: '3px 11px' }}&gt;&#13;&#10;            &lt;Text style={{ fontSize: 14, fontWeight: 'bold', color: '#FFFFFF' }}&gt;第 48 节&lt;/Text&gt;&#13;&#10;        &lt;/Box&gt;&#13;&#10;        &lt;Text style={{ fontSize: 30, fontWeight: 'bold', color: '#16232E' }}&gt;核心知识点&lt;/Text&gt;&#13;&#10;        &lt;Text style={{ fontSize: 15, color: '#5A6B7A', marginTop: 10 }}&gt;· with 语句与四种读取方式&lt;/Text&gt;&#13;&#10;    &lt;/Box&gt;&#13;&#10;    &lt;Box style={{ position: 'absolute', left: 0, top: 0, width: '1280px', height: '720px' }}&gt;&#13;&#10;        &lt;svg width='1280' height='720' viewBox='0 0 1280 720'&gt;&#13;&#10;            &lt;rect x='64' y='96' width='548' height='330' rx='12' fill='#FFFFFF' stroke='#D8E3EE' /&gt;&lt;rect x='64' y='96' width='548' height='4' rx='2' fill='#1F5FA8' /&gt;&lt;text x='82' y='130' fontSize='15.5' fontWeight='bold' fill='#1F5FA8' textAnchor='start' fontFamily='Microsoft YaHei'&gt;2.4 四种读取方式&lt;/text&gt;&lt;text x='82' y='169.0' fontSize='13' fill='#3A4A58' textAnchor='start' fontFamily='Microsoft YaHei'&gt;· readline() 的两个细节：&lt;/text&gt;&lt;text x='82' y='197.5' fontSize='13' fill='#3A4A58' textAnchor='start' fontFamily='Microsoft YaHei'&gt;· 读到的行末尾带换行符 \n（除非是文件最后一行）。所以经常要 line.strip() 或 li&lt;/text&gt;&lt;text x='82' y='217.0' fontSize='13' fill='#3A4A58' textAnchor='start' fontFamily='Microsoft YaHei'&gt;ne.…&lt;/text&gt;&lt;text x='82' y='245.5' fontSize='13' fill='#3A4A58' textAnchor='start' fontFamily='Microsoft YaHei'&gt;· 文件末尾没有换行符时，最后一行就不带 \n。&lt;/text&gt;&lt;rect x='668' y='96' width='548' height='330' rx='12' fill='#FFFFFF' stroke='#D8E3EE' /&gt;&lt;rect x='668' y='96' width='548' height='4' rx='2' fill='#1F5FA8' /&gt;&lt;text x='686' y='130' fontSize='15.5' fontWeight='bold' fill='#1F5FA8' textAnchor='start' fontFamily='Microsoft YaHei'&gt;2.5 写文件&lt;/text&gt;&lt;text x='686' y='169.0' fontSize='13' fill='#3A4A58' textAnchor='start' fontFamily='Microsoft YaHei'&gt;· 关键：自己写 \n。 write() 不会自动换行。想写表格那样的多行内容，必须在每行末&lt;/text&gt;&lt;text x='686' y='188.5' fontSize='13' fill='#3A4A58' textAnchor='start' fontFamily='Microsoft YaHei'&gt;尾加上 \n。&lt;/text&gt;&lt;rect x='64' y='574' width='1152' height='66' rx='12' fill='#EEF5FB' /&gt;&lt;text x='84' y='616' fontSize='14' fill='#243444' textAnchor='start' fontFamily='Microsoft YaHei'&gt;看不懂的地方先回讲义对应小节读一遍，再回来对着这页复述一次——能讲出来才算真懂。&lt;/text&gt;&#13;&#10;            &lt;text x='64' y='684' fontSize='13' fill='#8A9AAA' fontFamily='Microsoft YaHei'&gt;Python 讲授课件 · 逐节版&lt;/text&gt;&#13;&#10;            &lt;text x='1216' y='684' fontSize='13' fill='#8A9AAA' textAnchor='end' fontFamily='Microsoft YaHei'&gt;单元 9 · 第 48 节&lt;/text&gt;&#13;&#10;        &lt;/svg&gt;&#13;&#10;    &lt;/Box&gt;&#13;&#10;&lt;/Slide&gt;&#13;&#10;"/>
+        <p:cNvPr id="55" name="" descr="&lt;Slide style={{ width: '1280px', height: '720px', backgroundColor: '#FAFCFE', padding: 0, position: 'relative', overflow: 'hidden' }}&gt;&#13;&#10;    &lt;Box style={{ position: 'absolute', left: 64, top: 36, width: '1152px', flexDirection: 'row', alignItems: 'center', gap: 12 }}&gt;&#13;&#10;        &lt;Box style={{ background: '#0E9B78', borderRadius: 5, padding: '3px 11px' }}&gt;&#13;&#10;            &lt;Text style={{ fontSize: 14, fontWeight: 'bold', color: '#FFFFFF' }}&gt;第 48 节&lt;/Text&gt;&#13;&#10;        &lt;/Box&gt;&#13;&#10;        &lt;Text style={{ fontSize: 30, fontWeight: 'bold', color: '#16232E' }}&gt;核心知识点&lt;/Text&gt;&#13;&#10;        &lt;Text style={{ fontSize: 15, color: '#5A6B7A', marginTop: 10 }}&gt;· with 语句与四种读取方式&lt;/Text&gt;&#13;&#10;    &lt;/Box&gt;&#13;&#10;    &lt;Box style={{ position: 'absolute', left: 0, top: 0, width: '1280px', height: '720px' }}&gt;&#13;&#10;        &lt;svg width='1280' height='720' viewBox='0 0 1280 720'&gt;&#13;&#10;            &lt;rect x='64' y='96' width='548' height='330' rx='12' fill='#FFFFFF' stroke='#D8E3EE' /&gt;&lt;rect x='64' y='96' width='548' height='4' rx='2' fill='#1F5FA8' /&gt;&lt;text x='82' y='130' fontSize='15.5' fontWeight='bold' fill='#1F5FA8' textAnchor='start' fontFamily='Microsoft YaHei'&gt;2.4 四种读取方式&lt;/text&gt;&lt;text x='82' y='169.0' fontSize='13' fill='#3A4A58' textAnchor='start' fontFamily='Microsoft YaHei'&gt;· readline() 的两个细节&lt;/text&gt;&lt;text x='82' y='197.5' fontSize='13' fill='#3A4A58' textAnchor='start' fontFamily='Microsoft YaHei'&gt;· 读到的行末尾带换行符 \n（除非是文件最后一行）。所以经常要 line.strip() 或&lt;/text&gt;&lt;text x='82' y='217.0' fontSize='13' fill='#3A4A58' textAnchor='start' fontFamily='Microsoft YaHei'&gt;line.…&lt;/text&gt;&lt;text x='82' y='245.5' fontSize='13' fill='#3A4A58' textAnchor='start' fontFamily='Microsoft YaHei'&gt;· 文件末尾没有换行符时，最后一行就不带 \n。&lt;/text&gt;&lt;rect x='668' y='96' width='548' height='330' rx='12' fill='#FFFFFF' stroke='#D8E3EE' /&gt;&lt;rect x='668' y='96' width='548' height='4' rx='2' fill='#1F5FA8' /&gt;&lt;text x='686' y='130' fontSize='15.5' fontWeight='bold' fill='#1F5FA8' textAnchor='start' fontFamily='Microsoft YaHei'&gt;2.5 写文件&lt;/text&gt;&lt;text x='686' y='169.0' fontSize='13' fill='#3A4A58' textAnchor='start' fontFamily='Microsoft YaHei'&gt;· 关键：自己写 \n。&lt;/text&gt;&lt;rect x='64' y='574' width='1152' height='66' rx='12' fill='#EEF5FB' /&gt;&lt;text x='84' y='616' fontSize='14' fill='#243444' textAnchor='start' fontFamily='Microsoft YaHei'&gt;看不懂的地方先回讲义对应小节读一遍，再回来对着这页复述一次——能讲出来才算真懂。&lt;/text&gt;&#13;&#10;            &lt;text x='64' y='684' fontSize='13' fill='#8A9AAA' fontFamily='Microsoft YaHei'&gt;Python 讲授课件 · 逐节版&lt;/text&gt;&#13;&#10;            &lt;text x='1216' y='684' fontSize='13' fill='#8A9AAA' textAnchor='end' fontFamily='Microsoft YaHei'&gt;单元 9 · 第 48 节&lt;/text&gt;&#13;&#10;        &lt;/svg&gt;&#13;&#10;    &lt;/Box&gt;&#13;&#10;&lt;/Slide&gt;&#13;&#10;"/>
         <p:cNvGrpSpPr/>
         <p:nvPr/>
       </p:nvGrpSpPr>
@@ -5192,7 +2972,7 @@
   <p:cSld>
     <p:spTree>
       <p:nvGrpSpPr>
-        <p:cNvPr id="68" name="" descr="&lt;Slide style={{ width: '1280px', height: '720px', backgroundColor: '#FAFCFE', padding: 0, position: 'relative', overflow: 'hidden' }}&gt;&#13;&#10;    &lt;Box style={{ position: 'absolute', left: 64, top: 36, width: '1152px', flexDirection: 'row', alignItems: 'center', gap: 12 }}&gt;&#13;&#10;        &lt;Box style={{ background: '#0E9B78', borderRadius: 5, padding: '3px 11px' }}&gt;&#13;&#10;            &lt;Text style={{ fontSize: 14, fontWeight: 'bold', color: '#FFFFFF' }}&gt;第 49 节&lt;/Text&gt;&#13;&#10;        &lt;/Box&gt;&#13;&#10;        &lt;Text style={{ fontSize: 30, fontWeight: 'bold', color: '#16232E' }}&gt;核心知识点&lt;/Text&gt;&#13;&#10;        &lt;Text style={{ fontSize: 15, color: '#5A6B7A', marginTop: 10 }}&gt;· 写文件与异常处理&lt;/Text&gt;&#13;&#10;    &lt;/Box&gt;&#13;&#10;    &lt;Box style={{ position: 'absolute', left: 0, top: 0, width: '1280px', height: '720px' }}&gt;&#13;&#10;        &lt;svg width='1280' height='720' viewBox='0 0 1280 720'&gt;&#13;&#10;            &lt;rect x='64' y='96' width='548' height='330' rx='12' fill='#FFFFFF' stroke='#D8E3EE' /&gt;&lt;rect x='64' y='96' width='548' height='4' rx='2' fill='#1F5FA8' /&gt;&lt;text x='82' y='130' fontSize='15.5' fontWeight='bold' fill='#1F5FA8' textAnchor='start' fontFamily='Microsoft YaHei'&gt;2.6 异常：让程序优雅地摔倒而不是死掉&lt;/text&gt;&lt;text x='82' y='169.0' fontSize='13' fill='#3A4A58' textAnchor='start' fontFamily='Microsoft YaHei'&gt;· 异常处理的骨架：&lt;/text&gt;&lt;text x='82' y='197.5' fontSize='13' fill='#3A4A58' textAnchor='start' fontFamily='Microsoft YaHei'&gt;· 为什么不要用裸 except:？&lt;/text&gt;&lt;rect x='668' y='96' width='548' height='330' rx='12' fill='#FFFFFF' stroke='#D8E3EE' /&gt;&lt;rect x='668' y='96' width='548' height='4' rx='2' fill='#1F5FA8' /&gt;&lt;text x='686' y='130' fontSize='15.5' fontWeight='bold' fill='#1F5FA8' textAnchor='start' fontFamily='Microsoft YaHei'&gt;2.7 异常处理的实用模式&lt;/text&gt;&lt;text x='686' y='169.0' fontSize='13' fill='#3A4A58' textAnchor='start' fontFamily='Microsoft YaHei'&gt;· 模式一：输入重试（单元 6 用过，现在正式理解它）&lt;/text&gt;&lt;text x='686' y='197.5' fontSize='13' fill='#3A4A58' textAnchor='start' fontFamily='Microsoft YaHei'&gt;· 模式二：多个异常分别处理&lt;/text&gt;&lt;text x='686' y='226.0' fontSize='13' fill='#3A4A58' textAnchor='start' fontFamily='Microsoft YaHei'&gt;· 模式三：获取异常信息（用 as 接收异常对象）&lt;/text&gt;&lt;rect x='64' y='574' width='1152' height='66' rx='12' fill='#EEF5FB' /&gt;&lt;text x='84' y='616' fontSize='14' fill='#243444' textAnchor='start' fontFamily='Microsoft YaHei'&gt;看不懂的地方先回讲义对应小节读一遍，再回来对着这页复述一次——能讲出来才算真懂。&lt;/text&gt;&#13;&#10;            &lt;text x='64' y='684' fontSize='13' fill='#8A9AAA' fontFamily='Microsoft YaHei'&gt;Python 讲授课件 · 逐节版&lt;/text&gt;&#13;&#10;            &lt;text x='1216' y='684' fontSize='13' fill='#8A9AAA' textAnchor='end' fontFamily='Microsoft YaHei'&gt;单元 9 · 第 49 节&lt;/text&gt;&#13;&#10;        &lt;/svg&gt;&#13;&#10;    &lt;/Box&gt;&#13;&#10;&lt;/Slide&gt;&#13;&#10;"/>
+        <p:cNvPr id="68" name="" descr="&lt;Slide style={{ width: '1280px', height: '720px', backgroundColor: '#FAFCFE', padding: 0, position: 'relative', overflow: 'hidden' }}&gt;&#13;&#10;    &lt;Box style={{ position: 'absolute', left: 64, top: 36, width: '1152px', flexDirection: 'row', alignItems: 'center', gap: 12 }}&gt;&#13;&#10;        &lt;Box style={{ background: '#0E9B78', borderRadius: 5, padding: '3px 11px' }}&gt;&#13;&#10;            &lt;Text style={{ fontSize: 14, fontWeight: 'bold', color: '#FFFFFF' }}&gt;第 49 节&lt;/Text&gt;&#13;&#10;        &lt;/Box&gt;&#13;&#10;        &lt;Text style={{ fontSize: 30, fontWeight: 'bold', color: '#16232E' }}&gt;核心知识点&lt;/Text&gt;&#13;&#10;        &lt;Text style={{ fontSize: 15, color: '#5A6B7A', marginTop: 10 }}&gt;· 写文件与异常处理&lt;/Text&gt;&#13;&#10;    &lt;/Box&gt;&#13;&#10;    &lt;Box style={{ position: 'absolute', left: 0, top: 0, width: '1280px', height: '720px' }}&gt;&#13;&#10;        &lt;svg width='1280' height='720' viewBox='0 0 1280 720'&gt;&#13;&#10;            &lt;rect x='64' y='96' width='548' height='330' rx='12' fill='#FFFFFF' stroke='#D8E3EE' /&gt;&lt;rect x='64' y='96' width='548' height='4' rx='2' fill='#1F5FA8' /&gt;&lt;text x='82' y='130' fontSize='15.5' fontWeight='bold' fill='#1F5FA8' textAnchor='start' fontFamily='Microsoft YaHei'&gt;2.6 异常：让程序优雅地摔倒而不是死掉&lt;/text&gt;&lt;text x='82' y='169.0' fontSize='13' fill='#3A4A58' textAnchor='start' fontFamily='Microsoft YaHei'&gt;· 异常处理的骨架&lt;/text&gt;&lt;text x='82' y='197.5' fontSize='13' fill='#3A4A58' textAnchor='start' fontFamily='Microsoft YaHei'&gt;· 为什么不要用裸 except:？&lt;/text&gt;&lt;rect x='668' y='96' width='548' height='330' rx='12' fill='#FFFFFF' stroke='#D8E3EE' /&gt;&lt;rect x='668' y='96' width='548' height='4' rx='2' fill='#1F5FA8' /&gt;&lt;text x='686' y='130' fontSize='15.5' fontWeight='bold' fill='#1F5FA8' textAnchor='start' fontFamily='Microsoft YaHei'&gt;2.7 异常处理的实用模式&lt;/text&gt;&lt;text x='686' y='169.0' fontSize='13' fill='#3A4A58' textAnchor='start' fontFamily='Microsoft YaHei'&gt;· 模式一：输入重试&lt;/text&gt;&lt;text x='686' y='197.5' fontSize='13' fill='#3A4A58' textAnchor='start' fontFamily='Microsoft YaHei'&gt;· 模式二：多个异常分别处理&lt;/text&gt;&lt;text x='686' y='226.0' fontSize='13' fill='#3A4A58' textAnchor='start' fontFamily='Microsoft YaHei'&gt;· 模式三：获取异常信息&lt;/text&gt;&lt;rect x='64' y='574' width='1152' height='66' rx='12' fill='#EEF5FB' /&gt;&lt;text x='84' y='616' fontSize='14' fill='#243444' textAnchor='start' fontFamily='Microsoft YaHei'&gt;看不懂的地方先回讲义对应小节读一遍，再回来对着这页复述一次——能讲出来才算真懂。&lt;/text&gt;&#13;&#10;            &lt;text x='64' y='684' fontSize='13' fill='#8A9AAA' fontFamily='Microsoft YaHei'&gt;Python 讲授课件 · 逐节版&lt;/text&gt;&#13;&#10;            &lt;text x='1216' y='684' fontSize='13' fill='#8A9AAA' textAnchor='end' fontFamily='Microsoft YaHei'&gt;单元 9 · 第 49 节&lt;/text&gt;&#13;&#10;        &lt;/svg&gt;&#13;&#10;    &lt;/Box&gt;&#13;&#10;&lt;/Slide&gt;&#13;&#10;"/>
         <p:cNvGrpSpPr/>
         <p:nvPr/>
       </p:nvGrpSpPr>
@@ -5633,7 +3413,7 @@
   <p:cSld>
     <p:spTree>
       <p:nvGrpSpPr>
-        <p:cNvPr id="81" name="" descr="&lt;Slide style={{ width: '1280px', height: '720px', backgroundColor: '#FAFCFE', padding: 0, position: 'relative', overflow: 'hidden' }}&gt;&#13;&#10;    &lt;Box style={{ position: 'absolute', left: 64, top: 36, width: '1152px', flexDirection: 'row', alignItems: 'center', gap: 12 }}&gt;&#13;&#10;        &lt;Box style={{ background: '#0E9B78', borderRadius: 5, padding: '3px 11px' }}&gt;&#13;&#10;            &lt;Text style={{ fontSize: 14, fontWeight: 'bold', color: '#FFFFFF' }}&gt;第 50 节&lt;/Text&gt;&#13;&#10;        &lt;/Box&gt;&#13;&#10;        &lt;Text style={{ fontSize: 30, fontWeight: 'bold', color: '#16232E' }}&gt;核心知识点&lt;/Text&gt;&#13;&#10;        &lt;Text style={{ fontSize: 15, color: '#5A6B7A', marginTop: 10 }}&gt;· JSON / CSV 与持久化实战&lt;/Text&gt;&#13;&#10;    &lt;/Box&gt;&#13;&#10;    &lt;Box style={{ position: 'absolute', left: 0, top: 0, width: '1280px', height: '720px' }}&gt;&#13;&#10;        &lt;svg width='1280' height='720' viewBox='0 0 1280 720'&gt;&#13;&#10;            &lt;rect x='64' y='96' width='548' height='330' rx='12' fill='#FFFFFF' stroke='#D8E3EE' /&gt;&lt;rect x='64' y='96' width='548' height='4' rx='2' fill='#1F5FA8' /&gt;&lt;text x='82' y='130' fontSize='15.5' fontWeight='bold' fill='#1F5FA8' textAnchor='start' fontFamily='Microsoft YaHei'&gt;2.8 JSON：让数据能被记住&lt;/text&gt;&lt;text x='82' y='169.0' fontSize='13' fill='#3A4A58' textAnchor='start' fontFamily='Microsoft YaHei'&gt;· JSON 与 Python 的对应关系（这张表要背下来）：&lt;/text&gt;&lt;text x='82' y='197.5' fontSize='13' fill='#3A4A58' textAnchor='start' fontFamily='Microsoft YaHei'&gt;· 注意一个坑：JSON 的 true/false 和 Python 的 True/False 大小写不同…&lt;/text&gt;&lt;text x='82' y='226.0' fontSize='13' fill='#3A4A58' textAnchor='start' fontFamily='Microsoft YaHei'&gt;· 读写 JSON 文件：&lt;/text&gt;&lt;rect x='668' y='96' width='548' height='330' rx='12' fill='#FFFFFF' stroke='#D8E3EE' /&gt;&lt;rect x='668' y='96' width='548' height='4' rx='2' fill='#1F5FA8' /&gt;&lt;text x='686' y='130' fontSize='15.5' fontWeight='bold' fill='#1F5FA8' textAnchor='start' fontFamily='Microsoft YaHei'&gt;2.9 CSV：读写表格&lt;/text&gt;&lt;text x='686' y='169.0' fontSize='13' fill='#3A4A58' textAnchor='start' fontFamily='Microsoft YaHei'&gt;· 两个必写的参数：&lt;/text&gt;&lt;text x='686' y='197.5' fontSize='13' fill='#3A4A58' textAnchor='start' fontFamily='Microsoft YaHei'&gt;· newline=&quot;&quot;：没有它，Windows 上会写出空行（Python 会在 \r\n 之间再加一个…&lt;/text&gt;&lt;text x='686' y='226.0' fontSize='13' fill='#3A4A58' textAnchor='start' fontFamily='Microsoft YaHei'&gt;· encoding=&quot;utf-8&quot;：同上，中文必需。&lt;/text&gt;&lt;text x='64' y='470' fontSize='14.5' fontWeight='bold' fill='#0E9B78' textAnchor='start' fontFamily='Microsoft YaHei'&gt;本节的代码示例&lt;/text&gt;&lt;text x='64' y='500' fontSize='13' fill='#3A4A58' textAnchor='start' fontFamily='Microsoft YaHei'&gt;· with open 读写&lt;/text&gt;&lt;text x='468' y='500' fontSize='13' fill='#3A4A58' textAnchor='start' fontFamily='Microsoft YaHei'&gt;· 三种模式的区别&lt;/text&gt;&lt;text x='872' y='500' fontSize='13' fill='#3A4A58' textAnchor='start' fontFamily='Microsoft YaHei'&gt;· 四种读取方式&lt;/text&gt;&lt;rect x='64' y='574' width='1152' height='66' rx='12' fill='#EEF5FB' /&gt;&lt;text x='84' y='616' fontSize='14' fill='#243444' textAnchor='start' fontFamily='Microsoft YaHei'&gt;看不懂的地方先回讲义对应小节读一遍，再回来对着这页复述一次——能讲出来才算真懂。&lt;/text&gt;&#13;&#10;            &lt;text x='64' y='684' fontSize='13' fill='#8A9AAA' fontFamily='Microsoft YaHei'&gt;Python 讲授课件 · 逐节版&lt;/text&gt;&#13;&#10;            &lt;text x='1216' y='684' fontSize='13' fill='#8A9AAA' textAnchor='end' fontFamily='Microsoft YaHei'&gt;单元 9 · 第 50 节&lt;/text&gt;&#13;&#10;        &lt;/svg&gt;&#13;&#10;    &lt;/Box&gt;&#13;&#10;&lt;/Slide&gt;&#13;&#10;"/>
+        <p:cNvPr id="81" name="" descr="&lt;Slide style={{ width: '1280px', height: '720px', backgroundColor: '#FAFCFE', padding: 0, position: 'relative', overflow: 'hidden' }}&gt;&#13;&#10;    &lt;Box style={{ position: 'absolute', left: 64, top: 36, width: '1152px', flexDirection: 'row', alignItems: 'center', gap: 12 }}&gt;&#13;&#10;        &lt;Box style={{ background: '#0E9B78', borderRadius: 5, padding: '3px 11px' }}&gt;&#13;&#10;            &lt;Text style={{ fontSize: 14, fontWeight: 'bold', color: '#FFFFFF' }}&gt;第 50 节&lt;/Text&gt;&#13;&#10;        &lt;/Box&gt;&#13;&#10;        &lt;Text style={{ fontSize: 30, fontWeight: 'bold', color: '#16232E' }}&gt;核心知识点&lt;/Text&gt;&#13;&#10;        &lt;Text style={{ fontSize: 15, color: '#5A6B7A', marginTop: 10 }}&gt;· JSON / CSV 与持久化实战&lt;/Text&gt;&#13;&#10;    &lt;/Box&gt;&#13;&#10;    &lt;Box style={{ position: 'absolute', left: 0, top: 0, width: '1280px', height: '720px' }}&gt;&#13;&#10;        &lt;svg width='1280' height='720' viewBox='0 0 1280 720'&gt;&#13;&#10;            &lt;rect x='64' y='96' width='548' height='330' rx='12' fill='#FFFFFF' stroke='#D8E3EE' /&gt;&lt;rect x='64' y='96' width='548' height='4' rx='2' fill='#1F5FA8' /&gt;&lt;text x='82' y='130' fontSize='15.5' fontWeight='bold' fill='#1F5FA8' textAnchor='start' fontFamily='Microsoft YaHei'&gt;2.8 JSON：让数据能被记住&lt;/text&gt;&lt;text x='82' y='169.0' fontSize='13' fill='#3A4A58' textAnchor='start' fontFamily='Microsoft YaHei'&gt;· JSON 与 Python 的对应关系&lt;/text&gt;&lt;text x='82' y='197.5' fontSize='13' fill='#3A4A58' textAnchor='start' fontFamily='Microsoft YaHei'&gt;· 注意一个坑&lt;/text&gt;&lt;text x='82' y='226.0' fontSize='13' fill='#3A4A58' textAnchor='start' fontFamily='Microsoft YaHei'&gt;· 读写 JSON 文件&lt;/text&gt;&lt;rect x='668' y='96' width='548' height='330' rx='12' fill='#FFFFFF' stroke='#D8E3EE' /&gt;&lt;rect x='668' y='96' width='548' height='4' rx='2' fill='#1F5FA8' /&gt;&lt;text x='686' y='130' fontSize='15.5' fontWeight='bold' fill='#1F5FA8' textAnchor='start' fontFamily='Microsoft YaHei'&gt;2.9 CSV：读写表格&lt;/text&gt;&lt;text x='686' y='169.0' fontSize='13' fill='#3A4A58' textAnchor='start' fontFamily='Microsoft YaHei'&gt;· 两个必写的参数&lt;/text&gt;&lt;text x='686' y='197.5' fontSize='13' fill='#3A4A58' textAnchor='start' fontFamily='Microsoft YaHei'&gt;· newline=&quot;&quot;：没有它，Windows 上会写出空行（Python 会在 \r\n 之间再加一个…&lt;/text&gt;&lt;text x='686' y='226.0' fontSize='13' fill='#3A4A58' textAnchor='start' fontFamily='Microsoft YaHei'&gt;· encoding=&quot;utf-8&quot;：同上，中文必需。&lt;/text&gt;&lt;text x='64' y='470' fontSize='14.5' fontWeight='bold' fill='#0E9B78' textAnchor='start' fontFamily='Microsoft YaHei'&gt;本节的代码示例&lt;/text&gt;&lt;text x='64' y='500' fontSize='13' fill='#3A4A58' textAnchor='start' fontFamily='Microsoft YaHei'&gt;· with open 读写&lt;/text&gt;&lt;text x='468' y='500' fontSize='13' fill='#3A4A58' textAnchor='start' fontFamily='Microsoft YaHei'&gt;· 三种模式的区别&lt;/text&gt;&lt;text x='872' y='500' fontSize='13' fill='#3A4A58' textAnchor='start' fontFamily='Microsoft YaHei'&gt;· 四种读取方式&lt;/text&gt;&lt;rect x='64' y='574' width='1152' height='66' rx='12' fill='#EEF5FB' /&gt;&lt;text x='84' y='616' fontSize='14' fill='#243444' textAnchor='start' fontFamily='Microsoft YaHei'&gt;看不懂的地方先回讲义对应小节读一遍，再回来对着这页复述一次——能讲出来才算真懂。&lt;/text&gt;&#13;&#10;            &lt;text x='64' y='684' fontSize='13' fill='#8A9AAA' fontFamily='Microsoft YaHei'&gt;Python 讲授课件 · 逐节版&lt;/text&gt;&#13;&#10;            &lt;text x='1216' y='684' fontSize='13' fill='#8A9AAA' textAnchor='end' fontFamily='Microsoft YaHei'&gt;单元 9 · 第 50 节&lt;/text&gt;&#13;&#10;        &lt;/svg&gt;&#13;&#10;    &lt;/Box&gt;&#13;&#10;&lt;/Slide&gt;&#13;&#10;"/>
         <p:cNvGrpSpPr/>
         <p:nvPr/>
       </p:nvGrpSpPr>

--- a/python-course-ppt/逐节课件/Python讲授课件-单元09.pptx
+++ b/python-course-ppt/逐节课件/Python讲授课件-单元09.pptx
@@ -236,6 +236,1266 @@
     </a:lvl9pPr>
   </p:notesStyle>
 </p:notesMaster>
+</file>
+
+<file path=ppt/notesSlides/notesSlide1.xml><?xml version="1.0" encoding="utf-8"?>
+<p:notes xmlns:a="http://schemas.openxmlformats.org/drawingml/2006/main" xmlns:p="http://schemas.openxmlformats.org/presentationml/2006/main" xmlns:r="http://schemas.openxmlformats.org/officeDocument/2006/relationships">
+  <p:cSld>
+    <p:spTree>
+      <p:nvGrpSpPr>
+        <p:cNvPr id="1" name=""/>
+        <p:cNvGrpSpPr/>
+        <p:nvPr/>
+      </p:nvGrpSpPr>
+      <p:grpSpPr>
+        <a:xfrm>
+          <a:off x="0" y="0"/>
+          <a:ext cx="0" cy="0"/>
+          <a:chOff x="0" y="0"/>
+          <a:chExt cx="0" cy="0"/>
+        </a:xfrm>
+      </p:grpSpPr>
+      <p:sp>
+        <p:nvSpPr>
+          <p:cNvPr id="2" name="讲课提示"/>
+          <p:cNvSpPr txBox="1"/>
+          <p:nvPr/>
+        </p:nvSpPr>
+        <p:spPr>
+          <a:xfrm>
+            <a:off x="457200" y="457200"/>
+            <a:ext cx="6858000" cy="4800600"/>
+          </a:xfrm>
+          <a:prstGeom prst="rect">
+            <a:avLst/>
+          </a:prstGeom>
+        </p:spPr>
+        <p:txBody>
+          <a:bodyPr wrap="square"/>
+          <a:lstStyle/>
+          <a:p>
+            <a:r>
+              <a:rPr lang="zh-CN" dirty="0"/>
+              <a:t>单元 9 · 单元 9 · 文件与异常</a:t>
+            </a:r>
+          </a:p>
+          <a:p>
+            <a:r>
+              <a:rPr lang="zh-CN" dirty="0"/>
+              <a:t/>
+            </a:r>
+          </a:p>
+          <a:p>
+            <a:r>
+              <a:rPr lang="zh-CN" dirty="0"/>
+              <a:t>本单元包含以下课节：</a:t>
+            </a:r>
+          </a:p>
+          <a:p>
+            <a:r>
+              <a:rPr lang="zh-CN" dirty="0"/>
+              <a:t>· 第 47 节 open() 与三种模式</a:t>
+            </a:r>
+          </a:p>
+          <a:p>
+            <a:r>
+              <a:rPr lang="zh-CN" dirty="0"/>
+              <a:t>· 第 48 节 with 语句与四种读取方式</a:t>
+            </a:r>
+          </a:p>
+          <a:p>
+            <a:r>
+              <a:rPr lang="zh-CN" dirty="0"/>
+              <a:t>· 第 49 节 写文件与异常处理</a:t>
+            </a:r>
+          </a:p>
+          <a:p>
+            <a:r>
+              <a:rPr lang="zh-CN" dirty="0"/>
+              <a:t>· 第 50 节 JSON / CSV 与持久化实战</a:t>
+            </a:r>
+          </a:p>
+          <a:p>
+            <a:r>
+              <a:rPr lang="zh-CN" dirty="0"/>
+              <a:t>· 第 51 节 动手实战、答案与验收</a:t>
+            </a:r>
+          </a:p>
+          <a:p>
+            <a:r>
+              <a:rPr lang="zh-CN" dirty="0"/>
+              <a:t/>
+            </a:r>
+          </a:p>
+          <a:p>
+            <a:r>
+              <a:rPr lang="zh-CN" dirty="0"/>
+              <a:t>开场用 3 分钟讲清：这个单元学完能做出什么，最后会被关卡怎么验。</a:t>
+            </a:r>
+          </a:p>
+        </p:txBody>
+      </p:sp>
+    </p:spTree>
+  </p:cSld>
+  <p:clrMapOvr>
+    <a:masterClrMapping/>
+  </p:clrMapOvr>
+</p:notes>
+</file>
+
+<file path=ppt/notesSlides/notesSlide10.xml><?xml version="1.0" encoding="utf-8"?>
+<p:notes xmlns:a="http://schemas.openxmlformats.org/drawingml/2006/main" xmlns:p="http://schemas.openxmlformats.org/presentationml/2006/main" xmlns:r="http://schemas.openxmlformats.org/officeDocument/2006/relationships">
+  <p:cSld>
+    <p:spTree>
+      <p:nvGrpSpPr>
+        <p:cNvPr id="1" name=""/>
+        <p:cNvGrpSpPr/>
+        <p:nvPr/>
+      </p:nvGrpSpPr>
+      <p:grpSpPr>
+        <a:xfrm>
+          <a:off x="0" y="0"/>
+          <a:ext cx="0" cy="0"/>
+          <a:chOff x="0" y="0"/>
+          <a:chExt cx="0" cy="0"/>
+        </a:xfrm>
+      </p:grpSpPr>
+      <p:sp>
+        <p:nvSpPr>
+          <p:cNvPr id="2" name="讲课提示"/>
+          <p:cNvSpPr txBox="1"/>
+          <p:nvPr/>
+        </p:nvSpPr>
+        <p:spPr>
+          <a:xfrm>
+            <a:off x="457200" y="457200"/>
+            <a:ext cx="6858000" cy="4800600"/>
+          </a:xfrm>
+          <a:prstGeom prst="rect">
+            <a:avLst/>
+          </a:prstGeom>
+        </p:spPr>
+        <p:txBody>
+          <a:bodyPr wrap="square"/>
+          <a:lstStyle/>
+          <a:p>
+            <a:r>
+              <a:rPr lang="zh-CN" dirty="0"/>
+              <a:t>第 51 节 · 动手实战、答案与验收</a:t>
+            </a:r>
+          </a:p>
+          <a:p>
+            <a:r>
+              <a:rPr lang="zh-CN" dirty="0"/>
+              <a:t>单元 9 · 文件与异常 · W11</a:t>
+            </a:r>
+          </a:p>
+          <a:p>
+            <a:r>
+              <a:rPr lang="zh-CN" dirty="0"/>
+              <a:t/>
+            </a:r>
+          </a:p>
+          <a:p>
+            <a:r>
+              <a:rPr lang="zh-CN" dirty="0"/>
+              <a:t>学习目标：独立完成单元 9 练习，确认文件与异常都过关</a:t>
+            </a:r>
+          </a:p>
+          <a:p>
+            <a:r>
+              <a:rPr lang="zh-CN" dirty="0"/>
+              <a:t/>
+            </a:r>
+          </a:p>
+          <a:p>
+            <a:r>
+              <a:rPr lang="zh-CN" dirty="0"/>
+              <a:t>课堂实操（40 分钟，不看答案）：</a:t>
+            </a:r>
+          </a:p>
+          <a:p>
+            <a:r>
+              <a:rPr lang="zh-CN" dirty="0"/>
+              <a:t>· 限时 30 分钟独立完成基础档</a:t>
+            </a:r>
+          </a:p>
+          <a:p>
+            <a:r>
+              <a:rPr lang="zh-CN" dirty="0"/>
+              <a:t>· 逐题对照答案并打勾验收自测</a:t>
+            </a:r>
+          </a:p>
+          <a:p>
+            <a:r>
+              <a:rPr lang="zh-CN" dirty="0"/>
+              <a:t/>
+            </a:r>
+          </a:p>
+          <a:p>
+            <a:r>
+              <a:rPr lang="zh-CN" dirty="0"/>
+              <a:t>课后作业：</a:t>
+            </a:r>
+          </a:p>
+          <a:p>
+            <a:r>
+              <a:rPr lang="zh-CN" dirty="0"/>
+              <a:t>· 产出：能存到 JSON 的学习笔记程序</a:t>
+            </a:r>
+          </a:p>
+          <a:p>
+            <a:r>
+              <a:rPr lang="zh-CN" dirty="0"/>
+              <a:t>· 完成本单元小结与产出检查</a:t>
+            </a:r>
+          </a:p>
+          <a:p>
+            <a:r>
+              <a:rPr lang="zh-CN" dirty="0"/>
+              <a:t/>
+            </a:r>
+          </a:p>
+          <a:p>
+            <a:r>
+              <a:rPr lang="zh-CN" dirty="0"/>
+              <a:t>节奏：讲 20 分钟 → 学员自己敲 40 分钟（不看答案）→ 对讲评自查 20 分钟 → 写作业 10 分钟。</a:t>
+            </a:r>
+          </a:p>
+        </p:txBody>
+      </p:sp>
+    </p:spTree>
+  </p:cSld>
+  <p:clrMapOvr>
+    <a:masterClrMapping/>
+  </p:clrMapOvr>
+</p:notes>
+</file>
+
+<file path=ppt/notesSlides/notesSlide11.xml><?xml version="1.0" encoding="utf-8"?>
+<p:notes xmlns:a="http://schemas.openxmlformats.org/drawingml/2006/main" xmlns:p="http://schemas.openxmlformats.org/presentationml/2006/main" xmlns:r="http://schemas.openxmlformats.org/officeDocument/2006/relationships">
+  <p:cSld>
+    <p:spTree>
+      <p:nvGrpSpPr>
+        <p:cNvPr id="1" name=""/>
+        <p:cNvGrpSpPr/>
+        <p:nvPr/>
+      </p:nvGrpSpPr>
+      <p:grpSpPr>
+        <a:xfrm>
+          <a:off x="0" y="0"/>
+          <a:ext cx="0" cy="0"/>
+          <a:chOff x="0" y="0"/>
+          <a:chExt cx="0" cy="0"/>
+        </a:xfrm>
+      </p:grpSpPr>
+      <p:sp>
+        <p:nvSpPr>
+          <p:cNvPr id="2" name="讲课提示"/>
+          <p:cNvSpPr txBox="1"/>
+          <p:nvPr/>
+        </p:nvSpPr>
+        <p:spPr>
+          <a:xfrm>
+            <a:off x="457200" y="457200"/>
+            <a:ext cx="6858000" cy="4800600"/>
+          </a:xfrm>
+          <a:prstGeom prst="rect">
+            <a:avLst/>
+          </a:prstGeom>
+        </p:spPr>
+        <p:txBody>
+          <a:bodyPr wrap="square"/>
+          <a:lstStyle/>
+          <a:p>
+            <a:r>
+              <a:rPr lang="zh-CN" dirty="0"/>
+              <a:t>第 51 节 · 核心知识点：动手实战、答案与验收</a:t>
+            </a:r>
+          </a:p>
+          <a:p>
+            <a:r>
+              <a:rPr lang="zh-CN" dirty="0"/>
+              <a:t/>
+            </a:r>
+          </a:p>
+          <a:p>
+            <a:r>
+              <a:rPr lang="zh-CN" dirty="0"/>
+              <a:t>讲这一页时：先让学生说出上节课的结论，再逐块讲要点。</a:t>
+            </a:r>
+          </a:p>
+          <a:p>
+            <a:r>
+              <a:rPr lang="zh-CN" dirty="0"/>
+              <a:t>每讲完一块，问一句「这一步如果写错了，报错会长什么样？」——把错误提前讲。</a:t>
+            </a:r>
+          </a:p>
+          <a:p>
+            <a:r>
+              <a:rPr lang="zh-CN" dirty="0"/>
+              <a:t/>
+            </a:r>
+          </a:p>
+          <a:p>
+            <a:r>
+              <a:rPr lang="zh-CN" dirty="0"/>
+              <a:t>本节目标：独立完成单元 9 练习，确认文件与异常都过关</a:t>
+            </a:r>
+          </a:p>
+          <a:p>
+            <a:r>
+              <a:rPr lang="zh-CN" dirty="0"/>
+              <a:t/>
+            </a:r>
+          </a:p>
+          <a:p>
+            <a:r>
+              <a:rPr lang="zh-CN" dirty="0"/>
+              <a:t>看不到懂的地方，回讲义对应小节读一遍，再回来对着这页复述一次——能讲出来才算真懂。</a:t>
+            </a:r>
+          </a:p>
+        </p:txBody>
+      </p:sp>
+    </p:spTree>
+  </p:cSld>
+  <p:clrMapOvr>
+    <a:masterClrMapping/>
+  </p:clrMapOvr>
+</p:notes>
+</file>
+
+<file path=ppt/notesSlides/notesSlide12.xml><?xml version="1.0" encoding="utf-8"?>
+<p:notes xmlns:a="http://schemas.openxmlformats.org/drawingml/2006/main" xmlns:p="http://schemas.openxmlformats.org/presentationml/2006/main" xmlns:r="http://schemas.openxmlformats.org/officeDocument/2006/relationships">
+  <p:cSld>
+    <p:spTree>
+      <p:nvGrpSpPr>
+        <p:cNvPr id="1" name=""/>
+        <p:cNvGrpSpPr/>
+        <p:nvPr/>
+      </p:nvGrpSpPr>
+      <p:grpSpPr>
+        <a:xfrm>
+          <a:off x="0" y="0"/>
+          <a:ext cx="0" cy="0"/>
+          <a:chOff x="0" y="0"/>
+          <a:chExt cx="0" cy="0"/>
+        </a:xfrm>
+      </p:grpSpPr>
+      <p:sp>
+        <p:nvSpPr>
+          <p:cNvPr id="2" name="讲课提示"/>
+          <p:cNvSpPr txBox="1"/>
+          <p:nvPr/>
+        </p:nvSpPr>
+        <p:spPr>
+          <a:xfrm>
+            <a:off x="457200" y="457200"/>
+            <a:ext cx="6858000" cy="4800600"/>
+          </a:xfrm>
+          <a:prstGeom prst="rect">
+            <a:avLst/>
+          </a:prstGeom>
+        </p:spPr>
+        <p:txBody>
+          <a:bodyPr wrap="square"/>
+          <a:lstStyle/>
+          <a:p>
+            <a:r>
+              <a:rPr lang="zh-CN" dirty="0"/>
+              <a:t>单元 9 小结 · 单元 9 · 小结</a:t>
+            </a:r>
+          </a:p>
+          <a:p>
+            <a:r>
+              <a:rPr lang="zh-CN" dirty="0"/>
+              <a:t/>
+            </a:r>
+          </a:p>
+          <a:p>
+            <a:r>
+              <a:rPr lang="zh-CN" dirty="0"/>
+              <a:t>收尾动作：让学生合上讲义，口述本单元三个最重要的结论；说不出来的，回对应课节。</a:t>
+            </a:r>
+          </a:p>
+          <a:p>
+            <a:r>
+              <a:rPr lang="zh-CN" dirty="0"/>
+              <a:t>然后当场勾一遍本单元课节的「已完成」，没打勾的进下一单元前补掉。</a:t>
+            </a:r>
+          </a:p>
+        </p:txBody>
+      </p:sp>
+    </p:spTree>
+  </p:cSld>
+  <p:clrMapOvr>
+    <a:masterClrMapping/>
+  </p:clrMapOvr>
+</p:notes>
+</file>
+
+<file path=ppt/notesSlides/notesSlide2.xml><?xml version="1.0" encoding="utf-8"?>
+<p:notes xmlns:a="http://schemas.openxmlformats.org/drawingml/2006/main" xmlns:p="http://schemas.openxmlformats.org/presentationml/2006/main" xmlns:r="http://schemas.openxmlformats.org/officeDocument/2006/relationships">
+  <p:cSld>
+    <p:spTree>
+      <p:nvGrpSpPr>
+        <p:cNvPr id="1" name=""/>
+        <p:cNvGrpSpPr/>
+        <p:nvPr/>
+      </p:nvGrpSpPr>
+      <p:grpSpPr>
+        <a:xfrm>
+          <a:off x="0" y="0"/>
+          <a:ext cx="0" cy="0"/>
+          <a:chOff x="0" y="0"/>
+          <a:chExt cx="0" cy="0"/>
+        </a:xfrm>
+      </p:grpSpPr>
+      <p:sp>
+        <p:nvSpPr>
+          <p:cNvPr id="2" name="讲课提示"/>
+          <p:cNvSpPr txBox="1"/>
+          <p:nvPr/>
+        </p:nvSpPr>
+        <p:spPr>
+          <a:xfrm>
+            <a:off x="457200" y="457200"/>
+            <a:ext cx="6858000" cy="4800600"/>
+          </a:xfrm>
+          <a:prstGeom prst="rect">
+            <a:avLst/>
+          </a:prstGeom>
+        </p:spPr>
+        <p:txBody>
+          <a:bodyPr wrap="square"/>
+          <a:lstStyle/>
+          <a:p>
+            <a:r>
+              <a:rPr lang="zh-CN" dirty="0"/>
+              <a:t>第 47 节 · open() 与三种模式</a:t>
+            </a:r>
+          </a:p>
+          <a:p>
+            <a:r>
+              <a:rPr lang="zh-CN" dirty="0"/>
+              <a:t>单元 9 · 文件与异常 · W11</a:t>
+            </a:r>
+          </a:p>
+          <a:p>
+            <a:r>
+              <a:rPr lang="zh-CN" dirty="0"/>
+              <a:t/>
+            </a:r>
+          </a:p>
+          <a:p>
+            <a:r>
+              <a:rPr lang="zh-CN" dirty="0"/>
+              <a:t>学习目标：掌握 r / w / a 三种模式，理解变量活不过程序结束</a:t>
+            </a:r>
+          </a:p>
+          <a:p>
+            <a:r>
+              <a:rPr lang="zh-CN" dirty="0"/>
+              <a:t/>
+            </a:r>
+          </a:p>
+          <a:p>
+            <a:r>
+              <a:rPr lang="zh-CN" dirty="0"/>
+              <a:t>课堂实操（40 分钟，不看答案）：</a:t>
+            </a:r>
+          </a:p>
+          <a:p>
+            <a:r>
+              <a:rPr lang="zh-CN" dirty="0"/>
+              <a:t>· 现场演示 r / w / a 三种模式的效果</a:t>
+            </a:r>
+          </a:p>
+          <a:p>
+            <a:r>
+              <a:rPr lang="zh-CN" dirty="0"/>
+              <a:t>· 对比读同一个文件两次的差别</a:t>
+            </a:r>
+          </a:p>
+          <a:p>
+            <a:r>
+              <a:rPr lang="zh-CN" dirty="0"/>
+              <a:t/>
+            </a:r>
+          </a:p>
+          <a:p>
+            <a:r>
+              <a:rPr lang="zh-CN" dirty="0"/>
+              <a:t>课后作业：</a:t>
+            </a:r>
+          </a:p>
+          <a:p>
+            <a:r>
+              <a:rPr lang="zh-CN" dirty="0"/>
+              <a:t>· 完成动手练习 9-1 ~ 9-2</a:t>
+            </a:r>
+          </a:p>
+          <a:p>
+            <a:r>
+              <a:rPr lang="zh-CN" dirty="0"/>
+              <a:t/>
+            </a:r>
+          </a:p>
+          <a:p>
+            <a:r>
+              <a:rPr lang="zh-CN" dirty="0"/>
+              <a:t>节奏：讲 20 分钟 → 学员自己敲 40 分钟（不看答案）→ 对讲评自查 20 分钟 → 写作业 10 分钟。</a:t>
+            </a:r>
+          </a:p>
+        </p:txBody>
+      </p:sp>
+    </p:spTree>
+  </p:cSld>
+  <p:clrMapOvr>
+    <a:masterClrMapping/>
+  </p:clrMapOvr>
+</p:notes>
+</file>
+
+<file path=ppt/notesSlides/notesSlide3.xml><?xml version="1.0" encoding="utf-8"?>
+<p:notes xmlns:a="http://schemas.openxmlformats.org/drawingml/2006/main" xmlns:p="http://schemas.openxmlformats.org/presentationml/2006/main" xmlns:r="http://schemas.openxmlformats.org/officeDocument/2006/relationships">
+  <p:cSld>
+    <p:spTree>
+      <p:nvGrpSpPr>
+        <p:cNvPr id="1" name=""/>
+        <p:cNvGrpSpPr/>
+        <p:nvPr/>
+      </p:nvGrpSpPr>
+      <p:grpSpPr>
+        <a:xfrm>
+          <a:off x="0" y="0"/>
+          <a:ext cx="0" cy="0"/>
+          <a:chOff x="0" y="0"/>
+          <a:chExt cx="0" cy="0"/>
+        </a:xfrm>
+      </p:grpSpPr>
+      <p:sp>
+        <p:nvSpPr>
+          <p:cNvPr id="2" name="讲课提示"/>
+          <p:cNvSpPr txBox="1"/>
+          <p:nvPr/>
+        </p:nvSpPr>
+        <p:spPr>
+          <a:xfrm>
+            <a:off x="457200" y="457200"/>
+            <a:ext cx="6858000" cy="4800600"/>
+          </a:xfrm>
+          <a:prstGeom prst="rect">
+            <a:avLst/>
+          </a:prstGeom>
+        </p:spPr>
+        <p:txBody>
+          <a:bodyPr wrap="square"/>
+          <a:lstStyle/>
+          <a:p>
+            <a:r>
+              <a:rPr lang="zh-CN" dirty="0"/>
+              <a:t>第 47 节 · 核心知识点：open() 与三种模式</a:t>
+            </a:r>
+          </a:p>
+          <a:p>
+            <a:r>
+              <a:rPr lang="zh-CN" dirty="0"/>
+              <a:t/>
+            </a:r>
+          </a:p>
+          <a:p>
+            <a:r>
+              <a:rPr lang="zh-CN" dirty="0"/>
+              <a:t>讲这一页时：先让学生说出上节课的结论，再逐块讲要点。</a:t>
+            </a:r>
+          </a:p>
+          <a:p>
+            <a:r>
+              <a:rPr lang="zh-CN" dirty="0"/>
+              <a:t>每讲完一块，问一句「这一步如果写错了，报错会长什么样？」——把错误提前讲。</a:t>
+            </a:r>
+          </a:p>
+          <a:p>
+            <a:r>
+              <a:rPr lang="zh-CN" dirty="0"/>
+              <a:t/>
+            </a:r>
+          </a:p>
+          <a:p>
+            <a:r>
+              <a:rPr lang="zh-CN" dirty="0"/>
+              <a:t>本节目标：掌握 r / w / a 三种模式，理解变量活不过程序结束</a:t>
+            </a:r>
+          </a:p>
+          <a:p>
+            <a:r>
+              <a:rPr lang="zh-CN" dirty="0"/>
+              <a:t/>
+            </a:r>
+          </a:p>
+          <a:p>
+            <a:r>
+              <a:rPr lang="zh-CN" dirty="0"/>
+              <a:t>看不到懂的地方，回讲义对应小节读一遍，再回来对着这页复述一次——能讲出来才算真懂。</a:t>
+            </a:r>
+          </a:p>
+        </p:txBody>
+      </p:sp>
+    </p:spTree>
+  </p:cSld>
+  <p:clrMapOvr>
+    <a:masterClrMapping/>
+  </p:clrMapOvr>
+</p:notes>
+</file>
+
+<file path=ppt/notesSlides/notesSlide4.xml><?xml version="1.0" encoding="utf-8"?>
+<p:notes xmlns:a="http://schemas.openxmlformats.org/drawingml/2006/main" xmlns:p="http://schemas.openxmlformats.org/presentationml/2006/main" xmlns:r="http://schemas.openxmlformats.org/officeDocument/2006/relationships">
+  <p:cSld>
+    <p:spTree>
+      <p:nvGrpSpPr>
+        <p:cNvPr id="1" name=""/>
+        <p:cNvGrpSpPr/>
+        <p:nvPr/>
+      </p:nvGrpSpPr>
+      <p:grpSpPr>
+        <a:xfrm>
+          <a:off x="0" y="0"/>
+          <a:ext cx="0" cy="0"/>
+          <a:chOff x="0" y="0"/>
+          <a:chExt cx="0" cy="0"/>
+        </a:xfrm>
+      </p:grpSpPr>
+      <p:sp>
+        <p:nvSpPr>
+          <p:cNvPr id="2" name="讲课提示"/>
+          <p:cNvSpPr txBox="1"/>
+          <p:nvPr/>
+        </p:nvSpPr>
+        <p:spPr>
+          <a:xfrm>
+            <a:off x="457200" y="457200"/>
+            <a:ext cx="6858000" cy="4800600"/>
+          </a:xfrm>
+          <a:prstGeom prst="rect">
+            <a:avLst/>
+          </a:prstGeom>
+        </p:spPr>
+        <p:txBody>
+          <a:bodyPr wrap="square"/>
+          <a:lstStyle/>
+          <a:p>
+            <a:r>
+              <a:rPr lang="zh-CN" dirty="0"/>
+              <a:t>第 48 节 · with 语句与四种读取方式</a:t>
+            </a:r>
+          </a:p>
+          <a:p>
+            <a:r>
+              <a:rPr lang="zh-CN" dirty="0"/>
+              <a:t>单元 9 · 文件与异常 · W11</a:t>
+            </a:r>
+          </a:p>
+          <a:p>
+            <a:r>
+              <a:rPr lang="zh-CN" dirty="0"/>
+              <a:t/>
+            </a:r>
+          </a:p>
+          <a:p>
+            <a:r>
+              <a:rPr lang="zh-CN" dirty="0"/>
+              <a:t>学习目标：掌握 with 的真实作用与read / readline / readlines 的区别</a:t>
+            </a:r>
+          </a:p>
+          <a:p>
+            <a:r>
+              <a:rPr lang="zh-CN" dirty="0"/>
+              <a:t/>
+            </a:r>
+          </a:p>
+          <a:p>
+            <a:r>
+              <a:rPr lang="zh-CN" dirty="0"/>
+              <a:t>课堂实操（40 分钟，不看答案）：</a:t>
+            </a:r>
+          </a:p>
+          <a:p>
+            <a:r>
+              <a:rPr lang="zh-CN" dirty="0"/>
+              <a:t>· 故意不写 with，让程序中途崩溃观察文件句柄泄漏</a:t>
+            </a:r>
+          </a:p>
+          <a:p>
+            <a:r>
+              <a:rPr lang="zh-CN" dirty="0"/>
+              <a:t>· 对比四种读取方式的返回类型</a:t>
+            </a:r>
+          </a:p>
+          <a:p>
+            <a:r>
+              <a:rPr lang="zh-CN" dirty="0"/>
+              <a:t/>
+            </a:r>
+          </a:p>
+          <a:p>
+            <a:r>
+              <a:rPr lang="zh-CN" dirty="0"/>
+              <a:t>课后作业：</a:t>
+            </a:r>
+          </a:p>
+          <a:p>
+            <a:r>
+              <a:rPr lang="zh-CN" dirty="0"/>
+              <a:t>· 完成动手练习 9-3</a:t>
+            </a:r>
+          </a:p>
+          <a:p>
+            <a:r>
+              <a:rPr lang="zh-CN" dirty="0"/>
+              <a:t/>
+            </a:r>
+          </a:p>
+          <a:p>
+            <a:r>
+              <a:rPr lang="zh-CN" dirty="0"/>
+              <a:t>节奏：讲 20 分钟 → 学员自己敲 40 分钟（不看答案）→ 对讲评自查 20 分钟 → 写作业 10 分钟。</a:t>
+            </a:r>
+          </a:p>
+        </p:txBody>
+      </p:sp>
+    </p:spTree>
+  </p:cSld>
+  <p:clrMapOvr>
+    <a:masterClrMapping/>
+  </p:clrMapOvr>
+</p:notes>
+</file>
+
+<file path=ppt/notesSlides/notesSlide5.xml><?xml version="1.0" encoding="utf-8"?>
+<p:notes xmlns:a="http://schemas.openxmlformats.org/drawingml/2006/main" xmlns:p="http://schemas.openxmlformats.org/presentationml/2006/main" xmlns:r="http://schemas.openxmlformats.org/officeDocument/2006/relationships">
+  <p:cSld>
+    <p:spTree>
+      <p:nvGrpSpPr>
+        <p:cNvPr id="1" name=""/>
+        <p:cNvGrpSpPr/>
+        <p:nvPr/>
+      </p:nvGrpSpPr>
+      <p:grpSpPr>
+        <a:xfrm>
+          <a:off x="0" y="0"/>
+          <a:ext cx="0" cy="0"/>
+          <a:chOff x="0" y="0"/>
+          <a:chExt cx="0" cy="0"/>
+        </a:xfrm>
+      </p:grpSpPr>
+      <p:sp>
+        <p:nvSpPr>
+          <p:cNvPr id="2" name="讲课提示"/>
+          <p:cNvSpPr txBox="1"/>
+          <p:nvPr/>
+        </p:nvSpPr>
+        <p:spPr>
+          <a:xfrm>
+            <a:off x="457200" y="457200"/>
+            <a:ext cx="6858000" cy="4800600"/>
+          </a:xfrm>
+          <a:prstGeom prst="rect">
+            <a:avLst/>
+          </a:prstGeom>
+        </p:spPr>
+        <p:txBody>
+          <a:bodyPr wrap="square"/>
+          <a:lstStyle/>
+          <a:p>
+            <a:r>
+              <a:rPr lang="zh-CN" dirty="0"/>
+              <a:t>第 48 节 · 核心知识点：with 语句与四种读取方式</a:t>
+            </a:r>
+          </a:p>
+          <a:p>
+            <a:r>
+              <a:rPr lang="zh-CN" dirty="0"/>
+              <a:t/>
+            </a:r>
+          </a:p>
+          <a:p>
+            <a:r>
+              <a:rPr lang="zh-CN" dirty="0"/>
+              <a:t>讲这一页时：先让学生说出上节课的结论，再逐块讲要点。</a:t>
+            </a:r>
+          </a:p>
+          <a:p>
+            <a:r>
+              <a:rPr lang="zh-CN" dirty="0"/>
+              <a:t>每讲完一块，问一句「这一步如果写错了，报错会长什么样？」——把错误提前讲。</a:t>
+            </a:r>
+          </a:p>
+          <a:p>
+            <a:r>
+              <a:rPr lang="zh-CN" dirty="0"/>
+              <a:t/>
+            </a:r>
+          </a:p>
+          <a:p>
+            <a:r>
+              <a:rPr lang="zh-CN" dirty="0"/>
+              <a:t>本节目标：掌握 with 的真实作用与read / readline / readlines 的区别</a:t>
+            </a:r>
+          </a:p>
+          <a:p>
+            <a:r>
+              <a:rPr lang="zh-CN" dirty="0"/>
+              <a:t/>
+            </a:r>
+          </a:p>
+          <a:p>
+            <a:r>
+              <a:rPr lang="zh-CN" dirty="0"/>
+              <a:t>看不到懂的地方，回讲义对应小节读一遍，再回来对着这页复述一次——能讲出来才算真懂。</a:t>
+            </a:r>
+          </a:p>
+        </p:txBody>
+      </p:sp>
+    </p:spTree>
+  </p:cSld>
+  <p:clrMapOvr>
+    <a:masterClrMapping/>
+  </p:clrMapOvr>
+</p:notes>
+</file>
+
+<file path=ppt/notesSlides/notesSlide6.xml><?xml version="1.0" encoding="utf-8"?>
+<p:notes xmlns:a="http://schemas.openxmlformats.org/drawingml/2006/main" xmlns:p="http://schemas.openxmlformats.org/presentationml/2006/main" xmlns:r="http://schemas.openxmlformats.org/officeDocument/2006/relationships">
+  <p:cSld>
+    <p:spTree>
+      <p:nvGrpSpPr>
+        <p:cNvPr id="1" name=""/>
+        <p:cNvGrpSpPr/>
+        <p:nvPr/>
+      </p:nvGrpSpPr>
+      <p:grpSpPr>
+        <a:xfrm>
+          <a:off x="0" y="0"/>
+          <a:ext cx="0" cy="0"/>
+          <a:chOff x="0" y="0"/>
+          <a:chExt cx="0" cy="0"/>
+        </a:xfrm>
+      </p:grpSpPr>
+      <p:sp>
+        <p:nvSpPr>
+          <p:cNvPr id="2" name="讲课提示"/>
+          <p:cNvSpPr txBox="1"/>
+          <p:nvPr/>
+        </p:nvSpPr>
+        <p:spPr>
+          <a:xfrm>
+            <a:off x="457200" y="457200"/>
+            <a:ext cx="6858000" cy="4800600"/>
+          </a:xfrm>
+          <a:prstGeom prst="rect">
+            <a:avLst/>
+          </a:prstGeom>
+        </p:spPr>
+        <p:txBody>
+          <a:bodyPr wrap="square"/>
+          <a:lstStyle/>
+          <a:p>
+            <a:r>
+              <a:rPr lang="zh-CN" dirty="0"/>
+              <a:t>第 49 节 · 写文件与异常处理</a:t>
+            </a:r>
+          </a:p>
+          <a:p>
+            <a:r>
+              <a:rPr lang="zh-CN" dirty="0"/>
+              <a:t>单元 9 · 文件与异常 · W11</a:t>
+            </a:r>
+          </a:p>
+          <a:p>
+            <a:r>
+              <a:rPr lang="zh-CN" dirty="0"/>
+              <a:t/>
+            </a:r>
+          </a:p>
+          <a:p>
+            <a:r>
+              <a:rPr lang="zh-CN" dirty="0"/>
+              <a:t>学习目标：掌握写文件与 try / except / else / finally，知道 else 的真正用法</a:t>
+            </a:r>
+          </a:p>
+          <a:p>
+            <a:r>
+              <a:rPr lang="zh-CN" dirty="0"/>
+              <a:t/>
+            </a:r>
+          </a:p>
+          <a:p>
+            <a:r>
+              <a:rPr lang="zh-CN" dirty="0"/>
+              <a:t>课堂实操（40 分钟，不看答案）：</a:t>
+            </a:r>
+          </a:p>
+          <a:p>
+            <a:r>
+              <a:rPr lang="zh-CN" dirty="0"/>
+              <a:t>· 故意触发 ValueError 和 FileNotFoundError 并处理</a:t>
+            </a:r>
+          </a:p>
+          <a:p>
+            <a:r>
+              <a:rPr lang="zh-CN" dirty="0"/>
+              <a:t>· 写一个「只在成功时保存文件」的函数演示 else</a:t>
+            </a:r>
+          </a:p>
+          <a:p>
+            <a:r>
+              <a:rPr lang="zh-CN" dirty="0"/>
+              <a:t/>
+            </a:r>
+          </a:p>
+          <a:p>
+            <a:r>
+              <a:rPr lang="zh-CN" dirty="0"/>
+              <a:t>课后作业：</a:t>
+            </a:r>
+          </a:p>
+          <a:p>
+            <a:r>
+              <a:rPr lang="zh-CN" dirty="0"/>
+              <a:t>· 完成动手练习 9-4 ~ 9-6</a:t>
+            </a:r>
+          </a:p>
+          <a:p>
+            <a:r>
+              <a:rPr lang="zh-CN" dirty="0"/>
+              <a:t/>
+            </a:r>
+          </a:p>
+          <a:p>
+            <a:r>
+              <a:rPr lang="zh-CN" dirty="0"/>
+              <a:t>节奏：讲 20 分钟 → 学员自己敲 40 分钟（不看答案）→ 对讲评自查 20 分钟 → 写作业 10 分钟。</a:t>
+            </a:r>
+          </a:p>
+        </p:txBody>
+      </p:sp>
+    </p:spTree>
+  </p:cSld>
+  <p:clrMapOvr>
+    <a:masterClrMapping/>
+  </p:clrMapOvr>
+</p:notes>
+</file>
+
+<file path=ppt/notesSlides/notesSlide7.xml><?xml version="1.0" encoding="utf-8"?>
+<p:notes xmlns:a="http://schemas.openxmlformats.org/drawingml/2006/main" xmlns:p="http://schemas.openxmlformats.org/presentationml/2006/main" xmlns:r="http://schemas.openxmlformats.org/officeDocument/2006/relationships">
+  <p:cSld>
+    <p:spTree>
+      <p:nvGrpSpPr>
+        <p:cNvPr id="1" name=""/>
+        <p:cNvGrpSpPr/>
+        <p:nvPr/>
+      </p:nvGrpSpPr>
+      <p:grpSpPr>
+        <a:xfrm>
+          <a:off x="0" y="0"/>
+          <a:ext cx="0" cy="0"/>
+          <a:chOff x="0" y="0"/>
+          <a:chExt cx="0" cy="0"/>
+        </a:xfrm>
+      </p:grpSpPr>
+      <p:sp>
+        <p:nvSpPr>
+          <p:cNvPr id="2" name="讲课提示"/>
+          <p:cNvSpPr txBox="1"/>
+          <p:nvPr/>
+        </p:nvSpPr>
+        <p:spPr>
+          <a:xfrm>
+            <a:off x="457200" y="457200"/>
+            <a:ext cx="6858000" cy="4800600"/>
+          </a:xfrm>
+          <a:prstGeom prst="rect">
+            <a:avLst/>
+          </a:prstGeom>
+        </p:spPr>
+        <p:txBody>
+          <a:bodyPr wrap="square"/>
+          <a:lstStyle/>
+          <a:p>
+            <a:r>
+              <a:rPr lang="zh-CN" dirty="0"/>
+              <a:t>第 49 节 · 核心知识点：写文件与异常处理</a:t>
+            </a:r>
+          </a:p>
+          <a:p>
+            <a:r>
+              <a:rPr lang="zh-CN" dirty="0"/>
+              <a:t/>
+            </a:r>
+          </a:p>
+          <a:p>
+            <a:r>
+              <a:rPr lang="zh-CN" dirty="0"/>
+              <a:t>讲这一页时：先让学生说出上节课的结论，再逐块讲要点。</a:t>
+            </a:r>
+          </a:p>
+          <a:p>
+            <a:r>
+              <a:rPr lang="zh-CN" dirty="0"/>
+              <a:t>每讲完一块，问一句「这一步如果写错了，报错会长什么样？」——把错误提前讲。</a:t>
+            </a:r>
+          </a:p>
+          <a:p>
+            <a:r>
+              <a:rPr lang="zh-CN" dirty="0"/>
+              <a:t/>
+            </a:r>
+          </a:p>
+          <a:p>
+            <a:r>
+              <a:rPr lang="zh-CN" dirty="0"/>
+              <a:t>本节目标：掌握写文件与 try / except / else / finally，知道 else 的真正用法</a:t>
+            </a:r>
+          </a:p>
+          <a:p>
+            <a:r>
+              <a:rPr lang="zh-CN" dirty="0"/>
+              <a:t/>
+            </a:r>
+          </a:p>
+          <a:p>
+            <a:r>
+              <a:rPr lang="zh-CN" dirty="0"/>
+              <a:t>看不到懂的地方，回讲义对应小节读一遍，再回来对着这页复述一次——能讲出来才算真懂。</a:t>
+            </a:r>
+          </a:p>
+        </p:txBody>
+      </p:sp>
+    </p:spTree>
+  </p:cSld>
+  <p:clrMapOvr>
+    <a:masterClrMapping/>
+  </p:clrMapOvr>
+</p:notes>
+</file>
+
+<file path=ppt/notesSlides/notesSlide8.xml><?xml version="1.0" encoding="utf-8"?>
+<p:notes xmlns:a="http://schemas.openxmlformats.org/drawingml/2006/main" xmlns:p="http://schemas.openxmlformats.org/presentationml/2006/main" xmlns:r="http://schemas.openxmlformats.org/officeDocument/2006/relationships">
+  <p:cSld>
+    <p:spTree>
+      <p:nvGrpSpPr>
+        <p:cNvPr id="1" name=""/>
+        <p:cNvGrpSpPr/>
+        <p:nvPr/>
+      </p:nvGrpSpPr>
+      <p:grpSpPr>
+        <a:xfrm>
+          <a:off x="0" y="0"/>
+          <a:ext cx="0" cy="0"/>
+          <a:chOff x="0" y="0"/>
+          <a:chExt cx="0" cy="0"/>
+        </a:xfrm>
+      </p:grpSpPr>
+      <p:sp>
+        <p:nvSpPr>
+          <p:cNvPr id="2" name="讲课提示"/>
+          <p:cNvSpPr txBox="1"/>
+          <p:nvPr/>
+        </p:nvSpPr>
+        <p:spPr>
+          <a:xfrm>
+            <a:off x="457200" y="457200"/>
+            <a:ext cx="6858000" cy="4800600"/>
+          </a:xfrm>
+          <a:prstGeom prst="rect">
+            <a:avLst/>
+          </a:prstGeom>
+        </p:spPr>
+        <p:txBody>
+          <a:bodyPr wrap="square"/>
+          <a:lstStyle/>
+          <a:p>
+            <a:r>
+              <a:rPr lang="zh-CN" dirty="0"/>
+              <a:t>第 50 节 · JSON / CSV 与持久化实战</a:t>
+            </a:r>
+          </a:p>
+          <a:p>
+            <a:r>
+              <a:rPr lang="zh-CN" dirty="0"/>
+              <a:t>单元 9 · 文件与异常 · W11</a:t>
+            </a:r>
+          </a:p>
+          <a:p>
+            <a:r>
+              <a:rPr lang="zh-CN" dirty="0"/>
+              <a:t/>
+            </a:r>
+          </a:p>
+          <a:p>
+            <a:r>
+              <a:rPr lang="zh-CN" dirty="0"/>
+              <a:t>学习目标：能用 JSON 让数据被记住，理解它和嵌套结构的关系</a:t>
+            </a:r>
+          </a:p>
+          <a:p>
+            <a:r>
+              <a:rPr lang="zh-CN" dirty="0"/>
+              <a:t/>
+            </a:r>
+          </a:p>
+          <a:p>
+            <a:r>
+              <a:rPr lang="zh-CN" dirty="0"/>
+              <a:t>课堂实操（40 分钟，不看答案）：</a:t>
+            </a:r>
+          </a:p>
+          <a:p>
+            <a:r>
+              <a:rPr lang="zh-CN" dirty="0"/>
+              <a:t>· 把嵌套字典存成 JSON 再读回来</a:t>
+            </a:r>
+          </a:p>
+          <a:p>
+            <a:r>
+              <a:rPr lang="zh-CN" dirty="0"/>
+              <a:t>· 读写一个 CSV 表格</a:t>
+            </a:r>
+          </a:p>
+          <a:p>
+            <a:r>
+              <a:rPr lang="zh-CN" dirty="0"/>
+              <a:t/>
+            </a:r>
+          </a:p>
+          <a:p>
+            <a:r>
+              <a:rPr lang="zh-CN" dirty="0"/>
+              <a:t>课后作业：</a:t>
+            </a:r>
+          </a:p>
+          <a:p>
+            <a:r>
+              <a:rPr lang="zh-CN" dirty="0"/>
+              <a:t>· ★ 动手项目 10.1–10.13 学习笔记管理</a:t>
+            </a:r>
+          </a:p>
+          <a:p>
+            <a:r>
+              <a:rPr lang="zh-CN" dirty="0"/>
+              <a:t/>
+            </a:r>
+          </a:p>
+          <a:p>
+            <a:r>
+              <a:rPr lang="zh-CN" dirty="0"/>
+              <a:t>节奏：讲 20 分钟 → 学员自己敲 40 分钟（不看答案）→ 对讲评自查 20 分钟 → 写作业 10 分钟。</a:t>
+            </a:r>
+          </a:p>
+        </p:txBody>
+      </p:sp>
+    </p:spTree>
+  </p:cSld>
+  <p:clrMapOvr>
+    <a:masterClrMapping/>
+  </p:clrMapOvr>
+</p:notes>
+</file>
+
+<file path=ppt/notesSlides/notesSlide9.xml><?xml version="1.0" encoding="utf-8"?>
+<p:notes xmlns:a="http://schemas.openxmlformats.org/drawingml/2006/main" xmlns:p="http://schemas.openxmlformats.org/presentationml/2006/main" xmlns:r="http://schemas.openxmlformats.org/officeDocument/2006/relationships">
+  <p:cSld>
+    <p:spTree>
+      <p:nvGrpSpPr>
+        <p:cNvPr id="1" name=""/>
+        <p:cNvGrpSpPr/>
+        <p:nvPr/>
+      </p:nvGrpSpPr>
+      <p:grpSpPr>
+        <a:xfrm>
+          <a:off x="0" y="0"/>
+          <a:ext cx="0" cy="0"/>
+          <a:chOff x="0" y="0"/>
+          <a:chExt cx="0" cy="0"/>
+        </a:xfrm>
+      </p:grpSpPr>
+      <p:sp>
+        <p:nvSpPr>
+          <p:cNvPr id="2" name="讲课提示"/>
+          <p:cNvSpPr txBox="1"/>
+          <p:nvPr/>
+        </p:nvSpPr>
+        <p:spPr>
+          <a:xfrm>
+            <a:off x="457200" y="457200"/>
+            <a:ext cx="6858000" cy="4800600"/>
+          </a:xfrm>
+          <a:prstGeom prst="rect">
+            <a:avLst/>
+          </a:prstGeom>
+        </p:spPr>
+        <p:txBody>
+          <a:bodyPr wrap="square"/>
+          <a:lstStyle/>
+          <a:p>
+            <a:r>
+              <a:rPr lang="zh-CN" dirty="0"/>
+              <a:t>第 50 节 · 核心知识点：JSON / CSV 与持久化实战</a:t>
+            </a:r>
+          </a:p>
+          <a:p>
+            <a:r>
+              <a:rPr lang="zh-CN" dirty="0"/>
+              <a:t/>
+            </a:r>
+          </a:p>
+          <a:p>
+            <a:r>
+              <a:rPr lang="zh-CN" dirty="0"/>
+              <a:t>讲这一页时：先让学生说出上节课的结论，再逐块讲要点。</a:t>
+            </a:r>
+          </a:p>
+          <a:p>
+            <a:r>
+              <a:rPr lang="zh-CN" dirty="0"/>
+              <a:t>每讲完一块，问一句「这一步如果写错了，报错会长什么样？」——把错误提前讲。</a:t>
+            </a:r>
+          </a:p>
+          <a:p>
+            <a:r>
+              <a:rPr lang="zh-CN" dirty="0"/>
+              <a:t/>
+            </a:r>
+          </a:p>
+          <a:p>
+            <a:r>
+              <a:rPr lang="zh-CN" dirty="0"/>
+              <a:t>本节目标：能用 JSON 让数据被记住，理解它和嵌套结构的关系</a:t>
+            </a:r>
+          </a:p>
+          <a:p>
+            <a:r>
+              <a:rPr lang="zh-CN" dirty="0"/>
+              <a:t/>
+            </a:r>
+          </a:p>
+          <a:p>
+            <a:r>
+              <a:rPr lang="zh-CN" dirty="0"/>
+              <a:t>看不到懂的地方，回讲义对应小节读一遍，再回来对着这页复述一次——能讲出来才算真懂。</a:t>
+            </a:r>
+          </a:p>
+        </p:txBody>
+      </p:sp>
+    </p:spTree>
+  </p:cSld>
+  <p:clrMapOvr>
+    <a:masterClrMapping/>
+  </p:clrMapOvr>
+</p:notes>
 </file>
 
 <file path=ppt/slideLayouts/slideLayout1.xml><?xml version="1.0" encoding="utf-8"?>
